--- a/presentation/Rossmann_presentation.pptx
+++ b/presentation/Rossmann_presentation.pptx
@@ -5,7 +5,7 @@
     <p:sldMasterId id="2147483648" r:id="rId1"/>
   </p:sldMasterIdLst>
   <p:notesMasterIdLst>
-    <p:notesMasterId r:id="rId12"/>
+    <p:notesMasterId r:id="rId13"/>
   </p:notesMasterIdLst>
   <p:sldIdLst>
     <p:sldId id="256" r:id="rId2"/>
@@ -17,7 +17,8 @@
     <p:sldId id="271" r:id="rId8"/>
     <p:sldId id="272" r:id="rId9"/>
     <p:sldId id="273" r:id="rId10"/>
-    <p:sldId id="274" r:id="rId11"/>
+    <p:sldId id="276" r:id="rId11"/>
+    <p:sldId id="274" r:id="rId12"/>
   </p:sldIdLst>
   <p:sldSz cx="12192000" cy="6858000"/>
   <p:notesSz cx="6858000" cy="9144000"/>
@@ -2945,7 +2946,7 @@
           <a:p>
             <a:fld id="{39CF6428-01B2-4553-BA04-947D506BB632}" type="datetimeFigureOut">
               <a:rPr lang="pl-PL" smtClean="0"/>
-              <a:t>30.07.2026</a:t>
+              <a:t>01.08.2026</a:t>
             </a:fld>
             <a:endParaRPr lang="pl-PL"/>
           </a:p>
@@ -3258,26 +3259,97 @@
           <a:p>
             <a:r>
               <a:rPr lang="pl-PL" dirty="0"/>
-              <a:t>Na początku zdefiniowaliśmy problem biznesowy, z którym mierzyła się sieć Rossmann. Brak dokładnych prognoz sprzedaży powoduje zarówno braki towarów w okresach zwiększonego popytu, jak i nadmierne zapasy w spokojniejszych okresach. W obu przypadkach przekłada się to na wyższe koszty i mniej efektywne zarządzanie magazynem.</a:t>
-            </a:r>
+              <a:t>Problem biznesowy - brak dokładnych prognoz sprzedaży powoduje zarówno braki towarów w okresach zwiększonego popytu, jak i nadmierne zapasy w spokojniejszych okresach. W obu przypadkach przekłada się to na wyższe koszty i mniej efektywne zarządzanie magazynem.</a:t>
+            </a:r>
+          </a:p>
+          <a:p>
+            <a:endParaRPr lang="pl-PL" dirty="0"/>
           </a:p>
           <a:p>
             <a:r>
               <a:rPr lang="pl-PL" dirty="0"/>
-              <a:t>Celem naszego projektu było stworzenie modelu Machine Learning, który będzie prognozował sprzedaż z 48-dniowym wyprzedzeniem dla ponad 1100 sklepów. Takie prognozy mogą wspierać planowanie dostaw oraz lepsze zarządzanie zapasami.</a:t>
-            </a:r>
+              <a:t>Celem naszego projektu było stworzenie modelu Machine Learning, który będzie prognozował sprzedaż z 48-dniowym wyprzedzeniem – celem wsparcie planowania dostaw oraz lepsze zarządzanie zapasami.</a:t>
+            </a:r>
+          </a:p>
+          <a:p>
+            <a:endParaRPr lang="pl-PL" dirty="0"/>
           </a:p>
           <a:p>
             <a:r>
               <a:rPr lang="pl-PL" dirty="0"/>
-              <a:t>Skuteczność modeli ocenialiśmy za pomocą metryk MAE oraz RMSPE. Naszym celem było uzyskanie jak najniższego błędu prognozy w porównaniu z prostszymi modelami bazowymi.</a:t>
-            </a:r>
+              <a:t>Skuteczność modeli ocenialiśmy za pomocą metryk MAE oraz RMSPE. RMSPE liczy błąd procentowy i </a:t>
+            </a:r>
+            <a:r>
+              <a:rPr lang="pl-PL" b="1" dirty="0"/>
+              <a:t>podnosi go do kwadratu, przez co wyjątkowo surowo karze duże odchylenia</a:t>
+            </a:r>
+            <a:r>
+              <a:rPr lang="pl-PL" dirty="0"/>
+              <a:t>. W sieci handlowej wolimy model, który na każdym sklepie myli się stabilnie o 8%, niż taki, który na większości trafi idealnie, a na jednym pomyli się o 200% i doprowadzi do braku towaru lub przewymiarowania magazynu.</a:t>
+            </a:r>
+          </a:p>
+          <a:p>
+            <a:endParaRPr lang="pl-PL" dirty="0"/>
+          </a:p>
+          <a:p>
+            <a:pPr marL="0" marR="0" lvl="0" indent="0" algn="l" defTabSz="914400" rtl="0" eaLnBrk="1" fontAlgn="auto" latinLnBrk="0" hangingPunct="1">
+              <a:lnSpc>
+                <a:spcPct val="100000"/>
+              </a:lnSpc>
+              <a:spcBef>
+                <a:spcPts val="0"/>
+              </a:spcBef>
+              <a:spcAft>
+                <a:spcPts val="0"/>
+              </a:spcAft>
+              <a:buClrTx/>
+              <a:buSzTx/>
+              <a:buFontTx/>
+              <a:buNone/>
+              <a:tabLst/>
+              <a:defRPr/>
+            </a:pPr>
+            <a:r>
+              <a:rPr lang="pl-PL" b="1" dirty="0">
+                <a:solidFill>
+                  <a:srgbClr val="464646"/>
+                </a:solidFill>
+              </a:rPr>
+              <a:t>MAE</a:t>
+            </a:r>
+            <a:r>
+              <a:rPr lang="pl-PL" dirty="0">
+                <a:solidFill>
+                  <a:srgbClr val="464646"/>
+                </a:solidFill>
+              </a:rPr>
+              <a:t> – średni błąd prognozy - b</a:t>
+            </a:r>
+            <a:r>
+              <a:rPr lang="pl-PL" dirty="0"/>
+              <a:t>ardzo prosta metryka do wytłumaczenia biznesowi - mówi, o ile średnio (w kwocie) model pomylił się na pojedynczym sklepie w danym dniu.</a:t>
+            </a:r>
+          </a:p>
+          <a:p>
+            <a:endParaRPr lang="pl-PL" dirty="0"/>
+          </a:p>
+          <a:p>
+            <a:r>
+              <a:rPr lang="pl-PL" dirty="0"/>
+              <a:t>Celem było uzyskanie jak najniższego błędu prognozy w porównaniu z prostszymi modelami bazowymi.</a:t>
+            </a:r>
+          </a:p>
+          <a:p>
+            <a:endParaRPr lang="pl-PL" dirty="0"/>
           </a:p>
           <a:p>
             <a:r>
               <a:rPr lang="pl-PL" dirty="0"/>
               <a:t>Po prawej stronie pokazaliśmy uproszczony schemat całego procesu – od danych historycznych, przez model Machine Learning, aż do prognozy sprzedaży, która wspiera podejmowanie decyzji dotyczących planowania dostaw</a:t>
             </a:r>
+          </a:p>
+          <a:p>
+            <a:endParaRPr lang="pl-PL" dirty="0"/>
           </a:p>
           <a:p>
             <a:endParaRPr lang="pl-PL" dirty="0"/>
@@ -3311,6 +3383,114 @@
     <p:extLst>
       <p:ext uri="{BB962C8B-B14F-4D97-AF65-F5344CB8AC3E}">
         <p14:creationId xmlns:p14="http://schemas.microsoft.com/office/powerpoint/2010/main" val="1713105258"/>
+      </p:ext>
+    </p:extLst>
+  </p:cSld>
+  <p:clrMapOvr>
+    <a:masterClrMapping/>
+  </p:clrMapOvr>
+</p:notes>
+</file>
+
+<file path=ppt/notesSlides/notesSlide10.xml><?xml version="1.0" encoding="utf-8"?>
+<p:notes xmlns:a="http://schemas.openxmlformats.org/drawingml/2006/main" xmlns:r="http://schemas.openxmlformats.org/officeDocument/2006/relationships" xmlns:p="http://schemas.openxmlformats.org/presentationml/2006/main">
+  <p:cSld>
+    <p:spTree>
+      <p:nvGrpSpPr>
+        <p:cNvPr id="1" name="">
+          <a:extLst>
+            <a:ext uri="{FF2B5EF4-FFF2-40B4-BE49-F238E27FC236}">
+              <a16:creationId xmlns:a16="http://schemas.microsoft.com/office/drawing/2014/main" id="{8730DE66-27C6-95C3-95F6-18CCA5B6AB58}"/>
+            </a:ext>
+          </a:extLst>
+        </p:cNvPr>
+        <p:cNvGrpSpPr/>
+        <p:nvPr/>
+      </p:nvGrpSpPr>
+      <p:grpSpPr>
+        <a:xfrm>
+          <a:off x="0" y="0"/>
+          <a:ext cx="0" cy="0"/>
+          <a:chOff x="0" y="0"/>
+          <a:chExt cx="0" cy="0"/>
+        </a:xfrm>
+      </p:grpSpPr>
+      <p:sp>
+        <p:nvSpPr>
+          <p:cNvPr id="2" name="Symbol zastępczy obrazu slajdu 1">
+            <a:extLst>
+              <a:ext uri="{FF2B5EF4-FFF2-40B4-BE49-F238E27FC236}">
+                <a16:creationId xmlns:a16="http://schemas.microsoft.com/office/drawing/2014/main" id="{CE23E1C2-5FF7-9DC5-588A-B7AFFA1D93ED}"/>
+              </a:ext>
+            </a:extLst>
+          </p:cNvPr>
+          <p:cNvSpPr>
+            <a:spLocks noGrp="1" noRot="1" noChangeAspect="1"/>
+          </p:cNvSpPr>
+          <p:nvPr>
+            <p:ph type="sldImg"/>
+          </p:nvPr>
+        </p:nvSpPr>
+        <p:spPr/>
+      </p:sp>
+      <p:sp>
+        <p:nvSpPr>
+          <p:cNvPr id="3" name="Symbol zastępczy notatek 2">
+            <a:extLst>
+              <a:ext uri="{FF2B5EF4-FFF2-40B4-BE49-F238E27FC236}">
+                <a16:creationId xmlns:a16="http://schemas.microsoft.com/office/drawing/2014/main" id="{82D9BA5C-C9E7-89A1-1C50-54DE66B477FC}"/>
+              </a:ext>
+            </a:extLst>
+          </p:cNvPr>
+          <p:cNvSpPr>
+            <a:spLocks noGrp="1"/>
+          </p:cNvSpPr>
+          <p:nvPr>
+            <p:ph type="body" idx="1"/>
+          </p:nvPr>
+        </p:nvSpPr>
+        <p:spPr/>
+        <p:txBody>
+          <a:bodyPr/>
+          <a:lstStyle/>
+          <a:p>
+            <a:endParaRPr lang="pl-PL" dirty="0"/>
+          </a:p>
+        </p:txBody>
+      </p:sp>
+      <p:sp>
+        <p:nvSpPr>
+          <p:cNvPr id="4" name="Symbol zastępczy numeru slajdu 3">
+            <a:extLst>
+              <a:ext uri="{FF2B5EF4-FFF2-40B4-BE49-F238E27FC236}">
+                <a16:creationId xmlns:a16="http://schemas.microsoft.com/office/drawing/2014/main" id="{7513C7EC-8A38-A139-704C-9A467CA18694}"/>
+              </a:ext>
+            </a:extLst>
+          </p:cNvPr>
+          <p:cNvSpPr>
+            <a:spLocks noGrp="1"/>
+          </p:cNvSpPr>
+          <p:nvPr>
+            <p:ph type="sldNum" sz="quarter" idx="5"/>
+          </p:nvPr>
+        </p:nvSpPr>
+        <p:spPr/>
+        <p:txBody>
+          <a:bodyPr/>
+          <a:lstStyle/>
+          <a:p>
+            <a:fld id="{26395FDD-6113-40F9-B104-49A78CEF58C7}" type="slidenum">
+              <a:rPr lang="pl-PL" smtClean="0"/>
+              <a:t>11</a:t>
+            </a:fld>
+            <a:endParaRPr lang="pl-PL"/>
+          </a:p>
+        </p:txBody>
+      </p:sp>
+    </p:spTree>
+    <p:extLst>
+      <p:ext uri="{BB962C8B-B14F-4D97-AF65-F5344CB8AC3E}">
+        <p14:creationId xmlns:p14="http://schemas.microsoft.com/office/powerpoint/2010/main" val="1366705248"/>
       </p:ext>
     </p:extLst>
   </p:cSld>
@@ -3388,10 +3568,16 @@
             </a:r>
           </a:p>
           <a:p>
+            <a:endParaRPr lang="pl-PL" dirty="0"/>
+          </a:p>
+          <a:p>
             <a:r>
               <a:rPr lang="pl-PL" dirty="0"/>
               <a:t>W analizie EDA zauważyliśmy wyraźną sezonowość. Sprzedaż zmieniała się zarówno w zależności od dnia tygodnia, jak i miesiąca, a największe wartości występowały w okresie świątecznym. Dodatkowo promocje miały bardzo duży wpływ na poziom sprzedaży.</a:t>
             </a:r>
+          </a:p>
+          <a:p>
+            <a:endParaRPr lang="pl-PL" dirty="0"/>
           </a:p>
           <a:p>
             <a:r>
@@ -3495,58 +3681,309 @@
         </p:nvSpPr>
         <p:spPr/>
       </p:sp>
-      <p:sp>
-        <p:nvSpPr>
-          <p:cNvPr id="3" name="Symbol zastępczy notatek 2">
-            <a:extLst>
-              <a:ext uri="{FF2B5EF4-FFF2-40B4-BE49-F238E27FC236}">
-                <a16:creationId xmlns:a16="http://schemas.microsoft.com/office/drawing/2014/main" id="{2BD961F1-2200-100F-181F-CF791624C5CE}"/>
-              </a:ext>
-            </a:extLst>
-          </p:cNvPr>
-          <p:cNvSpPr>
-            <a:spLocks noGrp="1"/>
-          </p:cNvSpPr>
-          <p:nvPr>
-            <p:ph type="body" idx="1"/>
-          </p:nvPr>
-        </p:nvSpPr>
-        <p:spPr/>
-        <p:txBody>
-          <a:bodyPr/>
-          <a:lstStyle/>
-          <a:p>
-            <a:r>
-              <a:rPr lang="pl-PL" dirty="0"/>
-              <a:t>Dane zostały podzielone chronologicznie z wykorzystaniem punktu odcięcia 15 czerwca 2015 roku. Dzięki temu model był trenowany wyłącznie na danych historycznych, co pozwoliło uniknąć zjawiska Data </a:t>
-            </a:r>
-            <a:r>
-              <a:rPr lang="pl-PL" dirty="0" err="1"/>
-              <a:t>Leakage</a:t>
-            </a:r>
-            <a:r>
-              <a:rPr lang="pl-PL" dirty="0"/>
-              <a:t>. Do przygotowania danych wykorzystaliśmy </a:t>
-            </a:r>
-            <a:r>
-              <a:rPr lang="pl-PL" dirty="0" err="1"/>
-              <a:t>pipeline</a:t>
-            </a:r>
-            <a:r>
-              <a:rPr lang="pl-PL" dirty="0"/>
-              <a:t> zbudowany z użyciem </a:t>
-            </a:r>
-            <a:r>
-              <a:rPr lang="pl-PL" b="1" dirty="0" err="1"/>
-              <a:t>ColumnTransformer</a:t>
-            </a:r>
-            <a:r>
-              <a:rPr lang="pl-PL" dirty="0"/>
-              <a:t>, który automatyzował transformację danych i zapewniał jednakowy sposób ich przetwarzania dla wszystkich modeli.</a:t>
-            </a:r>
-          </a:p>
-        </p:txBody>
-      </p:sp>
+      <mc:AlternateContent xmlns:mc="http://schemas.openxmlformats.org/markup-compatibility/2006" xmlns:a14="http://schemas.microsoft.com/office/drawing/2010/main">
+        <mc:Choice Requires="a14">
+          <p:sp>
+            <p:nvSpPr>
+              <p:cNvPr id="3" name="Symbol zastępczy notatek 2">
+                <a:extLst>
+                  <a:ext uri="{FF2B5EF4-FFF2-40B4-BE49-F238E27FC236}">
+                    <a16:creationId xmlns:a16="http://schemas.microsoft.com/office/drawing/2014/main" id="{2BD961F1-2200-100F-181F-CF791624C5CE}"/>
+                  </a:ext>
+                </a:extLst>
+              </p:cNvPr>
+              <p:cNvSpPr>
+                <a:spLocks noGrp="1"/>
+              </p:cNvSpPr>
+              <p:nvPr>
+                <p:ph type="body" idx="1"/>
+              </p:nvPr>
+            </p:nvSpPr>
+            <p:spPr/>
+            <p:txBody>
+              <a:bodyPr/>
+              <a:lstStyle/>
+              <a:p>
+                <a:r>
+                  <a:rPr lang="pl-PL" dirty="0"/>
+                  <a:t>Dane zostały podzielone chronologicznie z wykorzystaniem punktu odcięcia 15 czerwca 2015 roku. </a:t>
+                </a:r>
+              </a:p>
+              <a:p>
+                <a:endParaRPr lang="pl-PL" dirty="0"/>
+              </a:p>
+              <a:p>
+                <a:r>
+                  <a:rPr lang="pl-PL" dirty="0"/>
+                  <a:t>Dzięki temu model był trenowany wyłącznie na danych historycznych, co pozwoliło uniknąć zjawiska Data </a:t>
+                </a:r>
+                <a:r>
+                  <a:rPr lang="pl-PL" dirty="0" err="1"/>
+                  <a:t>Leakage</a:t>
+                </a:r>
+                <a:r>
+                  <a:rPr lang="pl-PL" dirty="0"/>
+                  <a:t>. </a:t>
+                </a:r>
+              </a:p>
+              <a:p>
+                <a:endParaRPr lang="pl-PL" dirty="0"/>
+              </a:p>
+              <a:p>
+                <a:r>
+                  <a:rPr lang="pl-PL" dirty="0"/>
+                  <a:t>Do przygotowania danych wykorzystaliśmy </a:t>
+                </a:r>
+                <a:r>
+                  <a:rPr lang="pl-PL" dirty="0" err="1"/>
+                  <a:t>pipeline</a:t>
+                </a:r>
+                <a:r>
+                  <a:rPr lang="pl-PL" dirty="0"/>
+                  <a:t> zbudowany z użyciem </a:t>
+                </a:r>
+                <a:r>
+                  <a:rPr lang="pl-PL" b="1" dirty="0" err="1"/>
+                  <a:t>ColumnTransformer</a:t>
+                </a:r>
+                <a:r>
+                  <a:rPr lang="pl-PL" dirty="0"/>
+                  <a:t>, który automatyzował transformację danych i zapewniał jednakowy sposób ich przetwarzania dla wszystkich modeli. W naszym </a:t>
+                </a:r>
+                <a:r>
+                  <a:rPr lang="pl-PL" sz="1200" kern="1200" dirty="0" err="1">
+                    <a:solidFill>
+                      <a:schemeClr val="tx1"/>
+                    </a:solidFill>
+                    <a:effectLst/>
+                    <a:latin typeface="+mn-lt"/>
+                    <a:ea typeface="+mn-ea"/>
+                    <a:cs typeface="+mn-cs"/>
+                  </a:rPr>
+                  <a:t>ColumnTransformerze</a:t>
+                </a:r>
+                <a:r>
+                  <a:rPr lang="pl-PL" dirty="0"/>
+                  <a:t> połączyliśmy dwa główne procesy: </a:t>
+                </a:r>
+                <a:r>
+                  <a:rPr lang="pl-PL" sz="1200" b="1" kern="1200" dirty="0" err="1">
+                    <a:solidFill>
+                      <a:schemeClr val="tx1"/>
+                    </a:solidFill>
+                    <a:effectLst/>
+                    <a:latin typeface="+mn-lt"/>
+                    <a:ea typeface="+mn-ea"/>
+                    <a:cs typeface="+mn-cs"/>
+                  </a:rPr>
+                  <a:t>OneHotEncoder</a:t>
+                </a:r>
+                <a:r>
+                  <a:rPr lang="pl-PL" dirty="0"/>
+                  <a:t> zamienił zmienne kategoryczne (np. typ sklepu, asortyment, święta) na binarne kolumny </a:t>
+                </a:r>
+                <a14:m>
+                  <m:oMath xmlns:m="http://schemas.openxmlformats.org/officeDocument/2006/math">
+                    <m:r>
+                      <a:rPr lang="pl-PL" sz="1200" kern="1200" smtClean="0">
+                        <a:solidFill>
+                          <a:schemeClr val="tx1"/>
+                        </a:solidFill>
+                        <a:latin typeface="Cambria Math" panose="02040503050406030204" pitchFamily="18" charset="0"/>
+                        <a:ea typeface="+mn-ea"/>
+                        <a:cs typeface="+mn-cs"/>
+                      </a:rPr>
+                      <m:t>0</m:t>
+                    </m:r>
+                    <m:r>
+                      <a:rPr lang="pl-PL" sz="1200" i="0" kern="1200">
+                        <a:solidFill>
+                          <a:schemeClr val="tx1"/>
+                        </a:solidFill>
+                        <a:latin typeface="Cambria Math" panose="02040503050406030204" pitchFamily="18" charset="0"/>
+                        <a:ea typeface="+mn-ea"/>
+                        <a:cs typeface="+mn-cs"/>
+                      </a:rPr>
+                      <m:t>/1</m:t>
+                    </m:r>
+                  </m:oMath>
+                </a14:m>
+                <a:r>
+                  <a:rPr lang="pl-PL" dirty="0"/>
+                  <a:t>, a </a:t>
+                </a:r>
+                <a:r>
+                  <a:rPr lang="pl-PL" sz="1200" b="1" kern="1200" dirty="0" err="1">
+                    <a:solidFill>
+                      <a:schemeClr val="tx1"/>
+                    </a:solidFill>
+                    <a:effectLst/>
+                    <a:latin typeface="+mn-lt"/>
+                    <a:ea typeface="+mn-ea"/>
+                    <a:cs typeface="+mn-cs"/>
+                  </a:rPr>
+                  <a:t>StandardScaler</a:t>
+                </a:r>
+                <a:r>
+                  <a:rPr lang="pl-PL" dirty="0"/>
+                  <a:t> wyrównał skalę dla zmiennych numerycznych oraz wygenerowanych </a:t>
+                </a:r>
+                <a:r>
+                  <a:rPr lang="pl-PL" dirty="0" err="1"/>
+                  <a:t>lagów</a:t>
+                </a:r>
+                <a:r>
+                  <a:rPr lang="pl-PL" dirty="0"/>
+                  <a:t> i statystyk kroczących."</a:t>
+                </a:r>
+              </a:p>
+            </p:txBody>
+          </p:sp>
+        </mc:Choice>
+        <mc:Fallback xmlns="">
+          <p:sp>
+            <p:nvSpPr>
+              <p:cNvPr id="3" name="Symbol zastępczy notatek 2">
+                <a:extLst>
+                  <a:ext uri="{FF2B5EF4-FFF2-40B4-BE49-F238E27FC236}">
+                    <a16:creationId xmlns:a16="http://schemas.microsoft.com/office/drawing/2014/main" id="{2BD961F1-2200-100F-181F-CF791624C5CE}"/>
+                  </a:ext>
+                </a:extLst>
+              </p:cNvPr>
+              <p:cNvSpPr>
+                <a:spLocks noGrp="1"/>
+              </p:cNvSpPr>
+              <p:nvPr>
+                <p:ph type="body" idx="1"/>
+              </p:nvPr>
+            </p:nvSpPr>
+            <p:spPr/>
+            <p:txBody>
+              <a:bodyPr/>
+              <a:lstStyle/>
+              <a:p>
+                <a:r>
+                  <a:rPr lang="pl-PL" dirty="0"/>
+                  <a:t>Dane zostały podzielone chronologicznie z wykorzystaniem punktu odcięcia 15 czerwca 2015 roku. </a:t>
+                </a:r>
+              </a:p>
+              <a:p>
+                <a:endParaRPr lang="pl-PL" dirty="0"/>
+              </a:p>
+              <a:p>
+                <a:r>
+                  <a:rPr lang="pl-PL" dirty="0"/>
+                  <a:t>Dzięki temu model był trenowany wyłącznie na danych historycznych, co pozwoliło uniknąć zjawiska Data </a:t>
+                </a:r>
+                <a:r>
+                  <a:rPr lang="pl-PL" dirty="0" err="1"/>
+                  <a:t>Leakage</a:t>
+                </a:r>
+                <a:r>
+                  <a:rPr lang="pl-PL" dirty="0"/>
+                  <a:t>. </a:t>
+                </a:r>
+              </a:p>
+              <a:p>
+                <a:endParaRPr lang="pl-PL" dirty="0"/>
+              </a:p>
+              <a:p>
+                <a:r>
+                  <a:rPr lang="pl-PL" dirty="0"/>
+                  <a:t>Do przygotowania danych wykorzystaliśmy </a:t>
+                </a:r>
+                <a:r>
+                  <a:rPr lang="pl-PL" dirty="0" err="1"/>
+                  <a:t>pipeline</a:t>
+                </a:r>
+                <a:r>
+                  <a:rPr lang="pl-PL" dirty="0"/>
+                  <a:t> zbudowany z użyciem </a:t>
+                </a:r>
+                <a:r>
+                  <a:rPr lang="pl-PL" b="1" dirty="0" err="1"/>
+                  <a:t>ColumnTransformer</a:t>
+                </a:r>
+                <a:r>
+                  <a:rPr lang="pl-PL" dirty="0"/>
+                  <a:t>, który automatyzował transformację danych i zapewniał jednakowy sposób ich przetwarzania dla wszystkich modeli. W naszym </a:t>
+                </a:r>
+                <a:r>
+                  <a:rPr lang="pl-PL" sz="1200" kern="1200" dirty="0" err="1">
+                    <a:solidFill>
+                      <a:schemeClr val="tx1"/>
+                    </a:solidFill>
+                    <a:effectLst/>
+                    <a:latin typeface="+mn-lt"/>
+                    <a:ea typeface="+mn-ea"/>
+                    <a:cs typeface="+mn-cs"/>
+                  </a:rPr>
+                  <a:t>ColumnTransformerze</a:t>
+                </a:r>
+                <a:r>
+                  <a:rPr lang="pl-PL" dirty="0"/>
+                  <a:t> połączyliśmy dwa główne procesy: </a:t>
+                </a:r>
+                <a:r>
+                  <a:rPr lang="pl-PL" sz="1200" b="1" kern="1200" dirty="0" err="1">
+                    <a:solidFill>
+                      <a:schemeClr val="tx1"/>
+                    </a:solidFill>
+                    <a:effectLst/>
+                    <a:latin typeface="+mn-lt"/>
+                    <a:ea typeface="+mn-ea"/>
+                    <a:cs typeface="+mn-cs"/>
+                  </a:rPr>
+                  <a:t>OneHotEncoder</a:t>
+                </a:r>
+                <a:r>
+                  <a:rPr lang="pl-PL" dirty="0"/>
+                  <a:t> zamienił zmienne kategoryczne (np. typ sklepu, asortyment, święta) na binarne kolumny </a:t>
+                </a:r>
+                <a:r>
+                  <a:rPr lang="pl-PL" sz="1200" i="0" kern="1200">
+                    <a:solidFill>
+                      <a:schemeClr val="tx1"/>
+                    </a:solidFill>
+                    <a:latin typeface="+mn-lt"/>
+                    <a:ea typeface="+mn-ea"/>
+                    <a:cs typeface="+mn-cs"/>
+                  </a:rPr>
+                  <a:t>0/1</a:t>
+                </a:r>
+                <a:r>
+                  <a:rPr lang="pl-PL" dirty="0"/>
+                  <a:t>, a </a:t>
+                </a:r>
+                <a:r>
+                  <a:rPr lang="pl-PL" sz="1200" b="1" kern="1200" dirty="0" err="1">
+                    <a:solidFill>
+                      <a:schemeClr val="tx1"/>
+                    </a:solidFill>
+                    <a:effectLst/>
+                    <a:latin typeface="+mn-lt"/>
+                    <a:ea typeface="+mn-ea"/>
+                    <a:cs typeface="+mn-cs"/>
+                  </a:rPr>
+                  <a:t>StandardScaler</a:t>
+                </a:r>
+                <a:r>
+                  <a:rPr lang="pl-PL" dirty="0"/>
+                  <a:t> wyrównał skalę dla zmiennych numerycznych oraz wygenerowanych </a:t>
+                </a:r>
+                <a:r>
+                  <a:rPr lang="pl-PL" dirty="0" err="1"/>
+                  <a:t>lagów</a:t>
+                </a:r>
+                <a:r>
+                  <a:rPr lang="pl-PL" dirty="0"/>
+                  <a:t> i statystyk kroczących."</a:t>
+                </a:r>
+              </a:p>
+            </p:txBody>
+          </p:sp>
+        </mc:Fallback>
+      </mc:AlternateContent>
       <p:sp>
         <p:nvSpPr>
           <p:cNvPr id="4" name="Symbol zastępczy numeru slajdu 3">
@@ -3665,12 +4102,18 @@
             </a:r>
           </a:p>
           <a:p>
+            <a:endParaRPr lang="pl-PL" dirty="0"/>
+          </a:p>
+          <a:p>
             <a:r>
               <a:rPr lang="pl-PL" dirty="0"/>
               <a:t>Następnie sprawdziliśmy prosty model heurystyczny, wykorzystujący średnią sprzedaż dla konkretnego sklepu i dnia tygodnia. Pozwoliło to uwzględnić podstawowe wzorce występujące w danych.</a:t>
             </a:r>
           </a:p>
           <a:p>
+            <a:endParaRPr lang="pl-PL" dirty="0"/>
+          </a:p>
+          <a:p>
             <a:r>
               <a:rPr lang="pl-PL" dirty="0"/>
               <a:t>Kolejnym rozwiązaniem był model </a:t>
@@ -3699,6 +4142,9 @@
               <a:rPr lang="pl-PL" dirty="0"/>
               <a:t>, który dzięki wykorzystaniu wielu drzew decyzyjnych lepiej wychwycił zależności pomiędzy cechami.</a:t>
             </a:r>
+          </a:p>
+          <a:p>
+            <a:endParaRPr lang="pl-PL" dirty="0"/>
           </a:p>
           <a:p>
             <a:r>
@@ -3856,6 +4302,9 @@
             </a:r>
           </a:p>
           <a:p>
+            <a:endParaRPr lang="pl-PL" dirty="0"/>
+          </a:p>
+          <a:p>
             <a:r>
               <a:rPr lang="pl-PL" dirty="0"/>
               <a:t>Ostatecznie model osiągnął średni błąd </a:t>
@@ -3872,6 +4321,8 @@
               <a:rPr lang="pl-PL" b="1" dirty="0"/>
               <a:t>RMSPE było główną metryką wykorzystywaną podczas strojenia modeli, natomiast MAE i MAPE prezentujemy, ponieważ najlepiej pokazują jakość prognoz z perspektywy biznesowej i są łatwiejsze do interpretacji.</a:t>
             </a:r>
+          </a:p>
+          <a:p>
             <a:endParaRPr lang="pl-PL" dirty="0"/>
           </a:p>
           <a:p>
@@ -4398,7 +4849,7 @@
         <p:cNvPr id="1" name="">
           <a:extLst>
             <a:ext uri="{FF2B5EF4-FFF2-40B4-BE49-F238E27FC236}">
-              <a16:creationId xmlns:a16="http://schemas.microsoft.com/office/drawing/2014/main" id="{8730DE66-27C6-95C3-95F6-18CCA5B6AB58}"/>
+              <a16:creationId xmlns:a16="http://schemas.microsoft.com/office/drawing/2014/main" id="{D12DD4AD-83AE-BF59-8896-AF0CC3BA6FB7}"/>
             </a:ext>
           </a:extLst>
         </p:cNvPr>
@@ -4418,7 +4869,7 @@
           <p:cNvPr id="2" name="Symbol zastępczy obrazu slajdu 1">
             <a:extLst>
               <a:ext uri="{FF2B5EF4-FFF2-40B4-BE49-F238E27FC236}">
-                <a16:creationId xmlns:a16="http://schemas.microsoft.com/office/drawing/2014/main" id="{CE23E1C2-5FF7-9DC5-588A-B7AFFA1D93ED}"/>
+                <a16:creationId xmlns:a16="http://schemas.microsoft.com/office/drawing/2014/main" id="{CD8869C7-9745-3642-56D0-B8A8AC040DAA}"/>
               </a:ext>
             </a:extLst>
           </p:cNvPr>
@@ -4430,13 +4881,20 @@
           </p:nvPr>
         </p:nvSpPr>
         <p:spPr/>
+        <p:txBody>
+          <a:bodyPr/>
+          <a:lstStyle/>
+          <a:p>
+            <a:endParaRPr lang="pl-PL"/>
+          </a:p>
+        </p:txBody>
       </p:sp>
       <p:sp>
         <p:nvSpPr>
           <p:cNvPr id="3" name="Symbol zastępczy notatek 2">
             <a:extLst>
               <a:ext uri="{FF2B5EF4-FFF2-40B4-BE49-F238E27FC236}">
-                <a16:creationId xmlns:a16="http://schemas.microsoft.com/office/drawing/2014/main" id="{82D9BA5C-C9E7-89A1-1C50-54DE66B477FC}"/>
+                <a16:creationId xmlns:a16="http://schemas.microsoft.com/office/drawing/2014/main" id="{2E371303-B546-789D-5FF8-EF35F63457C0}"/>
               </a:ext>
             </a:extLst>
           </p:cNvPr>
@@ -4461,7 +4919,7 @@
           <p:cNvPr id="4" name="Symbol zastępczy numeru slajdu 3">
             <a:extLst>
               <a:ext uri="{FF2B5EF4-FFF2-40B4-BE49-F238E27FC236}">
-                <a16:creationId xmlns:a16="http://schemas.microsoft.com/office/drawing/2014/main" id="{7513C7EC-8A38-A139-704C-9A467CA18694}"/>
+                <a16:creationId xmlns:a16="http://schemas.microsoft.com/office/drawing/2014/main" id="{3670EA95-9504-6AE0-49A4-A4B78995E62E}"/>
               </a:ext>
             </a:extLst>
           </p:cNvPr>
@@ -4477,18 +4935,78 @@
           <a:bodyPr/>
           <a:lstStyle/>
           <a:p>
+            <a:pPr marL="0" marR="0" lvl="0" indent="0" algn="r" defTabSz="457200" rtl="0" eaLnBrk="1" fontAlgn="auto" latinLnBrk="0" hangingPunct="1">
+              <a:lnSpc>
+                <a:spcPct val="100000"/>
+              </a:lnSpc>
+              <a:spcBef>
+                <a:spcPts val="0"/>
+              </a:spcBef>
+              <a:spcAft>
+                <a:spcPts val="0"/>
+              </a:spcAft>
+              <a:buClrTx/>
+              <a:buSzTx/>
+              <a:buFontTx/>
+              <a:buNone/>
+              <a:tabLst/>
+              <a:defRPr/>
+            </a:pPr>
             <a:fld id="{26395FDD-6113-40F9-B104-49A78CEF58C7}" type="slidenum">
-              <a:rPr lang="pl-PL" smtClean="0"/>
+              <a:rPr kumimoji="0" lang="pl-PL" sz="1200" b="0" i="0" u="none" strike="noStrike" kern="1200" cap="none" spc="0" normalizeH="0" baseline="0" noProof="0" smtClean="0">
+                <a:ln>
+                  <a:noFill/>
+                </a:ln>
+                <a:solidFill>
+                  <a:prstClr val="black"/>
+                </a:solidFill>
+                <a:effectLst/>
+                <a:uLnTx/>
+                <a:uFillTx/>
+                <a:latin typeface="Calibri" panose="020F0502020204030204"/>
+                <a:ea typeface="+mn-ea"/>
+                <a:cs typeface="+mn-cs"/>
+              </a:rPr>
+              <a:pPr marL="0" marR="0" lvl="0" indent="0" algn="r" defTabSz="457200" rtl="0" eaLnBrk="1" fontAlgn="auto" latinLnBrk="0" hangingPunct="1">
+                <a:lnSpc>
+                  <a:spcPct val="100000"/>
+                </a:lnSpc>
+                <a:spcBef>
+                  <a:spcPts val="0"/>
+                </a:spcBef>
+                <a:spcAft>
+                  <a:spcPts val="0"/>
+                </a:spcAft>
+                <a:buClrTx/>
+                <a:buSzTx/>
+                <a:buFontTx/>
+                <a:buNone/>
+                <a:tabLst/>
+                <a:defRPr/>
+              </a:pPr>
               <a:t>10</a:t>
             </a:fld>
-            <a:endParaRPr lang="pl-PL"/>
+            <a:endParaRPr kumimoji="0" lang="pl-PL" sz="1200" b="0" i="0" u="none" strike="noStrike" kern="1200" cap="none" spc="0" normalizeH="0" baseline="0" noProof="0">
+              <a:ln>
+                <a:noFill/>
+              </a:ln>
+              <a:solidFill>
+                <a:prstClr val="black"/>
+              </a:solidFill>
+              <a:effectLst/>
+              <a:uLnTx/>
+              <a:uFillTx/>
+              <a:latin typeface="Calibri" panose="020F0502020204030204"/>
+              <a:ea typeface="+mn-ea"/>
+              <a:cs typeface="+mn-cs"/>
+            </a:endParaRPr>
           </a:p>
         </p:txBody>
       </p:sp>
     </p:spTree>
     <p:extLst>
       <p:ext uri="{BB962C8B-B14F-4D97-AF65-F5344CB8AC3E}">
-        <p14:creationId xmlns:p14="http://schemas.microsoft.com/office/powerpoint/2010/main" val="1366705248"/>
+        <p14:creationId xmlns:p14="http://schemas.microsoft.com/office/powerpoint/2010/main" val="1685534569"/>
       </p:ext>
     </p:extLst>
   </p:cSld>
@@ -4677,7 +5195,7 @@
           <a:p>
             <a:fld id="{5BCAD085-E8A6-8845-BD4E-CB4CCA059FC4}" type="datetimeFigureOut">
               <a:rPr lang="en-US" smtClean="0"/>
-              <a:t>7/30/2026</a:t>
+              <a:t>8/1/2026</a:t>
             </a:fld>
             <a:endParaRPr lang="en-US"/>
           </a:p>
@@ -4845,7 +5363,7 @@
           <a:p>
             <a:fld id="{5BCAD085-E8A6-8845-BD4E-CB4CCA059FC4}" type="datetimeFigureOut">
               <a:rPr lang="en-US" smtClean="0"/>
-              <a:t>7/30/2026</a:t>
+              <a:t>8/1/2026</a:t>
             </a:fld>
             <a:endParaRPr lang="en-US"/>
           </a:p>
@@ -5023,7 +5541,7 @@
           <a:p>
             <a:fld id="{5BCAD085-E8A6-8845-BD4E-CB4CCA059FC4}" type="datetimeFigureOut">
               <a:rPr lang="en-US" smtClean="0"/>
-              <a:t>7/30/2026</a:t>
+              <a:t>8/1/2026</a:t>
             </a:fld>
             <a:endParaRPr lang="en-US"/>
           </a:p>
@@ -5191,7 +5709,7 @@
           <a:p>
             <a:fld id="{5BCAD085-E8A6-8845-BD4E-CB4CCA059FC4}" type="datetimeFigureOut">
               <a:rPr lang="en-US" smtClean="0"/>
-              <a:t>7/30/2026</a:t>
+              <a:t>8/1/2026</a:t>
             </a:fld>
             <a:endParaRPr lang="en-US"/>
           </a:p>
@@ -5436,7 +5954,7 @@
           <a:p>
             <a:fld id="{5BCAD085-E8A6-8845-BD4E-CB4CCA059FC4}" type="datetimeFigureOut">
               <a:rPr lang="en-US" smtClean="0"/>
-              <a:t>7/30/2026</a:t>
+              <a:t>8/1/2026</a:t>
             </a:fld>
             <a:endParaRPr lang="en-US"/>
           </a:p>
@@ -5721,7 +6239,7 @@
           <a:p>
             <a:fld id="{5BCAD085-E8A6-8845-BD4E-CB4CCA059FC4}" type="datetimeFigureOut">
               <a:rPr lang="en-US" smtClean="0"/>
-              <a:t>7/30/2026</a:t>
+              <a:t>8/1/2026</a:t>
             </a:fld>
             <a:endParaRPr lang="en-US"/>
           </a:p>
@@ -6140,7 +6658,7 @@
           <a:p>
             <a:fld id="{5BCAD085-E8A6-8845-BD4E-CB4CCA059FC4}" type="datetimeFigureOut">
               <a:rPr lang="en-US" smtClean="0"/>
-              <a:t>7/30/2026</a:t>
+              <a:t>8/1/2026</a:t>
             </a:fld>
             <a:endParaRPr lang="en-US"/>
           </a:p>
@@ -6257,7 +6775,7 @@
           <a:p>
             <a:fld id="{5BCAD085-E8A6-8845-BD4E-CB4CCA059FC4}" type="datetimeFigureOut">
               <a:rPr lang="en-US" smtClean="0"/>
-              <a:t>7/30/2026</a:t>
+              <a:t>8/1/2026</a:t>
             </a:fld>
             <a:endParaRPr lang="en-US"/>
           </a:p>
@@ -6352,7 +6870,7 @@
           <a:p>
             <a:fld id="{5BCAD085-E8A6-8845-BD4E-CB4CCA059FC4}" type="datetimeFigureOut">
               <a:rPr lang="en-US" smtClean="0"/>
-              <a:t>7/30/2026</a:t>
+              <a:t>8/1/2026</a:t>
             </a:fld>
             <a:endParaRPr lang="en-US"/>
           </a:p>
@@ -6627,7 +7145,7 @@
           <a:p>
             <a:fld id="{5BCAD085-E8A6-8845-BD4E-CB4CCA059FC4}" type="datetimeFigureOut">
               <a:rPr lang="en-US" smtClean="0"/>
-              <a:t>7/30/2026</a:t>
+              <a:t>8/1/2026</a:t>
             </a:fld>
             <a:endParaRPr lang="en-US"/>
           </a:p>
@@ -6879,7 +7397,7 @@
           <a:p>
             <a:fld id="{5BCAD085-E8A6-8845-BD4E-CB4CCA059FC4}" type="datetimeFigureOut">
               <a:rPr lang="en-US" smtClean="0"/>
-              <a:t>7/30/2026</a:t>
+              <a:t>8/1/2026</a:t>
             </a:fld>
             <a:endParaRPr lang="en-US"/>
           </a:p>
@@ -7090,7 +7608,7 @@
           <a:p>
             <a:fld id="{5BCAD085-E8A6-8845-BD4E-CB4CCA059FC4}" type="datetimeFigureOut">
               <a:rPr lang="en-US" smtClean="0"/>
-              <a:t>7/30/2026</a:t>
+              <a:t>8/1/2026</a:t>
             </a:fld>
             <a:endParaRPr lang="en-US"/>
           </a:p>
@@ -7565,8 +8083,8 @@
         </p:nvSpPr>
         <p:spPr>
           <a:xfrm>
-            <a:off x="731520" y="1648022"/>
-            <a:ext cx="2107244" cy="3391698"/>
+            <a:off x="518471" y="2004639"/>
+            <a:ext cx="2107244" cy="2283702"/>
           </a:xfrm>
           <a:prstGeom prst="rect">
             <a:avLst/>
@@ -7586,13 +8104,18 @@
               <a:defRPr sz="2000"/>
             </a:pPr>
             <a:r>
-              <a:rPr lang="pl-PL" b="1" dirty="0">
-                <a:solidFill>
-                  <a:srgbClr val="17375E"/>
-                </a:solidFill>
-              </a:rPr>
-              <a:t>Autorzy:</a:t>
-            </a:r>
+              <a:rPr lang="pl-PL" b="1" i="1" dirty="0"/>
+              <a:t>The </a:t>
+            </a:r>
+            <a:r>
+              <a:rPr lang="pl-PL" b="1" i="1" dirty="0" err="1"/>
+              <a:t>Overfitters</a:t>
+            </a:r>
+            <a:endParaRPr lang="pl-PL" b="1" i="1" dirty="0">
+              <a:solidFill>
+                <a:srgbClr val="17375E"/>
+              </a:solidFill>
+            </a:endParaRPr>
           </a:p>
           <a:p>
             <a:pPr>
@@ -7602,12 +8125,12 @@
               <a:defRPr sz="2000"/>
             </a:pPr>
             <a:r>
-              <a:rPr lang="pl-PL" dirty="0">
-                <a:solidFill>
-                  <a:srgbClr val="464646"/>
-                </a:solidFill>
-              </a:rPr>
-              <a:t>Marek Lipiński</a:t>
+              <a:rPr lang="pl-PL" b="1" dirty="0">
+                <a:solidFill>
+                  <a:srgbClr val="17375E"/>
+                </a:solidFill>
+              </a:rPr>
+              <a:t>Autorzy:</a:t>
             </a:r>
           </a:p>
           <a:p>
@@ -7680,53 +8203,20 @@
             </a:r>
           </a:p>
           <a:p>
-            <a:pPr marL="342900" indent="-342900">
-              <a:lnSpc>
-                <a:spcPct val="120000"/>
-              </a:lnSpc>
-              <a:buFont typeface="Arial" panose="020B0604020202020204" pitchFamily="34" charset="0"/>
-              <a:buChar char="•"/>
-              <a:defRPr sz="2000"/>
-            </a:pPr>
-            <a:endParaRPr lang="pl-PL" dirty="0">
-              <a:solidFill>
-                <a:srgbClr val="17375E"/>
-              </a:solidFill>
-            </a:endParaRPr>
-          </a:p>
-          <a:p>
             <a:pPr>
               <a:lnSpc>
                 <a:spcPct val="120000"/>
               </a:lnSpc>
               <a:defRPr sz="2000"/>
             </a:pPr>
-            <a:endParaRPr lang="pl-PL" dirty="0">
-              <a:solidFill>
-                <a:srgbClr val="17375E"/>
-              </a:solidFill>
-            </a:endParaRPr>
-          </a:p>
-          <a:p>
-            <a:pPr>
-              <a:lnSpc>
-                <a:spcPct val="120000"/>
-              </a:lnSpc>
-              <a:defRPr sz="2000"/>
-            </a:pPr>
-            <a:endParaRPr lang="pl-PL" dirty="0">
-              <a:solidFill>
-                <a:srgbClr val="17375E"/>
-              </a:solidFill>
-            </a:endParaRPr>
-          </a:p>
-          <a:p>
-            <a:pPr>
-              <a:lnSpc>
-                <a:spcPct val="120000"/>
-              </a:lnSpc>
-              <a:defRPr sz="2000"/>
-            </a:pPr>
+            <a:r>
+              <a:rPr lang="pl-PL" dirty="0">
+                <a:solidFill>
+                  <a:srgbClr val="464646"/>
+                </a:solidFill>
+              </a:rPr>
+              <a:t>Marek Lipiński</a:t>
+            </a:r>
             <a:endParaRPr lang="pl-PL" dirty="0">
               <a:solidFill>
                 <a:srgbClr val="17375E"/>
@@ -7846,7 +8336,7 @@
         </p:nvSpPr>
         <p:spPr>
           <a:xfrm>
-            <a:off x="762000" y="5003620"/>
+            <a:off x="518471" y="5550171"/>
             <a:ext cx="1620187" cy="1569660"/>
           </a:xfrm>
           <a:prstGeom prst="rect">
@@ -8048,7 +8538,7 @@
         <p:cNvPr id="1" name="">
           <a:extLst>
             <a:ext uri="{FF2B5EF4-FFF2-40B4-BE49-F238E27FC236}">
-              <a16:creationId xmlns:a16="http://schemas.microsoft.com/office/drawing/2014/main" id="{BBBF76C9-A6B1-0DB5-8FC2-A6232A69E55B}"/>
+              <a16:creationId xmlns:a16="http://schemas.microsoft.com/office/drawing/2014/main" id="{7213C3D7-826C-1341-0B59-761C5D68C356}"/>
             </a:ext>
           </a:extLst>
         </p:cNvPr>
@@ -8068,7 +8558,7 @@
           <p:cNvPr id="2" name="TextBox 1">
             <a:extLst>
               <a:ext uri="{FF2B5EF4-FFF2-40B4-BE49-F238E27FC236}">
-                <a16:creationId xmlns:a16="http://schemas.microsoft.com/office/drawing/2014/main" id="{BE353088-BD9B-13F6-4EF6-CC08CBE0B4EF}"/>
+                <a16:creationId xmlns:a16="http://schemas.microsoft.com/office/drawing/2014/main" id="{5BEB0D8C-761C-C515-0908-B4AA6B574A43}"/>
               </a:ext>
             </a:extLst>
           </p:cNvPr>
@@ -8091,14 +8581,37 @@
           </a:bodyPr>
           <a:lstStyle/>
           <a:p>
-            <a:pPr>
+            <a:pPr marL="0" marR="0" lvl="0" indent="0" algn="l" defTabSz="457200" rtl="0" eaLnBrk="1" fontAlgn="auto" latinLnBrk="0" hangingPunct="1">
+              <a:lnSpc>
+                <a:spcPct val="100000"/>
+              </a:lnSpc>
+              <a:spcBef>
+                <a:spcPts val="0"/>
+              </a:spcBef>
+              <a:spcAft>
+                <a:spcPts val="0"/>
+              </a:spcAft>
+              <a:buClrTx/>
+              <a:buSzTx/>
+              <a:buFontTx/>
+              <a:buNone/>
+              <a:tabLst/>
               <a:defRPr sz="2800" b="1"/>
             </a:pPr>
             <a:r>
-              <a:rPr lang="pl-PL" sz="3800" dirty="0">
+              <a:rPr kumimoji="0" lang="pl-PL" sz="3800" b="1" i="0" u="none" strike="noStrike" kern="1200" cap="none" spc="0" normalizeH="0" baseline="0" noProof="0" dirty="0">
+                <a:ln>
+                  <a:noFill/>
+                </a:ln>
                 <a:solidFill>
                   <a:srgbClr val="17375E"/>
                 </a:solidFill>
+                <a:effectLst/>
+                <a:uLnTx/>
+                <a:uFillTx/>
+                <a:latin typeface="Calibri"/>
+                <a:ea typeface="+mn-ea"/>
+                <a:cs typeface="+mn-cs"/>
               </a:rPr>
               <a:t>Predykcja Popytu w Sieci Rossmann</a:t>
             </a:r>
@@ -8110,7 +8623,7 @@
           <p:cNvPr id="3" name="TextBox 2">
             <a:extLst>
               <a:ext uri="{FF2B5EF4-FFF2-40B4-BE49-F238E27FC236}">
-                <a16:creationId xmlns:a16="http://schemas.microsoft.com/office/drawing/2014/main" id="{E447E8AF-C05E-9A81-6B3B-EDEB3674E571}"/>
+                <a16:creationId xmlns:a16="http://schemas.microsoft.com/office/drawing/2014/main" id="{CD6C24F1-9309-AD4C-8DF4-4BEE26F9938D}"/>
               </a:ext>
             </a:extLst>
           </p:cNvPr>
@@ -8133,26 +8646,70 @@
           </a:bodyPr>
           <a:lstStyle/>
           <a:p>
-            <a:pPr>
+            <a:pPr marL="0" marR="0" lvl="0" indent="0" algn="l" defTabSz="457200" rtl="0" eaLnBrk="1" fontAlgn="auto" latinLnBrk="0" hangingPunct="1">
               <a:lnSpc>
                 <a:spcPct val="120000"/>
               </a:lnSpc>
+              <a:spcBef>
+                <a:spcPts val="0"/>
+              </a:spcBef>
+              <a:spcAft>
+                <a:spcPts val="0"/>
+              </a:spcAft>
+              <a:buClrTx/>
+              <a:buSzTx/>
+              <a:buFontTx/>
+              <a:buNone/>
+              <a:tabLst/>
               <a:defRPr sz="2000"/>
             </a:pPr>
-            <a:endParaRPr lang="pl-PL" sz="3800" b="1" dirty="0">
+            <a:endParaRPr kumimoji="0" lang="pl-PL" sz="3800" b="1" i="0" u="none" strike="noStrike" kern="1200" cap="none" spc="0" normalizeH="0" baseline="0" noProof="0" dirty="0">
+              <a:ln>
+                <a:noFill/>
+              </a:ln>
               <a:solidFill>
                 <a:srgbClr val="17375E"/>
               </a:solidFill>
+              <a:effectLst/>
+              <a:uLnTx/>
+              <a:uFillTx/>
+              <a:latin typeface="Calibri"/>
+              <a:ea typeface="+mn-ea"/>
+              <a:cs typeface="+mn-cs"/>
             </a:endParaRPr>
           </a:p>
           <a:p>
-            <a:pPr>
+            <a:pPr marL="0" marR="0" lvl="0" indent="0" algn="l" defTabSz="457200" rtl="0" eaLnBrk="1" fontAlgn="auto" latinLnBrk="0" hangingPunct="1">
               <a:lnSpc>
                 <a:spcPct val="120000"/>
               </a:lnSpc>
+              <a:spcBef>
+                <a:spcPts val="0"/>
+              </a:spcBef>
+              <a:spcAft>
+                <a:spcPts val="0"/>
+              </a:spcAft>
+              <a:buClrTx/>
+              <a:buSzTx/>
+              <a:buFontTx/>
+              <a:buNone/>
+              <a:tabLst/>
               <a:defRPr sz="2000"/>
             </a:pPr>
-            <a:endParaRPr lang="pl-PL" sz="3800" dirty="0"/>
+            <a:endParaRPr kumimoji="0" lang="pl-PL" sz="3800" b="0" i="0" u="none" strike="noStrike" kern="1200" cap="none" spc="0" normalizeH="0" baseline="0" noProof="0" dirty="0">
+              <a:ln>
+                <a:noFill/>
+              </a:ln>
+              <a:solidFill>
+                <a:prstClr val="black"/>
+              </a:solidFill>
+              <a:effectLst/>
+              <a:uLnTx/>
+              <a:uFillTx/>
+              <a:latin typeface="Calibri"/>
+              <a:ea typeface="+mn-ea"/>
+              <a:cs typeface="+mn-cs"/>
+            </a:endParaRPr>
           </a:p>
         </p:txBody>
       </p:sp>
@@ -8161,7 +8718,7 @@
           <p:cNvPr id="5" name="Prostokąt 4">
             <a:extLst>
               <a:ext uri="{FF2B5EF4-FFF2-40B4-BE49-F238E27FC236}">
-                <a16:creationId xmlns:a16="http://schemas.microsoft.com/office/drawing/2014/main" id="{578D6C14-ED5F-4C3A-30F7-1140B3596795}"/>
+                <a16:creationId xmlns:a16="http://schemas.microsoft.com/office/drawing/2014/main" id="{9B2F44F0-BE2D-0B70-53BB-8EFF53E01B5D}"/>
               </a:ext>
             </a:extLst>
           </p:cNvPr>
@@ -8201,8 +8758,37 @@
           <a:bodyPr rtlCol="0" anchor="ctr"/>
           <a:lstStyle/>
           <a:p>
-            <a:pPr algn="ctr"/>
-            <a:endParaRPr lang="pl-PL"/>
+            <a:pPr marL="0" marR="0" lvl="0" indent="0" algn="ctr" defTabSz="457200" rtl="0" eaLnBrk="1" fontAlgn="auto" latinLnBrk="0" hangingPunct="1">
+              <a:lnSpc>
+                <a:spcPct val="100000"/>
+              </a:lnSpc>
+              <a:spcBef>
+                <a:spcPts val="0"/>
+              </a:spcBef>
+              <a:spcAft>
+                <a:spcPts val="0"/>
+              </a:spcAft>
+              <a:buClrTx/>
+              <a:buSzTx/>
+              <a:buFontTx/>
+              <a:buNone/>
+              <a:tabLst/>
+              <a:defRPr/>
+            </a:pPr>
+            <a:endParaRPr kumimoji="0" lang="pl-PL" sz="1800" b="0" i="0" u="none" strike="noStrike" kern="1200" cap="none" spc="0" normalizeH="0" baseline="0" noProof="0">
+              <a:ln>
+                <a:noFill/>
+              </a:ln>
+              <a:solidFill>
+                <a:prstClr val="white"/>
+              </a:solidFill>
+              <a:effectLst/>
+              <a:uLnTx/>
+              <a:uFillTx/>
+              <a:latin typeface="Calibri"/>
+              <a:ea typeface="+mn-ea"/>
+              <a:cs typeface="+mn-cs"/>
+            </a:endParaRPr>
           </a:p>
         </p:txBody>
       </p:sp>
@@ -8211,7 +8797,7 @@
           <p:cNvPr id="4" name="pole tekstowe 3">
             <a:extLst>
               <a:ext uri="{FF2B5EF4-FFF2-40B4-BE49-F238E27FC236}">
-                <a16:creationId xmlns:a16="http://schemas.microsoft.com/office/drawing/2014/main" id="{33B6B42C-F8E8-6496-75EA-C8AB7AABAA4B}"/>
+                <a16:creationId xmlns:a16="http://schemas.microsoft.com/office/drawing/2014/main" id="{E124E892-4545-6282-830E-0429A4E596E0}"/>
               </a:ext>
             </a:extLst>
           </p:cNvPr>
@@ -8234,85 +8820,608 @@
           </a:bodyPr>
           <a:lstStyle/>
           <a:p>
-            <a:r>
-              <a:rPr lang="pl-PL" sz="2400" dirty="0"/>
+            <a:pPr marL="0" marR="0" lvl="0" indent="0" algn="l" defTabSz="457200" rtl="0" eaLnBrk="1" fontAlgn="auto" latinLnBrk="0" hangingPunct="1">
+              <a:lnSpc>
+                <a:spcPct val="100000"/>
+              </a:lnSpc>
+              <a:spcBef>
+                <a:spcPts val="0"/>
+              </a:spcBef>
+              <a:spcAft>
+                <a:spcPts val="0"/>
+              </a:spcAft>
+              <a:buClrTx/>
+              <a:buSzTx/>
+              <a:buFontTx/>
+              <a:buNone/>
+              <a:tabLst/>
+              <a:defRPr/>
+            </a:pPr>
+            <a:r>
+              <a:rPr kumimoji="0" lang="pl-PL" sz="2400" b="0" i="0" u="none" strike="noStrike" kern="1200" cap="none" spc="0" normalizeH="0" baseline="0" noProof="0" dirty="0">
+                <a:ln>
+                  <a:noFill/>
+                </a:ln>
+                <a:solidFill>
+                  <a:prstClr val="black"/>
+                </a:solidFill>
+                <a:effectLst/>
+                <a:uLnTx/>
+                <a:uFillTx/>
+                <a:latin typeface="Calibri"/>
+                <a:ea typeface="+mn-ea"/>
+                <a:cs typeface="+mn-cs"/>
+              </a:rPr>
               <a:t> 		</a:t>
             </a:r>
           </a:p>
           <a:p>
-            <a:endParaRPr lang="pl-PL" sz="2400" dirty="0"/>
-          </a:p>
-          <a:p>
-            <a:endParaRPr lang="pl-PL" sz="2400" dirty="0"/>
-          </a:p>
-          <a:p>
-            <a:endParaRPr lang="pl-PL" sz="2400" dirty="0"/>
-          </a:p>
-          <a:p>
-            <a:r>
-              <a:rPr lang="pl-PL" sz="2400" dirty="0"/>
+            <a:pPr marL="0" marR="0" lvl="0" indent="0" algn="l" defTabSz="457200" rtl="0" eaLnBrk="1" fontAlgn="auto" latinLnBrk="0" hangingPunct="1">
+              <a:lnSpc>
+                <a:spcPct val="100000"/>
+              </a:lnSpc>
+              <a:spcBef>
+                <a:spcPts val="0"/>
+              </a:spcBef>
+              <a:spcAft>
+                <a:spcPts val="0"/>
+              </a:spcAft>
+              <a:buClrTx/>
+              <a:buSzTx/>
+              <a:buFontTx/>
+              <a:buNone/>
+              <a:tabLst/>
+              <a:defRPr/>
+            </a:pPr>
+            <a:endParaRPr kumimoji="0" lang="pl-PL" sz="2400" b="0" i="0" u="none" strike="noStrike" kern="1200" cap="none" spc="0" normalizeH="0" baseline="0" noProof="0" dirty="0">
+              <a:ln>
+                <a:noFill/>
+              </a:ln>
+              <a:solidFill>
+                <a:prstClr val="black"/>
+              </a:solidFill>
+              <a:effectLst/>
+              <a:uLnTx/>
+              <a:uFillTx/>
+              <a:latin typeface="Calibri"/>
+              <a:ea typeface="+mn-ea"/>
+              <a:cs typeface="+mn-cs"/>
+            </a:endParaRPr>
+          </a:p>
+          <a:p>
+            <a:pPr marL="0" marR="0" lvl="0" indent="0" algn="l" defTabSz="457200" rtl="0" eaLnBrk="1" fontAlgn="auto" latinLnBrk="0" hangingPunct="1">
+              <a:lnSpc>
+                <a:spcPct val="100000"/>
+              </a:lnSpc>
+              <a:spcBef>
+                <a:spcPts val="0"/>
+              </a:spcBef>
+              <a:spcAft>
+                <a:spcPts val="0"/>
+              </a:spcAft>
+              <a:buClrTx/>
+              <a:buSzTx/>
+              <a:buFontTx/>
+              <a:buNone/>
+              <a:tabLst/>
+              <a:defRPr/>
+            </a:pPr>
+            <a:endParaRPr kumimoji="0" lang="pl-PL" sz="2400" b="0" i="0" u="none" strike="noStrike" kern="1200" cap="none" spc="0" normalizeH="0" baseline="0" noProof="0" dirty="0">
+              <a:ln>
+                <a:noFill/>
+              </a:ln>
+              <a:solidFill>
+                <a:prstClr val="black"/>
+              </a:solidFill>
+              <a:effectLst/>
+              <a:uLnTx/>
+              <a:uFillTx/>
+              <a:latin typeface="Calibri"/>
+              <a:ea typeface="+mn-ea"/>
+              <a:cs typeface="+mn-cs"/>
+            </a:endParaRPr>
+          </a:p>
+          <a:p>
+            <a:pPr marL="0" marR="0" lvl="0" indent="0" algn="l" defTabSz="457200" rtl="0" eaLnBrk="1" fontAlgn="auto" latinLnBrk="0" hangingPunct="1">
+              <a:lnSpc>
+                <a:spcPct val="100000"/>
+              </a:lnSpc>
+              <a:spcBef>
+                <a:spcPts val="0"/>
+              </a:spcBef>
+              <a:spcAft>
+                <a:spcPts val="0"/>
+              </a:spcAft>
+              <a:buClrTx/>
+              <a:buSzTx/>
+              <a:buFontTx/>
+              <a:buNone/>
+              <a:tabLst/>
+              <a:defRPr/>
+            </a:pPr>
+            <a:endParaRPr kumimoji="0" lang="pl-PL" sz="2400" b="0" i="0" u="none" strike="noStrike" kern="1200" cap="none" spc="0" normalizeH="0" baseline="0" noProof="0" dirty="0">
+              <a:ln>
+                <a:noFill/>
+              </a:ln>
+              <a:solidFill>
+                <a:prstClr val="black"/>
+              </a:solidFill>
+              <a:effectLst/>
+              <a:uLnTx/>
+              <a:uFillTx/>
+              <a:latin typeface="Calibri"/>
+              <a:ea typeface="+mn-ea"/>
+              <a:cs typeface="+mn-cs"/>
+            </a:endParaRPr>
+          </a:p>
+          <a:p>
+            <a:pPr marL="0" marR="0" lvl="0" indent="0" algn="l" defTabSz="457200" rtl="0" eaLnBrk="1" fontAlgn="auto" latinLnBrk="0" hangingPunct="1">
+              <a:lnSpc>
+                <a:spcPct val="100000"/>
+              </a:lnSpc>
+              <a:spcBef>
+                <a:spcPts val="0"/>
+              </a:spcBef>
+              <a:spcAft>
+                <a:spcPts val="0"/>
+              </a:spcAft>
+              <a:buClrTx/>
+              <a:buSzTx/>
+              <a:buFontTx/>
+              <a:buNone/>
+              <a:tabLst/>
+              <a:defRPr/>
+            </a:pPr>
+            <a:r>
+              <a:rPr kumimoji="0" lang="pl-PL" sz="2400" b="0" i="0" u="none" strike="noStrike" kern="1200" cap="none" spc="0" normalizeH="0" baseline="0" noProof="0" dirty="0">
+                <a:ln>
+                  <a:noFill/>
+                </a:ln>
+                <a:solidFill>
+                  <a:prstClr val="black"/>
+                </a:solidFill>
+                <a:effectLst/>
+                <a:uLnTx/>
+                <a:uFillTx/>
+                <a:latin typeface="Calibri"/>
+                <a:ea typeface="+mn-ea"/>
+                <a:cs typeface="+mn-cs"/>
+              </a:rPr>
               <a:t>							</a:t>
             </a:r>
             <a:r>
-              <a:rPr lang="pl-PL" sz="3200" b="1" dirty="0"/>
+              <a:rPr kumimoji="0" lang="pl-PL" sz="3200" b="1" i="0" u="none" strike="noStrike" kern="1200" cap="none" spc="0" normalizeH="0" baseline="0" noProof="0" dirty="0">
+                <a:ln>
+                  <a:noFill/>
+                </a:ln>
+                <a:solidFill>
+                  <a:prstClr val="black"/>
+                </a:solidFill>
+                <a:effectLst/>
+                <a:uLnTx/>
+                <a:uFillTx/>
+                <a:latin typeface="Calibri"/>
+                <a:ea typeface="+mn-ea"/>
+                <a:cs typeface="+mn-cs"/>
+              </a:rPr>
               <a:t>Dziękujemy za uwagę!</a:t>
             </a:r>
           </a:p>
           <a:p>
-            <a:r>
-              <a:rPr lang="pl-PL" sz="2400" dirty="0"/>
+            <a:pPr marL="0" marR="0" lvl="0" indent="0" algn="l" defTabSz="457200" rtl="0" eaLnBrk="1" fontAlgn="auto" latinLnBrk="0" hangingPunct="1">
+              <a:lnSpc>
+                <a:spcPct val="100000"/>
+              </a:lnSpc>
+              <a:spcBef>
+                <a:spcPts val="0"/>
+              </a:spcBef>
+              <a:spcAft>
+                <a:spcPts val="0"/>
+              </a:spcAft>
+              <a:buClrTx/>
+              <a:buSzTx/>
+              <a:buFontTx/>
+              <a:buNone/>
+              <a:tabLst/>
+              <a:defRPr/>
+            </a:pPr>
+            <a:r>
+              <a:rPr kumimoji="0" lang="pl-PL" sz="2400" b="0" i="0" u="none" strike="noStrike" kern="1200" cap="none" spc="0" normalizeH="0" baseline="0" noProof="0" dirty="0">
+                <a:ln>
+                  <a:noFill/>
+                </a:ln>
+                <a:solidFill>
+                  <a:prstClr val="black"/>
+                </a:solidFill>
+                <a:effectLst/>
+                <a:uLnTx/>
+                <a:uFillTx/>
+                <a:latin typeface="Calibri"/>
+                <a:ea typeface="+mn-ea"/>
+                <a:cs typeface="+mn-cs"/>
+              </a:rPr>
               <a:t>						</a:t>
             </a:r>
           </a:p>
           <a:p>
-            <a:endParaRPr lang="pl-PL" sz="2400" dirty="0"/>
-          </a:p>
-          <a:p>
-            <a:endParaRPr lang="pl-PL" sz="2400" dirty="0"/>
-          </a:p>
-          <a:p>
-            <a:endParaRPr lang="pl-PL" sz="2400" dirty="0"/>
-          </a:p>
-          <a:p>
-            <a:endParaRPr lang="pl-PL" sz="2400" dirty="0"/>
-          </a:p>
-          <a:p>
-            <a:r>
-              <a:rPr lang="pl-PL" sz="2400" dirty="0"/>
+            <a:pPr marL="0" marR="0" lvl="0" indent="0" algn="l" defTabSz="457200" rtl="0" eaLnBrk="1" fontAlgn="auto" latinLnBrk="0" hangingPunct="1">
+              <a:lnSpc>
+                <a:spcPct val="100000"/>
+              </a:lnSpc>
+              <a:spcBef>
+                <a:spcPts val="0"/>
+              </a:spcBef>
+              <a:spcAft>
+                <a:spcPts val="0"/>
+              </a:spcAft>
+              <a:buClrTx/>
+              <a:buSzTx/>
+              <a:buFontTx/>
+              <a:buNone/>
+              <a:tabLst/>
+              <a:defRPr/>
+            </a:pPr>
+            <a:endParaRPr kumimoji="0" lang="pl-PL" sz="2400" b="0" i="0" u="none" strike="noStrike" kern="1200" cap="none" spc="0" normalizeH="0" baseline="0" noProof="0" dirty="0">
+              <a:ln>
+                <a:noFill/>
+              </a:ln>
+              <a:solidFill>
+                <a:prstClr val="black"/>
+              </a:solidFill>
+              <a:effectLst/>
+              <a:uLnTx/>
+              <a:uFillTx/>
+              <a:latin typeface="Calibri"/>
+              <a:ea typeface="+mn-ea"/>
+              <a:cs typeface="+mn-cs"/>
+            </a:endParaRPr>
+          </a:p>
+          <a:p>
+            <a:pPr marL="0" marR="0" lvl="0" indent="0" algn="l" defTabSz="457200" rtl="0" eaLnBrk="1" fontAlgn="auto" latinLnBrk="0" hangingPunct="1">
+              <a:lnSpc>
+                <a:spcPct val="100000"/>
+              </a:lnSpc>
+              <a:spcBef>
+                <a:spcPts val="0"/>
+              </a:spcBef>
+              <a:spcAft>
+                <a:spcPts val="0"/>
+              </a:spcAft>
+              <a:buClrTx/>
+              <a:buSzTx/>
+              <a:buFontTx/>
+              <a:buNone/>
+              <a:tabLst/>
+              <a:defRPr/>
+            </a:pPr>
+            <a:endParaRPr kumimoji="0" lang="pl-PL" sz="2400" b="0" i="0" u="none" strike="noStrike" kern="1200" cap="none" spc="0" normalizeH="0" baseline="0" noProof="0" dirty="0">
+              <a:ln>
+                <a:noFill/>
+              </a:ln>
+              <a:solidFill>
+                <a:prstClr val="black"/>
+              </a:solidFill>
+              <a:effectLst/>
+              <a:uLnTx/>
+              <a:uFillTx/>
+              <a:latin typeface="Calibri"/>
+              <a:ea typeface="+mn-ea"/>
+              <a:cs typeface="+mn-cs"/>
+            </a:endParaRPr>
+          </a:p>
+          <a:p>
+            <a:pPr marL="0" marR="0" lvl="0" indent="0" algn="l" defTabSz="457200" rtl="0" eaLnBrk="1" fontAlgn="auto" latinLnBrk="0" hangingPunct="1">
+              <a:lnSpc>
+                <a:spcPct val="100000"/>
+              </a:lnSpc>
+              <a:spcBef>
+                <a:spcPts val="0"/>
+              </a:spcBef>
+              <a:spcAft>
+                <a:spcPts val="0"/>
+              </a:spcAft>
+              <a:buClrTx/>
+              <a:buSzTx/>
+              <a:buFontTx/>
+              <a:buNone/>
+              <a:tabLst/>
+              <a:defRPr/>
+            </a:pPr>
+            <a:endParaRPr kumimoji="0" lang="pl-PL" sz="2400" b="0" i="0" u="none" strike="noStrike" kern="1200" cap="none" spc="0" normalizeH="0" baseline="0" noProof="0" dirty="0">
+              <a:ln>
+                <a:noFill/>
+              </a:ln>
+              <a:solidFill>
+                <a:prstClr val="black"/>
+              </a:solidFill>
+              <a:effectLst/>
+              <a:uLnTx/>
+              <a:uFillTx/>
+              <a:latin typeface="Calibri"/>
+              <a:ea typeface="+mn-ea"/>
+              <a:cs typeface="+mn-cs"/>
+            </a:endParaRPr>
+          </a:p>
+          <a:p>
+            <a:pPr marL="0" marR="0" lvl="0" indent="0" algn="l" defTabSz="457200" rtl="0" eaLnBrk="1" fontAlgn="auto" latinLnBrk="0" hangingPunct="1">
+              <a:lnSpc>
+                <a:spcPct val="100000"/>
+              </a:lnSpc>
+              <a:spcBef>
+                <a:spcPts val="0"/>
+              </a:spcBef>
+              <a:spcAft>
+                <a:spcPts val="0"/>
+              </a:spcAft>
+              <a:buClrTx/>
+              <a:buSzTx/>
+              <a:buFontTx/>
+              <a:buNone/>
+              <a:tabLst/>
+              <a:defRPr/>
+            </a:pPr>
+            <a:endParaRPr kumimoji="0" lang="pl-PL" sz="2400" b="0" i="0" u="none" strike="noStrike" kern="1200" cap="none" spc="0" normalizeH="0" baseline="0" noProof="0" dirty="0">
+              <a:ln>
+                <a:noFill/>
+              </a:ln>
+              <a:solidFill>
+                <a:prstClr val="black"/>
+              </a:solidFill>
+              <a:effectLst/>
+              <a:uLnTx/>
+              <a:uFillTx/>
+              <a:latin typeface="Calibri"/>
+              <a:ea typeface="+mn-ea"/>
+              <a:cs typeface="+mn-cs"/>
+            </a:endParaRPr>
+          </a:p>
+          <a:p>
+            <a:pPr marL="0" marR="0" lvl="0" indent="0" algn="l" defTabSz="457200" rtl="0" eaLnBrk="1" fontAlgn="auto" latinLnBrk="0" hangingPunct="1">
+              <a:lnSpc>
+                <a:spcPct val="100000"/>
+              </a:lnSpc>
+              <a:spcBef>
+                <a:spcPts val="0"/>
+              </a:spcBef>
+              <a:spcAft>
+                <a:spcPts val="0"/>
+              </a:spcAft>
+              <a:buClrTx/>
+              <a:buSzTx/>
+              <a:buFontTx/>
+              <a:buNone/>
+              <a:tabLst/>
+              <a:defRPr/>
+            </a:pPr>
+            <a:r>
+              <a:rPr kumimoji="0" lang="pl-PL" sz="2400" b="0" i="0" u="none" strike="noStrike" kern="1200" cap="none" spc="0" normalizeH="0" baseline="0" noProof="0" dirty="0">
+                <a:ln>
+                  <a:noFill/>
+                </a:ln>
+                <a:solidFill>
+                  <a:prstClr val="black"/>
+                </a:solidFill>
+                <a:effectLst/>
+                <a:uLnTx/>
+                <a:uFillTx/>
+                <a:latin typeface="Calibri"/>
+                <a:ea typeface="+mn-ea"/>
+                <a:cs typeface="+mn-cs"/>
+              </a:rPr>
               <a:t>					         </a:t>
             </a:r>
             <a:r>
-              <a:rPr lang="pl-PL" sz="2000" dirty="0"/>
-              <a:t>🌲 </a:t>
-            </a:r>
-            <a:r>
-              <a:rPr lang="pl-PL" sz="2000" dirty="0" err="1"/>
-              <a:t>Random</a:t>
-            </a:r>
-            <a:r>
-              <a:rPr lang="pl-PL" sz="2000" dirty="0"/>
-              <a:t> </a:t>
-            </a:r>
-            <a:r>
-              <a:rPr lang="pl-PL" sz="2000" dirty="0" err="1"/>
-              <a:t>Forest</a:t>
-            </a:r>
-            <a:r>
-              <a:rPr lang="pl-PL" sz="2000" dirty="0"/>
-              <a:t> ➜ 📈 Lepsze prognozy</a:t>
-            </a:r>
-          </a:p>
-          <a:p>
-            <a:r>
-              <a:rPr lang="pl-PL" sz="2400" dirty="0"/>
+              <a:rPr kumimoji="0" lang="pl-PL" sz="2000" b="0" i="0" u="none" strike="noStrike" kern="1200" cap="none" spc="0" normalizeH="0" baseline="0" noProof="0" dirty="0">
+                <a:ln>
+                  <a:noFill/>
+                </a:ln>
+                <a:solidFill>
+                  <a:prstClr val="black"/>
+                </a:solidFill>
+                <a:effectLst/>
+                <a:uLnTx/>
+                <a:uFillTx/>
+                <a:latin typeface="Calibri"/>
+                <a:ea typeface="+mn-ea"/>
+                <a:cs typeface="+mn-cs"/>
+              </a:rPr>
+              <a:t>🌲 Random Forest ➜ 📈 Lepsze prognozy</a:t>
+            </a:r>
+          </a:p>
+          <a:p>
+            <a:pPr marL="0" marR="0" lvl="0" indent="0" algn="l" defTabSz="457200" rtl="0" eaLnBrk="1" fontAlgn="auto" latinLnBrk="0" hangingPunct="1">
+              <a:lnSpc>
+                <a:spcPct val="100000"/>
+              </a:lnSpc>
+              <a:spcBef>
+                <a:spcPts val="0"/>
+              </a:spcBef>
+              <a:spcAft>
+                <a:spcPts val="0"/>
+              </a:spcAft>
+              <a:buClrTx/>
+              <a:buSzTx/>
+              <a:buFontTx/>
+              <a:buNone/>
+              <a:tabLst/>
+              <a:defRPr/>
+            </a:pPr>
+            <a:r>
+              <a:rPr kumimoji="0" lang="pl-PL" sz="2400" b="0" i="0" u="none" strike="noStrike" kern="1200" cap="none" spc="0" normalizeH="0" baseline="0" noProof="0" dirty="0">
+                <a:ln>
+                  <a:noFill/>
+                </a:ln>
+                <a:solidFill>
+                  <a:prstClr val="black"/>
+                </a:solidFill>
+                <a:effectLst/>
+                <a:uLnTx/>
+                <a:uFillTx/>
+                <a:latin typeface="Calibri"/>
+                <a:ea typeface="+mn-ea"/>
+                <a:cs typeface="+mn-cs"/>
+              </a:rPr>
               <a:t>            </a:t>
             </a:r>
           </a:p>
           <a:p>
-            <a:endParaRPr lang="pl-PL" sz="2400" dirty="0"/>
+            <a:pPr marL="0" marR="0" lvl="0" indent="0" algn="l" defTabSz="457200" rtl="0" eaLnBrk="1" fontAlgn="auto" latinLnBrk="0" hangingPunct="1">
+              <a:lnSpc>
+                <a:spcPct val="100000"/>
+              </a:lnSpc>
+              <a:spcBef>
+                <a:spcPts val="0"/>
+              </a:spcBef>
+              <a:spcAft>
+                <a:spcPts val="0"/>
+              </a:spcAft>
+              <a:buClrTx/>
+              <a:buSzTx/>
+              <a:buFontTx/>
+              <a:buNone/>
+              <a:tabLst/>
+              <a:defRPr/>
+            </a:pPr>
+            <a:endParaRPr kumimoji="0" lang="pl-PL" sz="2400" b="0" i="0" u="none" strike="noStrike" kern="1200" cap="none" spc="0" normalizeH="0" baseline="0" noProof="0" dirty="0">
+              <a:ln>
+                <a:noFill/>
+              </a:ln>
+              <a:solidFill>
+                <a:prstClr val="black"/>
+              </a:solidFill>
+              <a:effectLst/>
+              <a:uLnTx/>
+              <a:uFillTx/>
+              <a:latin typeface="Calibri"/>
+              <a:ea typeface="+mn-ea"/>
+              <a:cs typeface="+mn-cs"/>
+            </a:endParaRPr>
           </a:p>
         </p:txBody>
       </p:sp>
+    </p:spTree>
+    <p:extLst>
+      <p:ext uri="{BB962C8B-B14F-4D97-AF65-F5344CB8AC3E}">
+        <p14:creationId xmlns:p14="http://schemas.microsoft.com/office/powerpoint/2010/main" val="2357617953"/>
+      </p:ext>
+    </p:extLst>
+  </p:cSld>
+  <p:clrMapOvr>
+    <a:masterClrMapping/>
+  </p:clrMapOvr>
+</p:sld>
+</file>
+
+<file path=ppt/slides/slide11.xml><?xml version="1.0" encoding="utf-8"?>
+<p:sld xmlns:a="http://schemas.openxmlformats.org/drawingml/2006/main" xmlns:r="http://schemas.openxmlformats.org/officeDocument/2006/relationships" xmlns:p="http://schemas.openxmlformats.org/presentationml/2006/main">
+  <p:cSld>
+    <p:spTree>
+      <p:nvGrpSpPr>
+        <p:cNvPr id="1" name="">
+          <a:extLst>
+            <a:ext uri="{FF2B5EF4-FFF2-40B4-BE49-F238E27FC236}">
+              <a16:creationId xmlns:a16="http://schemas.microsoft.com/office/drawing/2014/main" id="{BBBF76C9-A6B1-0DB5-8FC2-A6232A69E55B}"/>
+            </a:ext>
+          </a:extLst>
+        </p:cNvPr>
+        <p:cNvGrpSpPr/>
+        <p:nvPr/>
+      </p:nvGrpSpPr>
+      <p:grpSpPr>
+        <a:xfrm>
+          <a:off x="0" y="0"/>
+          <a:ext cx="0" cy="0"/>
+          <a:chOff x="0" y="0"/>
+          <a:chExt cx="0" cy="0"/>
+        </a:xfrm>
+      </p:grpSpPr>
+      <p:sp>
+        <p:nvSpPr>
+          <p:cNvPr id="3" name="TextBox 2">
+            <a:extLst>
+              <a:ext uri="{FF2B5EF4-FFF2-40B4-BE49-F238E27FC236}">
+                <a16:creationId xmlns:a16="http://schemas.microsoft.com/office/drawing/2014/main" id="{E447E8AF-C05E-9A81-6B3B-EDEB3674E571}"/>
+              </a:ext>
+            </a:extLst>
+          </p:cNvPr>
+          <p:cNvSpPr txBox="1"/>
+          <p:nvPr/>
+        </p:nvSpPr>
+        <p:spPr>
+          <a:xfrm>
+            <a:off x="4253340" y="2988879"/>
+            <a:ext cx="184731" cy="1448986"/>
+          </a:xfrm>
+          <a:prstGeom prst="rect">
+            <a:avLst/>
+          </a:prstGeom>
+          <a:noFill/>
+        </p:spPr>
+        <p:txBody>
+          <a:bodyPr wrap="none">
+            <a:spAutoFit/>
+          </a:bodyPr>
+          <a:lstStyle/>
+          <a:p>
+            <a:pPr>
+              <a:lnSpc>
+                <a:spcPct val="120000"/>
+              </a:lnSpc>
+              <a:defRPr sz="2000"/>
+            </a:pPr>
+            <a:endParaRPr lang="pl-PL" sz="3800" b="1" dirty="0">
+              <a:solidFill>
+                <a:srgbClr val="17375E"/>
+              </a:solidFill>
+            </a:endParaRPr>
+          </a:p>
+          <a:p>
+            <a:pPr>
+              <a:lnSpc>
+                <a:spcPct val="120000"/>
+              </a:lnSpc>
+              <a:defRPr sz="2000"/>
+            </a:pPr>
+            <a:endParaRPr lang="pl-PL" sz="3800" dirty="0"/>
+          </a:p>
+        </p:txBody>
+      </p:sp>
+      <p:pic>
+        <p:nvPicPr>
+          <p:cNvPr id="7" name="Obraz 6">
+            <a:extLst>
+              <a:ext uri="{FF2B5EF4-FFF2-40B4-BE49-F238E27FC236}">
+                <a16:creationId xmlns:a16="http://schemas.microsoft.com/office/drawing/2014/main" id="{335E15CE-0B6C-F524-E4AE-218BC358E08A}"/>
+              </a:ext>
+            </a:extLst>
+          </p:cNvPr>
+          <p:cNvPicPr>
+            <a:picLocks noChangeAspect="1"/>
+          </p:cNvPicPr>
+          <p:nvPr/>
+        </p:nvPicPr>
+        <p:blipFill>
+          <a:blip r:embed="rId3"/>
+          <a:stretch>
+            <a:fillRect/>
+          </a:stretch>
+        </p:blipFill>
+        <p:spPr>
+          <a:xfrm>
+            <a:off x="-85407" y="-67113"/>
+            <a:ext cx="12808658" cy="6992226"/>
+          </a:xfrm>
+          <a:prstGeom prst="rect">
+            <a:avLst/>
+          </a:prstGeom>
+          <a:ln>
+            <a:noFill/>
+          </a:ln>
+          <a:effectLst>
+            <a:softEdge rad="112500"/>
+          </a:effectLst>
+        </p:spPr>
+      </p:pic>
     </p:spTree>
     <p:extLst>
       <p:ext uri="{BB962C8B-B14F-4D97-AF65-F5344CB8AC3E}">
@@ -8621,7 +9730,7 @@
         <p:spPr>
           <a:xfrm>
             <a:off x="298481" y="3796421"/>
-            <a:ext cx="6399188" cy="1988237"/>
+            <a:ext cx="6399188" cy="1618905"/>
           </a:xfrm>
           <a:prstGeom prst="rect">
             <a:avLst/>
@@ -8698,31 +9807,22 @@
               <a:defRPr sz="2000"/>
             </a:pPr>
             <a:r>
-              <a:rPr lang="pl-PL" dirty="0">
-                <a:solidFill>
-                  <a:srgbClr val="464646"/>
-                </a:solidFill>
-              </a:rPr>
-              <a:t>Obejmuje ponad 1100 sklepów Rossmann,</a:t>
-            </a:r>
-          </a:p>
-          <a:p>
-            <a:pPr marL="800100" lvl="1" indent="-342900">
-              <a:lnSpc>
-                <a:spcPct val="120000"/>
-              </a:lnSpc>
-              <a:buFont typeface="Arial" panose="020B0604020202020204" pitchFamily="34" charset="0"/>
-              <a:buChar char="•"/>
-              <a:defRPr sz="2000"/>
-            </a:pPr>
-            <a:r>
-              <a:rPr lang="pl-PL" dirty="0">
-                <a:solidFill>
-                  <a:srgbClr val="464646"/>
-                </a:solidFill>
-              </a:rPr>
-              <a:t>Wspiera planowanie dostaw i zarządzanie zapasami.</a:t>
-            </a:r>
+              <a:rPr lang="pl-PL" dirty="0"/>
+              <a:t>Uzyska </a:t>
+            </a:r>
+            <a:r>
+              <a:rPr lang="pl-PL" b="1" dirty="0"/>
+              <a:t>najniższy</a:t>
+            </a:r>
+            <a:r>
+              <a:rPr lang="pl-PL" dirty="0"/>
+              <a:t> błąd prognozy </a:t>
+            </a:r>
+            <a:endParaRPr lang="pl-PL" dirty="0">
+              <a:solidFill>
+                <a:srgbClr val="464646"/>
+              </a:solidFill>
+            </a:endParaRPr>
           </a:p>
         </p:txBody>
       </p:sp>
@@ -8740,8 +9840,8 @@
         </p:nvSpPr>
         <p:spPr>
           <a:xfrm>
-            <a:off x="5801410" y="944948"/>
-            <a:ext cx="6252481" cy="1618905"/>
+            <a:off x="5957274" y="466079"/>
+            <a:ext cx="5841026" cy="2357568"/>
           </a:xfrm>
           <a:prstGeom prst="rect">
             <a:avLst/>
@@ -8749,7 +9849,7 @@
           <a:noFill/>
         </p:spPr>
         <p:txBody>
-          <a:bodyPr wrap="none">
+          <a:bodyPr wrap="square">
             <a:spAutoFit/>
           </a:bodyPr>
           <a:lstStyle/>
@@ -8796,7 +9896,7 @@
                   <a:srgbClr val="464646"/>
                 </a:solidFill>
               </a:rPr>
-              <a:t> – średni błąd prognozy,</a:t>
+              <a:t> – średni błąd prognozy</a:t>
             </a:r>
           </a:p>
           <a:p>
@@ -8822,7 +9922,7 @@
                   <a:srgbClr val="464646"/>
                 </a:solidFill>
               </a:rPr>
-              <a:t> – procentowy błąd prognozy,</a:t>
+              <a:t> – procentowy błąd prognozy „z karą” (oficjalna metryka konkursowa),</a:t>
             </a:r>
           </a:p>
           <a:p>
@@ -8847,10 +9947,10 @@
       </p:sp>
       <p:sp>
         <p:nvSpPr>
-          <p:cNvPr id="18" name="Prostokąt 17">
+          <p:cNvPr id="4" name="Prostokąt 3">
             <a:extLst>
               <a:ext uri="{FF2B5EF4-FFF2-40B4-BE49-F238E27FC236}">
-                <a16:creationId xmlns:a16="http://schemas.microsoft.com/office/drawing/2014/main" id="{7CBAC022-3524-479B-C4AB-942FB6532B16}"/>
+                <a16:creationId xmlns:a16="http://schemas.microsoft.com/office/drawing/2014/main" id="{32170B80-61A5-961D-9799-EE028FC4F17C}"/>
               </a:ext>
             </a:extLst>
           </p:cNvPr>
@@ -8859,7 +9959,7 @@
         </p:nvSpPr>
         <p:spPr>
           <a:xfrm>
-            <a:off x="7190360" y="2695671"/>
+            <a:off x="7190360" y="2882506"/>
             <a:ext cx="2129397" cy="546494"/>
           </a:xfrm>
           <a:prstGeom prst="rect">
@@ -8904,10 +10004,10 @@
       </p:sp>
       <p:sp>
         <p:nvSpPr>
-          <p:cNvPr id="20" name="Prostokąt 19">
+          <p:cNvPr id="5" name="Prostokąt 4">
             <a:extLst>
               <a:ext uri="{FF2B5EF4-FFF2-40B4-BE49-F238E27FC236}">
-                <a16:creationId xmlns:a16="http://schemas.microsoft.com/office/drawing/2014/main" id="{9B75C48A-16C3-6C7B-A5F2-2D412D8D67DC}"/>
+                <a16:creationId xmlns:a16="http://schemas.microsoft.com/office/drawing/2014/main" id="{28AF780B-B092-A731-B107-1A7D4EE81CEF}"/>
               </a:ext>
             </a:extLst>
           </p:cNvPr>
@@ -8916,7 +10016,7 @@
         </p:nvSpPr>
         <p:spPr>
           <a:xfrm>
-            <a:off x="7568399" y="3497500"/>
+            <a:off x="7568399" y="3684335"/>
             <a:ext cx="2129397" cy="546493"/>
           </a:xfrm>
           <a:prstGeom prst="rect">
@@ -8958,10 +10058,10 @@
       </p:sp>
       <p:sp>
         <p:nvSpPr>
-          <p:cNvPr id="22" name="Prostokąt 21">
+          <p:cNvPr id="6" name="Prostokąt 5">
             <a:extLst>
               <a:ext uri="{FF2B5EF4-FFF2-40B4-BE49-F238E27FC236}">
-                <a16:creationId xmlns:a16="http://schemas.microsoft.com/office/drawing/2014/main" id="{66B15E2F-934B-83D4-414D-54799FB1CCD3}"/>
+                <a16:creationId xmlns:a16="http://schemas.microsoft.com/office/drawing/2014/main" id="{20C1B855-EBE2-37DE-F107-08CDE7270A22}"/>
               </a:ext>
             </a:extLst>
           </p:cNvPr>
@@ -8970,7 +10070,7 @@
         </p:nvSpPr>
         <p:spPr>
           <a:xfrm>
-            <a:off x="8095522" y="4244046"/>
+            <a:off x="8095522" y="4430881"/>
             <a:ext cx="2129397" cy="546493"/>
           </a:xfrm>
           <a:prstGeom prst="rect">
@@ -9015,10 +10115,10 @@
       </p:sp>
       <p:sp>
         <p:nvSpPr>
-          <p:cNvPr id="24" name="Prostokąt 23">
+          <p:cNvPr id="9" name="Prostokąt 8">
             <a:extLst>
               <a:ext uri="{FF2B5EF4-FFF2-40B4-BE49-F238E27FC236}">
-                <a16:creationId xmlns:a16="http://schemas.microsoft.com/office/drawing/2014/main" id="{4A6CCD23-474D-8781-4DF4-9C9D98129608}"/>
+                <a16:creationId xmlns:a16="http://schemas.microsoft.com/office/drawing/2014/main" id="{4CDF1B02-5636-29C1-AF07-466967728941}"/>
               </a:ext>
             </a:extLst>
           </p:cNvPr>
@@ -9027,7 +10127,7 @@
         </p:nvSpPr>
         <p:spPr>
           <a:xfrm>
-            <a:off x="8633097" y="5040998"/>
+            <a:off x="8633097" y="5227833"/>
             <a:ext cx="2129397" cy="541470"/>
           </a:xfrm>
           <a:prstGeom prst="rect">
@@ -9057,7 +10157,7 @@
           <a:p>
             <a:pPr algn="ctr"/>
             <a:r>
-              <a:rPr lang="pl-PL" sz="1200" dirty="0">
+              <a:rPr lang="pl-PL" sz="1200" b="1" dirty="0">
                 <a:solidFill>
                   <a:schemeClr val="tx1"/>
                 </a:solidFill>
@@ -9069,10 +10169,10 @@
       </p:sp>
       <p:cxnSp>
         <p:nvCxnSpPr>
-          <p:cNvPr id="26" name="Łącznik prosty ze strzałką 25">
+          <p:cNvPr id="10" name="Łącznik prosty ze strzałką 9">
             <a:extLst>
               <a:ext uri="{FF2B5EF4-FFF2-40B4-BE49-F238E27FC236}">
-                <a16:creationId xmlns:a16="http://schemas.microsoft.com/office/drawing/2014/main" id="{618B73FD-B3E2-8F7C-E3CD-39082FBE98A9}"/>
+                <a16:creationId xmlns:a16="http://schemas.microsoft.com/office/drawing/2014/main" id="{800DC102-CC6E-8121-94C1-2D75FAE97429}"/>
               </a:ext>
             </a:extLst>
           </p:cNvPr>
@@ -9083,7 +10183,7 @@
         </p:nvCxnSpPr>
         <p:spPr>
           <a:xfrm>
-            <a:off x="8829565" y="3271628"/>
+            <a:off x="8829565" y="3458463"/>
             <a:ext cx="0" cy="200053"/>
           </a:xfrm>
           <a:prstGeom prst="straightConnector1">
@@ -9115,10 +10215,10 @@
       </p:cxnSp>
       <p:cxnSp>
         <p:nvCxnSpPr>
-          <p:cNvPr id="27" name="Łącznik prosty ze strzałką 26">
+          <p:cNvPr id="12" name="Łącznik prosty ze strzałką 11">
             <a:extLst>
               <a:ext uri="{FF2B5EF4-FFF2-40B4-BE49-F238E27FC236}">
-                <a16:creationId xmlns:a16="http://schemas.microsoft.com/office/drawing/2014/main" id="{536F5BCF-4062-8387-595E-3C6A7532F27D}"/>
+                <a16:creationId xmlns:a16="http://schemas.microsoft.com/office/drawing/2014/main" id="{92327CD9-71F4-D151-4575-EAACCB5A8566}"/>
               </a:ext>
             </a:extLst>
           </p:cNvPr>
@@ -9129,7 +10229,7 @@
         </p:nvCxnSpPr>
         <p:spPr>
           <a:xfrm>
-            <a:off x="9319757" y="4043993"/>
+            <a:off x="9319757" y="4230828"/>
             <a:ext cx="0" cy="200053"/>
           </a:xfrm>
           <a:prstGeom prst="straightConnector1">
@@ -9161,10 +10261,10 @@
       </p:cxnSp>
       <p:cxnSp>
         <p:nvCxnSpPr>
-          <p:cNvPr id="28" name="Łącznik prosty ze strzałką 27">
+          <p:cNvPr id="13" name="Łącznik prosty ze strzałką 12">
             <a:extLst>
               <a:ext uri="{FF2B5EF4-FFF2-40B4-BE49-F238E27FC236}">
-                <a16:creationId xmlns:a16="http://schemas.microsoft.com/office/drawing/2014/main" id="{9944C8D8-DDC9-357D-5533-6651E26D305A}"/>
+                <a16:creationId xmlns:a16="http://schemas.microsoft.com/office/drawing/2014/main" id="{6CEF7431-FE6C-6D0A-FD17-299FCFDC47AB}"/>
               </a:ext>
             </a:extLst>
           </p:cNvPr>
@@ -9175,7 +10275,7 @@
         </p:nvCxnSpPr>
         <p:spPr>
           <a:xfrm>
-            <a:off x="9885309" y="4819260"/>
+            <a:off x="9885309" y="5006095"/>
             <a:ext cx="0" cy="210563"/>
           </a:xfrm>
           <a:prstGeom prst="straightConnector1">
@@ -9205,42 +10305,12 @@
           </a:fontRef>
         </p:style>
       </p:cxnSp>
-      <p:pic>
-        <p:nvPicPr>
-          <p:cNvPr id="11" name="Obraz 10">
+      <p:sp>
+        <p:nvSpPr>
+          <p:cNvPr id="14" name="Prostokąt 13">
             <a:extLst>
               <a:ext uri="{FF2B5EF4-FFF2-40B4-BE49-F238E27FC236}">
-                <a16:creationId xmlns:a16="http://schemas.microsoft.com/office/drawing/2014/main" id="{D25A7203-C0DD-A9E2-7347-8B2C3D2CAD7E}"/>
-              </a:ext>
-            </a:extLst>
-          </p:cNvPr>
-          <p:cNvPicPr>
-            <a:picLocks noChangeAspect="1"/>
-          </p:cNvPicPr>
-          <p:nvPr/>
-        </p:nvPicPr>
-        <p:blipFill>
-          <a:blip r:embed="rId3"/>
-          <a:stretch>
-            <a:fillRect/>
-          </a:stretch>
-        </p:blipFill>
-        <p:spPr>
-          <a:xfrm>
-            <a:off x="10213629" y="5582468"/>
-            <a:ext cx="243861" cy="371888"/>
-          </a:xfrm>
-          <a:prstGeom prst="rect">
-            <a:avLst/>
-          </a:prstGeom>
-        </p:spPr>
-      </p:pic>
-      <p:sp>
-        <p:nvSpPr>
-          <p:cNvPr id="15" name="Prostokąt 14">
-            <a:extLst>
-              <a:ext uri="{FF2B5EF4-FFF2-40B4-BE49-F238E27FC236}">
-                <a16:creationId xmlns:a16="http://schemas.microsoft.com/office/drawing/2014/main" id="{5A9BE532-6CCC-AAAC-99DD-C9C65DCCF724}"/>
+                <a16:creationId xmlns:a16="http://schemas.microsoft.com/office/drawing/2014/main" id="{47266B73-2EC2-9924-3409-CA06EA07774F}"/>
               </a:ext>
             </a:extLst>
           </p:cNvPr>
@@ -9249,7 +10319,7 @@
         </p:nvSpPr>
         <p:spPr>
           <a:xfrm>
-            <a:off x="9148930" y="5822193"/>
+            <a:off x="9148930" y="6009028"/>
             <a:ext cx="2129397" cy="541470"/>
           </a:xfrm>
           <a:prstGeom prst="rect">
@@ -9279,13 +10349,57 @@
           <a:p>
             <a:pPr algn="ctr"/>
             <a:r>
-              <a:rPr lang="pl-PL" sz="1200" b="1" dirty="0">
+              <a:rPr lang="pl-PL" sz="1400" b="1" dirty="0">
                 <a:solidFill>
                   <a:schemeClr val="tx1"/>
                 </a:solidFill>
               </a:rPr>
               <a:t>Lepsze decyzje biznesowe</a:t>
             </a:r>
+          </a:p>
+        </p:txBody>
+      </p:sp>
+      <p:sp>
+        <p:nvSpPr>
+          <p:cNvPr id="16" name="Strzałka: w dół 15">
+            <a:extLst>
+              <a:ext uri="{FF2B5EF4-FFF2-40B4-BE49-F238E27FC236}">
+                <a16:creationId xmlns:a16="http://schemas.microsoft.com/office/drawing/2014/main" id="{D681901B-C3BC-8782-4C43-7A01283F4E0C}"/>
+              </a:ext>
+            </a:extLst>
+          </p:cNvPr>
+          <p:cNvSpPr/>
+          <p:nvPr/>
+        </p:nvSpPr>
+        <p:spPr>
+          <a:xfrm>
+            <a:off x="10095789" y="5671393"/>
+            <a:ext cx="235678" cy="387432"/>
+          </a:xfrm>
+          <a:prstGeom prst="downArrow">
+            <a:avLst/>
+          </a:prstGeom>
+        </p:spPr>
+        <p:style>
+          <a:lnRef idx="1">
+            <a:schemeClr val="accent1"/>
+          </a:lnRef>
+          <a:fillRef idx="3">
+            <a:schemeClr val="accent1"/>
+          </a:fillRef>
+          <a:effectRef idx="2">
+            <a:schemeClr val="accent1"/>
+          </a:effectRef>
+          <a:fontRef idx="minor">
+            <a:schemeClr val="lt1"/>
+          </a:fontRef>
+        </p:style>
+        <p:txBody>
+          <a:bodyPr rtlCol="0" anchor="ctr"/>
+          <a:lstStyle/>
+          <a:p>
+            <a:pPr algn="ctr"/>
+            <a:endParaRPr lang="pl-PL"/>
           </a:p>
         </p:txBody>
       </p:sp>
@@ -9299,6 +10413,176 @@
   <p:clrMapOvr>
     <a:masterClrMapping/>
   </p:clrMapOvr>
+  <p:timing>
+    <p:tnLst>
+      <p:par>
+        <p:cTn id="1" dur="indefinite" restart="never" nodeType="tmRoot">
+          <p:childTnLst>
+            <p:seq concurrent="1" nextAc="seek">
+              <p:cTn id="2" dur="indefinite" nodeType="mainSeq">
+                <p:childTnLst>
+                  <p:par>
+                    <p:cTn id="3" fill="hold">
+                      <p:stCondLst>
+                        <p:cond delay="indefinite"/>
+                      </p:stCondLst>
+                      <p:childTnLst>
+                        <p:par>
+                          <p:cTn id="4" fill="hold">
+                            <p:stCondLst>
+                              <p:cond delay="0"/>
+                            </p:stCondLst>
+                            <p:childTnLst>
+                              <p:par>
+                                <p:cTn id="5" presetID="1" presetClass="entr" presetSubtype="0" fill="hold" grpId="0" nodeType="clickEffect">
+                                  <p:stCondLst>
+                                    <p:cond delay="0"/>
+                                  </p:stCondLst>
+                                  <p:childTnLst>
+                                    <p:set>
+                                      <p:cBhvr>
+                                        <p:cTn id="6" dur="1" fill="hold">
+                                          <p:stCondLst>
+                                            <p:cond delay="0"/>
+                                          </p:stCondLst>
+                                        </p:cTn>
+                                        <p:tgtEl>
+                                          <p:spTgt spid="3"/>
+                                        </p:tgtEl>
+                                        <p:attrNameLst>
+                                          <p:attrName>style.visibility</p:attrName>
+                                        </p:attrNameLst>
+                                      </p:cBhvr>
+                                      <p:to>
+                                        <p:strVal val="visible"/>
+                                      </p:to>
+                                    </p:set>
+                                  </p:childTnLst>
+                                </p:cTn>
+                              </p:par>
+                            </p:childTnLst>
+                          </p:cTn>
+                        </p:par>
+                      </p:childTnLst>
+                    </p:cTn>
+                  </p:par>
+                  <p:par>
+                    <p:cTn id="7" fill="hold">
+                      <p:stCondLst>
+                        <p:cond delay="indefinite"/>
+                      </p:stCondLst>
+                      <p:childTnLst>
+                        <p:par>
+                          <p:cTn id="8" fill="hold">
+                            <p:stCondLst>
+                              <p:cond delay="0"/>
+                            </p:stCondLst>
+                            <p:childTnLst>
+                              <p:par>
+                                <p:cTn id="9" presetID="1" presetClass="entr" presetSubtype="0" fill="hold" grpId="0" nodeType="clickEffect">
+                                  <p:stCondLst>
+                                    <p:cond delay="0"/>
+                                  </p:stCondLst>
+                                  <p:childTnLst>
+                                    <p:set>
+                                      <p:cBhvr>
+                                        <p:cTn id="10" dur="1" fill="hold">
+                                          <p:stCondLst>
+                                            <p:cond delay="0"/>
+                                          </p:stCondLst>
+                                        </p:cTn>
+                                        <p:tgtEl>
+                                          <p:spTgt spid="8"/>
+                                        </p:tgtEl>
+                                        <p:attrNameLst>
+                                          <p:attrName>style.visibility</p:attrName>
+                                        </p:attrNameLst>
+                                      </p:cBhvr>
+                                      <p:to>
+                                        <p:strVal val="visible"/>
+                                      </p:to>
+                                    </p:set>
+                                  </p:childTnLst>
+                                </p:cTn>
+                              </p:par>
+                            </p:childTnLst>
+                          </p:cTn>
+                        </p:par>
+                      </p:childTnLst>
+                    </p:cTn>
+                  </p:par>
+                  <p:par>
+                    <p:cTn id="11" fill="hold">
+                      <p:stCondLst>
+                        <p:cond delay="indefinite"/>
+                      </p:stCondLst>
+                      <p:childTnLst>
+                        <p:par>
+                          <p:cTn id="12" fill="hold">
+                            <p:stCondLst>
+                              <p:cond delay="0"/>
+                            </p:stCondLst>
+                            <p:childTnLst>
+                              <p:par>
+                                <p:cTn id="13" presetID="1" presetClass="entr" presetSubtype="0" fill="hold" grpId="0" nodeType="clickEffect">
+                                  <p:stCondLst>
+                                    <p:cond delay="0"/>
+                                  </p:stCondLst>
+                                  <p:childTnLst>
+                                    <p:set>
+                                      <p:cBhvr>
+                                        <p:cTn id="14" dur="1" fill="hold">
+                                          <p:stCondLst>
+                                            <p:cond delay="0"/>
+                                          </p:stCondLst>
+                                        </p:cTn>
+                                        <p:tgtEl>
+                                          <p:spTgt spid="17"/>
+                                        </p:tgtEl>
+                                        <p:attrNameLst>
+                                          <p:attrName>style.visibility</p:attrName>
+                                        </p:attrNameLst>
+                                      </p:cBhvr>
+                                      <p:to>
+                                        <p:strVal val="visible"/>
+                                      </p:to>
+                                    </p:set>
+                                  </p:childTnLst>
+                                </p:cTn>
+                              </p:par>
+                            </p:childTnLst>
+                          </p:cTn>
+                        </p:par>
+                      </p:childTnLst>
+                    </p:cTn>
+                  </p:par>
+                </p:childTnLst>
+              </p:cTn>
+              <p:prevCondLst>
+                <p:cond evt="onPrev" delay="0">
+                  <p:tgtEl>
+                    <p:sldTgt/>
+                  </p:tgtEl>
+                </p:cond>
+              </p:prevCondLst>
+              <p:nextCondLst>
+                <p:cond evt="onNext" delay="0">
+                  <p:tgtEl>
+                    <p:sldTgt/>
+                  </p:tgtEl>
+                </p:cond>
+              </p:nextCondLst>
+            </p:seq>
+          </p:childTnLst>
+        </p:cTn>
+      </p:par>
+    </p:tnLst>
+    <p:bldLst>
+      <p:bldP spid="3" grpId="0"/>
+      <p:bldP spid="8" grpId="0"/>
+      <p:bldP spid="17" grpId="0"/>
+    </p:bldLst>
+  </p:timing>
 </p:sld>
 </file>
 
@@ -9403,7 +10687,7 @@
         <p:spPr>
           <a:xfrm>
             <a:off x="233559" y="1108365"/>
-            <a:ext cx="5944256" cy="2357568"/>
+            <a:ext cx="5795766" cy="2357568"/>
           </a:xfrm>
           <a:prstGeom prst="rect">
             <a:avLst/>
@@ -9411,7 +10695,7 @@
           <a:noFill/>
         </p:spPr>
         <p:txBody>
-          <a:bodyPr wrap="none">
+          <a:bodyPr wrap="square">
             <a:spAutoFit/>
           </a:bodyPr>
           <a:lstStyle/>
@@ -9450,7 +10734,7 @@
                   <a:srgbClr val="464646"/>
                 </a:solidFill>
               </a:rPr>
-              <a:t>Historyczne dane sprzedażowe sieci </a:t>
+              <a:t>Ponad</a:t>
             </a:r>
             <a:r>
               <a:rPr lang="pl-PL" b="1" dirty="0">
@@ -9458,7 +10742,7 @@
                   <a:srgbClr val="464646"/>
                 </a:solidFill>
               </a:rPr>
-              <a:t>Rossmann,</a:t>
+              <a:t> 1100 sklepów,</a:t>
             </a:r>
             <a:endParaRPr lang="pl-PL" dirty="0">
               <a:solidFill>
@@ -9481,38 +10765,7 @@
                   <a:srgbClr val="464646"/>
                 </a:solidFill>
               </a:rPr>
-              <a:t>Ponad</a:t>
-            </a:r>
-            <a:r>
-              <a:rPr lang="pl-PL" b="1" dirty="0">
-                <a:solidFill>
-                  <a:srgbClr val="464646"/>
-                </a:solidFill>
-              </a:rPr>
-              <a:t> 1100 sklepów,</a:t>
-            </a:r>
-            <a:endParaRPr lang="pl-PL" dirty="0">
-              <a:solidFill>
-                <a:srgbClr val="464646"/>
-              </a:solidFill>
-            </a:endParaRPr>
-          </a:p>
-          <a:p>
-            <a:pPr marL="800100" lvl="1" indent="-342900">
-              <a:lnSpc>
-                <a:spcPct val="120000"/>
-              </a:lnSpc>
-              <a:buFont typeface="Arial" panose="020B0604020202020204" pitchFamily="34" charset="0"/>
-              <a:buChar char="•"/>
-              <a:defRPr sz="2000"/>
-            </a:pPr>
-            <a:r>
-              <a:rPr lang="pl-PL" dirty="0">
-                <a:solidFill>
-                  <a:srgbClr val="464646"/>
-                </a:solidFill>
-              </a:rPr>
-              <a:t>Setki tysięcy rekordów,</a:t>
+              <a:t>Setki tysięcy rekordów (surowe 1 017 209 x 9) – finalnie 844 338 x 35</a:t>
             </a:r>
           </a:p>
           <a:p>
@@ -9615,7 +10868,7 @@
         </p:nvSpPr>
         <p:spPr>
           <a:xfrm>
-            <a:off x="233559" y="4806822"/>
+            <a:off x="328809" y="4410335"/>
             <a:ext cx="5442516" cy="1618905"/>
           </a:xfrm>
           <a:prstGeom prst="rect">
@@ -9718,8 +10971,8 @@
         </p:nvSpPr>
         <p:spPr>
           <a:xfrm>
-            <a:off x="6298594" y="1008583"/>
-            <a:ext cx="5509842" cy="1988237"/>
+            <a:off x="6029325" y="1008583"/>
+            <a:ext cx="5867312" cy="1988237"/>
           </a:xfrm>
           <a:prstGeom prst="rect">
             <a:avLst/>
@@ -9774,8 +11027,41 @@
                   <a:srgbClr val="464646"/>
                 </a:solidFill>
               </a:rPr>
-              <a:t>Cechy kalendarzowe,</a:t>
-            </a:r>
+              <a:t>Cechy kalendarzowe (</a:t>
+            </a:r>
+            <a:r>
+              <a:rPr lang="pl-PL" sz="2000" i="1" dirty="0" err="1"/>
+              <a:t>DayOfWeek</a:t>
+            </a:r>
+            <a:r>
+              <a:rPr lang="pl-PL" dirty="0"/>
+              <a:t> </a:t>
+            </a:r>
+            <a:r>
+              <a:rPr lang="pl-PL" dirty="0">
+                <a:solidFill>
+                  <a:srgbClr val="464646"/>
+                </a:solidFill>
+              </a:rPr>
+              <a:t>,</a:t>
+            </a:r>
+            <a:r>
+              <a:rPr lang="pl-PL" sz="2000" dirty="0"/>
+              <a:t> </a:t>
+            </a:r>
+            <a:r>
+              <a:rPr lang="pl-PL" sz="2000" i="1" dirty="0" err="1"/>
+              <a:t>Month</a:t>
+            </a:r>
+            <a:r>
+              <a:rPr lang="pl-PL" sz="2000" dirty="0"/>
+              <a:t> itd.)</a:t>
+            </a:r>
+            <a:endParaRPr lang="pl-PL" dirty="0">
+              <a:solidFill>
+                <a:srgbClr val="464646"/>
+              </a:solidFill>
+            </a:endParaRPr>
           </a:p>
           <a:p>
             <a:pPr marL="800100" lvl="1" indent="-342900">
@@ -9810,18 +11096,26 @@
                   <a:srgbClr val="464646"/>
                 </a:solidFill>
               </a:rPr>
-              <a:t>Statystyki kroczące: Rolling </a:t>
-            </a:r>
-            <a:r>
-              <a:rPr lang="pl-PL" dirty="0" err="1">
+              <a:t>Statystyki kroczące: </a:t>
+            </a:r>
+            <a:r>
+              <a:rPr lang="pl-PL" i="1" dirty="0">
                 <a:solidFill>
                   <a:srgbClr val="464646"/>
                 </a:solidFill>
               </a:rPr>
+              <a:t>Rolling </a:t>
+            </a:r>
+            <a:r>
+              <a:rPr lang="pl-PL" i="1" dirty="0" err="1">
+                <a:solidFill>
+                  <a:srgbClr val="464646"/>
+                </a:solidFill>
+              </a:rPr>
               <a:t>Mean</a:t>
             </a:r>
             <a:r>
-              <a:rPr lang="pl-PL" dirty="0">
+              <a:rPr lang="pl-PL" i="1" dirty="0">
                 <a:solidFill>
                   <a:srgbClr val="464646"/>
                 </a:solidFill>
@@ -9829,14 +11123,14 @@
               <a:t>,</a:t>
             </a:r>
             <a:br>
-              <a:rPr lang="pl-PL" dirty="0">
+              <a:rPr lang="pl-PL" i="1" dirty="0">
                 <a:solidFill>
                   <a:srgbClr val="464646"/>
                 </a:solidFill>
               </a:rPr>
             </a:br>
             <a:r>
-              <a:rPr lang="pl-PL" dirty="0">
+              <a:rPr lang="pl-PL" i="1" dirty="0">
                 <a:solidFill>
                   <a:srgbClr val="464646"/>
                 </a:solidFill>
@@ -9844,7 +11138,7 @@
               <a:t>Rolling Standard </a:t>
             </a:r>
             <a:r>
-              <a:rPr lang="pl-PL" dirty="0" err="1">
+              <a:rPr lang="pl-PL" i="1" dirty="0" err="1">
                 <a:solidFill>
                   <a:srgbClr val="464646"/>
                 </a:solidFill>
@@ -9852,13 +11146,18 @@
               <a:t>Deviation</a:t>
             </a:r>
             <a:r>
-              <a:rPr lang="pl-PL" dirty="0">
+              <a:rPr lang="pl-PL" i="1" dirty="0">
                 <a:solidFill>
                   <a:srgbClr val="464646"/>
                 </a:solidFill>
               </a:rPr>
-              <a:t>, Rolling Median.</a:t>
-            </a:r>
+              <a:t>, Rolling Median</a:t>
+            </a:r>
+            <a:endParaRPr lang="pl-PL" dirty="0">
+              <a:solidFill>
+                <a:srgbClr val="464646"/>
+              </a:solidFill>
+            </a:endParaRPr>
           </a:p>
         </p:txBody>
       </p:sp>
@@ -9884,8 +11183,8 @@
         </p:blipFill>
         <p:spPr>
           <a:xfrm>
-            <a:off x="4413917" y="3130925"/>
-            <a:ext cx="3769355" cy="2071171"/>
+            <a:off x="6298594" y="3130924"/>
+            <a:ext cx="5634879" cy="3096232"/>
           </a:xfrm>
           <a:prstGeom prst="rect">
             <a:avLst/>
@@ -9921,8 +11220,8 @@
         </p:blipFill>
         <p:spPr>
           <a:xfrm>
-            <a:off x="8268278" y="4483865"/>
-            <a:ext cx="3801573" cy="2071171"/>
+            <a:off x="6275399" y="3130924"/>
+            <a:ext cx="5683042" cy="3096232"/>
           </a:xfrm>
           <a:prstGeom prst="rect">
             <a:avLst/>
@@ -9946,6 +11245,311 @@
   <p:clrMapOvr>
     <a:masterClrMapping/>
   </p:clrMapOvr>
+  <p:timing>
+    <p:tnLst>
+      <p:par>
+        <p:cTn id="1" dur="indefinite" restart="never" nodeType="tmRoot">
+          <p:childTnLst>
+            <p:seq concurrent="1" nextAc="seek">
+              <p:cTn id="2" dur="indefinite" nodeType="mainSeq">
+                <p:childTnLst>
+                  <p:par>
+                    <p:cTn id="3" fill="hold">
+                      <p:stCondLst>
+                        <p:cond delay="indefinite"/>
+                      </p:stCondLst>
+                      <p:childTnLst>
+                        <p:par>
+                          <p:cTn id="4" fill="hold">
+                            <p:stCondLst>
+                              <p:cond delay="0"/>
+                            </p:stCondLst>
+                            <p:childTnLst>
+                              <p:par>
+                                <p:cTn id="5" presetID="1" presetClass="entr" presetSubtype="0" fill="hold" grpId="0" nodeType="clickEffect">
+                                  <p:stCondLst>
+                                    <p:cond delay="0"/>
+                                  </p:stCondLst>
+                                  <p:childTnLst>
+                                    <p:set>
+                                      <p:cBhvr>
+                                        <p:cTn id="6" dur="1" fill="hold">
+                                          <p:stCondLst>
+                                            <p:cond delay="0"/>
+                                          </p:stCondLst>
+                                        </p:cTn>
+                                        <p:tgtEl>
+                                          <p:spTgt spid="3"/>
+                                        </p:tgtEl>
+                                        <p:attrNameLst>
+                                          <p:attrName>style.visibility</p:attrName>
+                                        </p:attrNameLst>
+                                      </p:cBhvr>
+                                      <p:to>
+                                        <p:strVal val="visible"/>
+                                      </p:to>
+                                    </p:set>
+                                  </p:childTnLst>
+                                </p:cTn>
+                              </p:par>
+                            </p:childTnLst>
+                          </p:cTn>
+                        </p:par>
+                      </p:childTnLst>
+                    </p:cTn>
+                  </p:par>
+                  <p:par>
+                    <p:cTn id="7" fill="hold">
+                      <p:stCondLst>
+                        <p:cond delay="indefinite"/>
+                      </p:stCondLst>
+                      <p:childTnLst>
+                        <p:par>
+                          <p:cTn id="8" fill="hold">
+                            <p:stCondLst>
+                              <p:cond delay="0"/>
+                            </p:stCondLst>
+                            <p:childTnLst>
+                              <p:par>
+                                <p:cTn id="9" presetID="1" presetClass="entr" presetSubtype="0" fill="hold" grpId="0" nodeType="clickEffect">
+                                  <p:stCondLst>
+                                    <p:cond delay="0"/>
+                                  </p:stCondLst>
+                                  <p:childTnLst>
+                                    <p:set>
+                                      <p:cBhvr>
+                                        <p:cTn id="10" dur="1" fill="hold">
+                                          <p:stCondLst>
+                                            <p:cond delay="0"/>
+                                          </p:stCondLst>
+                                        </p:cTn>
+                                        <p:tgtEl>
+                                          <p:spTgt spid="17"/>
+                                        </p:tgtEl>
+                                        <p:attrNameLst>
+                                          <p:attrName>style.visibility</p:attrName>
+                                        </p:attrNameLst>
+                                      </p:cBhvr>
+                                      <p:to>
+                                        <p:strVal val="visible"/>
+                                      </p:to>
+                                    </p:set>
+                                  </p:childTnLst>
+                                </p:cTn>
+                              </p:par>
+                            </p:childTnLst>
+                          </p:cTn>
+                        </p:par>
+                      </p:childTnLst>
+                    </p:cTn>
+                  </p:par>
+                  <p:par>
+                    <p:cTn id="11" fill="hold">
+                      <p:stCondLst>
+                        <p:cond delay="indefinite"/>
+                      </p:stCondLst>
+                      <p:childTnLst>
+                        <p:par>
+                          <p:cTn id="12" fill="hold">
+                            <p:stCondLst>
+                              <p:cond delay="0"/>
+                            </p:stCondLst>
+                            <p:childTnLst>
+                              <p:par>
+                                <p:cTn id="13" presetID="1" presetClass="entr" presetSubtype="0" fill="hold" grpId="0" nodeType="clickEffect">
+                                  <p:stCondLst>
+                                    <p:cond delay="0"/>
+                                  </p:stCondLst>
+                                  <p:childTnLst>
+                                    <p:set>
+                                      <p:cBhvr>
+                                        <p:cTn id="14" dur="1" fill="hold">
+                                          <p:stCondLst>
+                                            <p:cond delay="0"/>
+                                          </p:stCondLst>
+                                        </p:cTn>
+                                        <p:tgtEl>
+                                          <p:spTgt spid="8"/>
+                                        </p:tgtEl>
+                                        <p:attrNameLst>
+                                          <p:attrName>style.visibility</p:attrName>
+                                        </p:attrNameLst>
+                                      </p:cBhvr>
+                                      <p:to>
+                                        <p:strVal val="visible"/>
+                                      </p:to>
+                                    </p:set>
+                                  </p:childTnLst>
+                                </p:cTn>
+                              </p:par>
+                            </p:childTnLst>
+                          </p:cTn>
+                        </p:par>
+                      </p:childTnLst>
+                    </p:cTn>
+                  </p:par>
+                  <p:par>
+                    <p:cTn id="15" fill="hold">
+                      <p:stCondLst>
+                        <p:cond delay="indefinite"/>
+                      </p:stCondLst>
+                      <p:childTnLst>
+                        <p:par>
+                          <p:cTn id="16" fill="hold">
+                            <p:stCondLst>
+                              <p:cond delay="0"/>
+                            </p:stCondLst>
+                            <p:childTnLst>
+                              <p:par>
+                                <p:cTn id="17" presetID="1" presetClass="entr" presetSubtype="0" fill="hold" nodeType="clickEffect">
+                                  <p:stCondLst>
+                                    <p:cond delay="0"/>
+                                  </p:stCondLst>
+                                  <p:childTnLst>
+                                    <p:set>
+                                      <p:cBhvr>
+                                        <p:cTn id="18" dur="1" fill="hold">
+                                          <p:stCondLst>
+                                            <p:cond delay="0"/>
+                                          </p:stCondLst>
+                                        </p:cTn>
+                                        <p:tgtEl>
+                                          <p:spTgt spid="5"/>
+                                        </p:tgtEl>
+                                        <p:attrNameLst>
+                                          <p:attrName>style.visibility</p:attrName>
+                                        </p:attrNameLst>
+                                      </p:cBhvr>
+                                      <p:to>
+                                        <p:strVal val="visible"/>
+                                      </p:to>
+                                    </p:set>
+                                  </p:childTnLst>
+                                </p:cTn>
+                              </p:par>
+                            </p:childTnLst>
+                          </p:cTn>
+                        </p:par>
+                      </p:childTnLst>
+                    </p:cTn>
+                  </p:par>
+                  <p:par>
+                    <p:cTn id="19" fill="hold">
+                      <p:stCondLst>
+                        <p:cond delay="indefinite"/>
+                      </p:stCondLst>
+                      <p:childTnLst>
+                        <p:par>
+                          <p:cTn id="20" fill="hold">
+                            <p:stCondLst>
+                              <p:cond delay="0"/>
+                            </p:stCondLst>
+                            <p:childTnLst>
+                              <p:par>
+                                <p:cTn id="21" presetID="1" presetClass="exit" presetSubtype="0" fill="hold" nodeType="clickEffect">
+                                  <p:stCondLst>
+                                    <p:cond delay="0"/>
+                                  </p:stCondLst>
+                                  <p:childTnLst>
+                                    <p:set>
+                                      <p:cBhvr>
+                                        <p:cTn id="22" dur="1" fill="hold">
+                                          <p:stCondLst>
+                                            <p:cond delay="0"/>
+                                          </p:stCondLst>
+                                        </p:cTn>
+                                        <p:tgtEl>
+                                          <p:spTgt spid="5"/>
+                                        </p:tgtEl>
+                                        <p:attrNameLst>
+                                          <p:attrName>style.visibility</p:attrName>
+                                        </p:attrNameLst>
+                                      </p:cBhvr>
+                                      <p:to>
+                                        <p:strVal val="hidden"/>
+                                      </p:to>
+                                    </p:set>
+                                  </p:childTnLst>
+                                </p:cTn>
+                              </p:par>
+                            </p:childTnLst>
+                          </p:cTn>
+                        </p:par>
+                      </p:childTnLst>
+                    </p:cTn>
+                  </p:par>
+                  <p:par>
+                    <p:cTn id="23" fill="hold">
+                      <p:stCondLst>
+                        <p:cond delay="indefinite"/>
+                      </p:stCondLst>
+                      <p:childTnLst>
+                        <p:par>
+                          <p:cTn id="24" fill="hold">
+                            <p:stCondLst>
+                              <p:cond delay="0"/>
+                            </p:stCondLst>
+                            <p:childTnLst>
+                              <p:par>
+                                <p:cTn id="25" presetID="1" presetClass="entr" presetSubtype="0" fill="hold" nodeType="clickEffect">
+                                  <p:stCondLst>
+                                    <p:cond delay="0"/>
+                                  </p:stCondLst>
+                                  <p:childTnLst>
+                                    <p:set>
+                                      <p:cBhvr>
+                                        <p:cTn id="26" dur="1" fill="hold">
+                                          <p:stCondLst>
+                                            <p:cond delay="0"/>
+                                          </p:stCondLst>
+                                        </p:cTn>
+                                        <p:tgtEl>
+                                          <p:spTgt spid="4"/>
+                                        </p:tgtEl>
+                                        <p:attrNameLst>
+                                          <p:attrName>style.visibility</p:attrName>
+                                        </p:attrNameLst>
+                                      </p:cBhvr>
+                                      <p:to>
+                                        <p:strVal val="visible"/>
+                                      </p:to>
+                                    </p:set>
+                                  </p:childTnLst>
+                                </p:cTn>
+                              </p:par>
+                            </p:childTnLst>
+                          </p:cTn>
+                        </p:par>
+                      </p:childTnLst>
+                    </p:cTn>
+                  </p:par>
+                </p:childTnLst>
+              </p:cTn>
+              <p:prevCondLst>
+                <p:cond evt="onPrev" delay="0">
+                  <p:tgtEl>
+                    <p:sldTgt/>
+                  </p:tgtEl>
+                </p:cond>
+              </p:prevCondLst>
+              <p:nextCondLst>
+                <p:cond evt="onNext" delay="0">
+                  <p:tgtEl>
+                    <p:sldTgt/>
+                  </p:tgtEl>
+                </p:cond>
+              </p:nextCondLst>
+            </p:seq>
+          </p:childTnLst>
+        </p:cTn>
+      </p:par>
+    </p:tnLst>
+    <p:bldLst>
+      <p:bldP spid="3" grpId="0"/>
+      <p:bldP spid="8" grpId="0"/>
+      <p:bldP spid="17" grpId="0"/>
+    </p:bldLst>
+  </p:timing>
 </p:sld>
 </file>
 
@@ -10033,8 +11637,8 @@
         </p:nvSpPr>
         <p:spPr>
           <a:xfrm>
-            <a:off x="580170" y="1148665"/>
-            <a:ext cx="4528804" cy="2763834"/>
+            <a:off x="538068" y="1148665"/>
+            <a:ext cx="5687776" cy="3133165"/>
           </a:xfrm>
           <a:prstGeom prst="rect">
             <a:avLst/>
@@ -10125,6 +11729,39 @@
             </a:r>
           </a:p>
           <a:p>
+            <a:pPr lvl="1">
+              <a:lnSpc>
+                <a:spcPct val="120000"/>
+              </a:lnSpc>
+              <a:defRPr sz="2000"/>
+            </a:pPr>
+            <a:r>
+              <a:rPr lang="pl-PL" dirty="0"/>
+              <a:t>      (</a:t>
+            </a:r>
+            <a:r>
+              <a:rPr lang="pl-PL" i="1" dirty="0"/>
+              <a:t>zbiór treningowy kończy się </a:t>
+            </a:r>
+            <a:r>
+              <a:rPr lang="pl-PL" b="1" i="1" dirty="0"/>
+              <a:t>31 lipca 2015 r</a:t>
+            </a:r>
+            <a:r>
+              <a:rPr lang="pl-PL" b="1" dirty="0"/>
+              <a:t>.</a:t>
+            </a:r>
+            <a:r>
+              <a:rPr lang="pl-PL" dirty="0"/>
+              <a:t>),</a:t>
+            </a:r>
+            <a:endParaRPr lang="pl-PL" dirty="0">
+              <a:solidFill>
+                <a:srgbClr val="464646"/>
+              </a:solidFill>
+            </a:endParaRPr>
+          </a:p>
+          <a:p>
             <a:pPr marL="800100" lvl="1" indent="-342900">
               <a:lnSpc>
                 <a:spcPct val="120000"/>
@@ -10147,7 +11784,7 @@
                   <a:srgbClr val="464646"/>
                 </a:solidFill>
               </a:rPr>
-              <a:t>15.06.2015</a:t>
+              <a:t>15.06.2015,</a:t>
             </a:r>
           </a:p>
           <a:p>
@@ -10173,7 +11810,7 @@
             </a:r>
             <a:r>
               <a:rPr lang="pl-PL" b="1" dirty="0"/>
-              <a:t>trening</a:t>
+              <a:t>trening,</a:t>
             </a:r>
             <a:endParaRPr lang="pl-PL" dirty="0">
               <a:solidFill>
@@ -10316,8 +11953,8 @@
         </p:nvSpPr>
         <p:spPr>
           <a:xfrm>
-            <a:off x="5910807" y="2096597"/>
-            <a:ext cx="6089238" cy="2726900"/>
+            <a:off x="5987686" y="1859930"/>
+            <a:ext cx="6089238" cy="3096232"/>
           </a:xfrm>
           <a:prstGeom prst="rect">
             <a:avLst/>
@@ -10387,7 +12024,7 @@
                   <a:srgbClr val="464646"/>
                 </a:solidFill>
               </a:rPr>
-              <a:t>danych</a:t>
+              <a:t>danych,</a:t>
             </a:r>
           </a:p>
           <a:p>
@@ -10400,14 +12037,26 @@
               <a:defRPr sz="2000"/>
             </a:pPr>
             <a:r>
-              <a:rPr lang="pl-PL" b="1" dirty="0" err="1">
+              <a:rPr lang="pl-PL" b="1" dirty="0">
                 <a:solidFill>
                   <a:srgbClr val="464646"/>
                 </a:solidFill>
               </a:rPr>
-              <a:t>ColumnTransformer</a:t>
-            </a:r>
-            <a:endParaRPr lang="pl-PL" b="1" dirty="0">
+              <a:t>ColumnTransformer </a:t>
+            </a:r>
+            <a:r>
+              <a:rPr lang="pl-PL" i="1" dirty="0">
+                <a:solidFill>
+                  <a:srgbClr val="464646"/>
+                </a:solidFill>
+              </a:rPr>
+              <a:t>(</a:t>
+            </a:r>
+            <a:r>
+              <a:rPr lang="pl-PL" i="1" dirty="0"/>
+              <a:t>automatyczna „taśma montażowa” danych),</a:t>
+            </a:r>
+            <a:endParaRPr lang="pl-PL" b="1" i="1" dirty="0">
               <a:solidFill>
                 <a:srgbClr val="464646"/>
               </a:solidFill>
@@ -10444,7 +12093,7 @@
                   <a:srgbClr val="464646"/>
                 </a:solidFill>
               </a:rPr>
-              <a:t>i testowych</a:t>
+              <a:t>i testowych,</a:t>
             </a:r>
           </a:p>
           <a:p>
@@ -10462,7 +12111,7 @@
                   <a:srgbClr val="464646"/>
                 </a:solidFill>
               </a:rPr>
-              <a:t>Powtarzalny proces dla wszystkich modeli </a:t>
+              <a:t>Powtarzalny proces dla wszystkich modeli. </a:t>
             </a:r>
           </a:p>
         </p:txBody>
@@ -10481,7 +12130,7 @@
         </p:nvSpPr>
         <p:spPr>
           <a:xfrm>
-            <a:off x="115076" y="4054055"/>
+            <a:off x="257316" y="4556052"/>
             <a:ext cx="5491988" cy="400110"/>
           </a:xfrm>
           <a:prstGeom prst="rect">
@@ -10516,7 +12165,7 @@
         </p:nvSpPr>
         <p:spPr>
           <a:xfrm>
-            <a:off x="2177897" y="4454165"/>
+            <a:off x="2320137" y="4956162"/>
             <a:ext cx="1366345" cy="369332"/>
           </a:xfrm>
           <a:prstGeom prst="rect">
@@ -10575,6 +12224,234 @@
   <p:clrMapOvr>
     <a:masterClrMapping/>
   </p:clrMapOvr>
+  <p:timing>
+    <p:tnLst>
+      <p:par>
+        <p:cTn id="1" dur="indefinite" restart="never" nodeType="tmRoot">
+          <p:childTnLst>
+            <p:seq concurrent="1" nextAc="seek">
+              <p:cTn id="2" dur="indefinite" nodeType="mainSeq">
+                <p:childTnLst>
+                  <p:par>
+                    <p:cTn id="3" fill="hold">
+                      <p:stCondLst>
+                        <p:cond delay="indefinite"/>
+                      </p:stCondLst>
+                      <p:childTnLst>
+                        <p:par>
+                          <p:cTn id="4" fill="hold">
+                            <p:stCondLst>
+                              <p:cond delay="0"/>
+                            </p:stCondLst>
+                            <p:childTnLst>
+                              <p:par>
+                                <p:cTn id="5" presetID="1" presetClass="entr" presetSubtype="0" fill="hold" grpId="0" nodeType="clickEffect">
+                                  <p:stCondLst>
+                                    <p:cond delay="0"/>
+                                  </p:stCondLst>
+                                  <p:childTnLst>
+                                    <p:set>
+                                      <p:cBhvr>
+                                        <p:cTn id="6" dur="1" fill="hold">
+                                          <p:stCondLst>
+                                            <p:cond delay="0"/>
+                                          </p:stCondLst>
+                                        </p:cTn>
+                                        <p:tgtEl>
+                                          <p:spTgt spid="3"/>
+                                        </p:tgtEl>
+                                        <p:attrNameLst>
+                                          <p:attrName>style.visibility</p:attrName>
+                                        </p:attrNameLst>
+                                      </p:cBhvr>
+                                      <p:to>
+                                        <p:strVal val="visible"/>
+                                      </p:to>
+                                    </p:set>
+                                  </p:childTnLst>
+                                </p:cTn>
+                              </p:par>
+                              <p:par>
+                                <p:cTn id="7" presetID="1" presetClass="entr" presetSubtype="0" fill="hold" grpId="0" nodeType="withEffect">
+                                  <p:stCondLst>
+                                    <p:cond delay="0"/>
+                                  </p:stCondLst>
+                                  <p:childTnLst>
+                                    <p:set>
+                                      <p:cBhvr>
+                                        <p:cTn id="8" dur="1" fill="hold">
+                                          <p:stCondLst>
+                                            <p:cond delay="0"/>
+                                          </p:stCondLst>
+                                        </p:cTn>
+                                        <p:tgtEl>
+                                          <p:spTgt spid="11"/>
+                                        </p:tgtEl>
+                                        <p:attrNameLst>
+                                          <p:attrName>style.visibility</p:attrName>
+                                        </p:attrNameLst>
+                                      </p:cBhvr>
+                                      <p:to>
+                                        <p:strVal val="visible"/>
+                                      </p:to>
+                                    </p:set>
+                                  </p:childTnLst>
+                                </p:cTn>
+                              </p:par>
+                              <p:par>
+                                <p:cTn id="9" presetID="1" presetClass="entr" presetSubtype="0" fill="hold" grpId="0" nodeType="withEffect">
+                                  <p:stCondLst>
+                                    <p:cond delay="0"/>
+                                  </p:stCondLst>
+                                  <p:childTnLst>
+                                    <p:set>
+                                      <p:cBhvr>
+                                        <p:cTn id="10" dur="1" fill="hold">
+                                          <p:stCondLst>
+                                            <p:cond delay="0"/>
+                                          </p:stCondLst>
+                                        </p:cTn>
+                                        <p:tgtEl>
+                                          <p:spTgt spid="13"/>
+                                        </p:tgtEl>
+                                        <p:attrNameLst>
+                                          <p:attrName>style.visibility</p:attrName>
+                                        </p:attrNameLst>
+                                      </p:cBhvr>
+                                      <p:to>
+                                        <p:strVal val="visible"/>
+                                      </p:to>
+                                    </p:set>
+                                  </p:childTnLst>
+                                </p:cTn>
+                              </p:par>
+                            </p:childTnLst>
+                          </p:cTn>
+                        </p:par>
+                      </p:childTnLst>
+                    </p:cTn>
+                  </p:par>
+                  <p:par>
+                    <p:cTn id="11" fill="hold">
+                      <p:stCondLst>
+                        <p:cond delay="indefinite"/>
+                      </p:stCondLst>
+                      <p:childTnLst>
+                        <p:par>
+                          <p:cTn id="12" fill="hold">
+                            <p:stCondLst>
+                              <p:cond delay="0"/>
+                            </p:stCondLst>
+                            <p:childTnLst>
+                              <p:par>
+                                <p:cTn id="13" presetID="1" presetClass="entr" presetSubtype="0" fill="hold" grpId="0" nodeType="clickEffect">
+                                  <p:stCondLst>
+                                    <p:cond delay="0"/>
+                                  </p:stCondLst>
+                                  <p:childTnLst>
+                                    <p:set>
+                                      <p:cBhvr>
+                                        <p:cTn id="14" dur="1" fill="hold">
+                                          <p:stCondLst>
+                                            <p:cond delay="0"/>
+                                          </p:stCondLst>
+                                        </p:cTn>
+                                        <p:tgtEl>
+                                          <p:spTgt spid="17"/>
+                                        </p:tgtEl>
+                                        <p:attrNameLst>
+                                          <p:attrName>style.visibility</p:attrName>
+                                        </p:attrNameLst>
+                                      </p:cBhvr>
+                                      <p:to>
+                                        <p:strVal val="visible"/>
+                                      </p:to>
+                                    </p:set>
+                                  </p:childTnLst>
+                                </p:cTn>
+                              </p:par>
+                            </p:childTnLst>
+                          </p:cTn>
+                        </p:par>
+                      </p:childTnLst>
+                    </p:cTn>
+                  </p:par>
+                  <p:par>
+                    <p:cTn id="15" fill="hold">
+                      <p:stCondLst>
+                        <p:cond delay="indefinite"/>
+                      </p:stCondLst>
+                      <p:childTnLst>
+                        <p:par>
+                          <p:cTn id="16" fill="hold">
+                            <p:stCondLst>
+                              <p:cond delay="0"/>
+                            </p:stCondLst>
+                            <p:childTnLst>
+                              <p:par>
+                                <p:cTn id="17" presetID="1" presetClass="entr" presetSubtype="0" fill="hold" grpId="0" nodeType="clickEffect">
+                                  <p:stCondLst>
+                                    <p:cond delay="0"/>
+                                  </p:stCondLst>
+                                  <p:childTnLst>
+                                    <p:set>
+                                      <p:cBhvr>
+                                        <p:cTn id="18" dur="1" fill="hold">
+                                          <p:stCondLst>
+                                            <p:cond delay="0"/>
+                                          </p:stCondLst>
+                                        </p:cTn>
+                                        <p:tgtEl>
+                                          <p:spTgt spid="4"/>
+                                        </p:tgtEl>
+                                        <p:attrNameLst>
+                                          <p:attrName>style.visibility</p:attrName>
+                                        </p:attrNameLst>
+                                      </p:cBhvr>
+                                      <p:to>
+                                        <p:strVal val="visible"/>
+                                      </p:to>
+                                    </p:set>
+                                  </p:childTnLst>
+                                </p:cTn>
+                              </p:par>
+                            </p:childTnLst>
+                          </p:cTn>
+                        </p:par>
+                      </p:childTnLst>
+                    </p:cTn>
+                  </p:par>
+                </p:childTnLst>
+              </p:cTn>
+              <p:prevCondLst>
+                <p:cond evt="onPrev" delay="0">
+                  <p:tgtEl>
+                    <p:sldTgt/>
+                  </p:tgtEl>
+                </p:cond>
+              </p:prevCondLst>
+              <p:nextCondLst>
+                <p:cond evt="onNext" delay="0">
+                  <p:tgtEl>
+                    <p:sldTgt/>
+                  </p:tgtEl>
+                </p:cond>
+              </p:nextCondLst>
+            </p:seq>
+          </p:childTnLst>
+        </p:cTn>
+      </p:par>
+    </p:tnLst>
+    <p:bldLst>
+      <p:bldP spid="3" grpId="0"/>
+      <p:bldP spid="17" grpId="0"/>
+      <p:bldP spid="11" grpId="0"/>
+      <p:bldP spid="13" grpId="0"/>
+      <p:bldGraphic spid="4" grpId="0">
+        <p:bldAsOne/>
+      </p:bldGraphic>
+    </p:bldLst>
+  </p:timing>
 </p:sld>
 </file>
 
@@ -10771,7 +12648,7 @@
                   <a:srgbClr val="464646"/>
                 </a:solidFill>
               </a:rPr>
-              <a:t>      		Punkt odniesienia</a:t>
+              <a:t>      	      Punkt odniesienia</a:t>
             </a:r>
           </a:p>
           <a:p>
@@ -10805,7 +12682,7 @@
                   <a:srgbClr val="464646"/>
                 </a:solidFill>
               </a:rPr>
-              <a:t>     		</a:t>
+              <a:t>     	      </a:t>
             </a:r>
             <a:r>
               <a:rPr lang="pl-PL" dirty="0">
@@ -10815,11 +12692,6 @@
               </a:rPr>
               <a:t>Średnia sklep + dzień</a:t>
             </a:r>
-            <a:endParaRPr lang="pl-PL" b="1" dirty="0">
-              <a:solidFill>
-                <a:srgbClr val="464646"/>
-              </a:solidFill>
-            </a:endParaRPr>
           </a:p>
           <a:p>
             <a:pPr marL="800100" lvl="1" indent="-342900">
@@ -10831,18 +12703,13 @@
               <a:defRPr sz="2000"/>
             </a:pPr>
             <a:r>
-              <a:rPr lang="pl-PL" b="1" dirty="0" err="1">
+              <a:rPr lang="pl-PL" b="1" dirty="0">
                 <a:solidFill>
                   <a:srgbClr val="464646"/>
                 </a:solidFill>
               </a:rPr>
-              <a:t>LinearSVR</a:t>
-            </a:r>
-            <a:endParaRPr lang="pl-PL" b="1" dirty="0">
-              <a:solidFill>
-                <a:srgbClr val="464646"/>
-              </a:solidFill>
-            </a:endParaRPr>
+              <a:t>RandomForestRegressor</a:t>
+            </a:r>
           </a:p>
           <a:p>
             <a:pPr>
@@ -10857,7 +12724,7 @@
                   <a:srgbClr val="464646"/>
                 </a:solidFill>
               </a:rPr>
-              <a:t>      		</a:t>
+              <a:t>      	      </a:t>
             </a:r>
             <a:r>
               <a:rPr lang="pl-PL" dirty="0">
@@ -10865,8 +12732,13 @@
                   <a:srgbClr val="464646"/>
                 </a:solidFill>
               </a:rPr>
-              <a:t>Model liniowy</a:t>
-            </a:r>
+              <a:t>Model oparty na drzewach</a:t>
+            </a:r>
+            <a:endParaRPr lang="pl-PL" b="1" dirty="0">
+              <a:solidFill>
+                <a:srgbClr val="464646"/>
+              </a:solidFill>
+            </a:endParaRPr>
           </a:p>
           <a:p>
             <a:pPr marL="800100" lvl="1" indent="-342900">
@@ -10878,18 +12750,13 @@
               <a:defRPr sz="2000"/>
             </a:pPr>
             <a:r>
-              <a:rPr lang="pl-PL" b="1" dirty="0" err="1">
+              <a:rPr lang="pl-PL" b="1" dirty="0">
                 <a:solidFill>
                   <a:srgbClr val="464646"/>
                 </a:solidFill>
               </a:rPr>
-              <a:t>RandomForestRegressor</a:t>
-            </a:r>
-            <a:endParaRPr lang="pl-PL" b="1" dirty="0">
-              <a:solidFill>
-                <a:srgbClr val="464646"/>
-              </a:solidFill>
-            </a:endParaRPr>
+              <a:t>LinearSVR</a:t>
+            </a:r>
           </a:p>
           <a:p>
             <a:pPr>
@@ -10904,7 +12771,7 @@
                   <a:srgbClr val="464646"/>
                 </a:solidFill>
               </a:rPr>
-              <a:t>      		</a:t>
+              <a:t>      	      </a:t>
             </a:r>
             <a:r>
               <a:rPr lang="pl-PL" dirty="0">
@@ -10912,9 +12779,8 @@
                   <a:srgbClr val="464646"/>
                 </a:solidFill>
               </a:rPr>
-              <a:t>Model oparty na drzewach</a:t>
-            </a:r>
-            <a:endParaRPr lang="pl-PL" b="1" dirty="0"/>
+              <a:t>Model liniowy</a:t>
+            </a:r>
           </a:p>
         </p:txBody>
       </p:sp>
@@ -10970,6 +12836,139 @@
       </p:sp>
       <p:pic>
         <p:nvPicPr>
+          <p:cNvPr id="5" name="Obraz 4">
+            <a:extLst>
+              <a:ext uri="{FF2B5EF4-FFF2-40B4-BE49-F238E27FC236}">
+                <a16:creationId xmlns:a16="http://schemas.microsoft.com/office/drawing/2014/main" id="{0DEAE385-C112-094E-CD68-F95630566C79}"/>
+              </a:ext>
+            </a:extLst>
+          </p:cNvPr>
+          <p:cNvPicPr>
+            <a:picLocks noChangeAspect="1"/>
+          </p:cNvPicPr>
+          <p:nvPr/>
+        </p:nvPicPr>
+        <p:blipFill>
+          <a:blip r:embed="rId3"/>
+          <a:srcRect l="50000"/>
+          <a:stretch>
+            <a:fillRect/>
+          </a:stretch>
+        </p:blipFill>
+        <p:spPr>
+          <a:xfrm>
+            <a:off x="4987852" y="1252178"/>
+            <a:ext cx="7027574" cy="4074194"/>
+          </a:xfrm>
+          <a:prstGeom prst="rect">
+            <a:avLst/>
+          </a:prstGeom>
+        </p:spPr>
+      </p:pic>
+      <p:sp>
+        <p:nvSpPr>
+          <p:cNvPr id="10" name="pole tekstowe 9">
+            <a:extLst>
+              <a:ext uri="{FF2B5EF4-FFF2-40B4-BE49-F238E27FC236}">
+                <a16:creationId xmlns:a16="http://schemas.microsoft.com/office/drawing/2014/main" id="{B3F59F13-5E7D-C6D8-33D3-368CABA79341}"/>
+              </a:ext>
+            </a:extLst>
+          </p:cNvPr>
+          <p:cNvSpPr txBox="1"/>
+          <p:nvPr/>
+        </p:nvSpPr>
+        <p:spPr>
+          <a:xfrm>
+            <a:off x="270031" y="5414799"/>
+            <a:ext cx="6096000" cy="646331"/>
+          </a:xfrm>
+          <a:prstGeom prst="rect">
+            <a:avLst/>
+          </a:prstGeom>
+          <a:solidFill>
+            <a:schemeClr val="accent3">
+              <a:lumMod val="40000"/>
+              <a:lumOff val="60000"/>
+            </a:schemeClr>
+          </a:solidFill>
+        </p:spPr>
+        <p:txBody>
+          <a:bodyPr wrap="square">
+            <a:spAutoFit/>
+          </a:bodyPr>
+          <a:lstStyle/>
+          <a:p>
+            <a:pPr algn="ctr"/>
+            <a:r>
+              <a:rPr lang="pl-PL" b="1" dirty="0"/>
+              <a:t>🏆 </a:t>
+            </a:r>
+            <a:r>
+              <a:rPr lang="pl-PL" b="1" dirty="0" err="1">
+                <a:solidFill>
+                  <a:srgbClr val="17375E"/>
+                </a:solidFill>
+              </a:rPr>
+              <a:t>Random</a:t>
+            </a:r>
+            <a:r>
+              <a:rPr lang="pl-PL" b="1" dirty="0">
+                <a:solidFill>
+                  <a:srgbClr val="17375E"/>
+                </a:solidFill>
+              </a:rPr>
+              <a:t> </a:t>
+            </a:r>
+            <a:r>
+              <a:rPr lang="pl-PL" b="1" dirty="0" err="1">
+                <a:solidFill>
+                  <a:srgbClr val="17375E"/>
+                </a:solidFill>
+              </a:rPr>
+              <a:t>Forest</a:t>
+            </a:r>
+            <a:r>
+              <a:rPr lang="pl-PL" b="1" dirty="0">
+                <a:solidFill>
+                  <a:srgbClr val="17375E"/>
+                </a:solidFill>
+              </a:rPr>
+              <a:t> (</a:t>
+            </a:r>
+            <a:r>
+              <a:rPr lang="pl-PL" b="1" dirty="0" err="1">
+                <a:solidFill>
+                  <a:srgbClr val="17375E"/>
+                </a:solidFill>
+              </a:rPr>
+              <a:t>Tuned</a:t>
+            </a:r>
+            <a:r>
+              <a:rPr lang="pl-PL" b="1" dirty="0">
+                <a:solidFill>
+                  <a:srgbClr val="17375E"/>
+                </a:solidFill>
+              </a:rPr>
+              <a:t>) </a:t>
+            </a:r>
+            <a:r>
+              <a:rPr lang="pl-PL" b="1" dirty="0"/>
+              <a:t>osiągnął najlepsze wyniki, redukując błąd o 359 € względem modelu heurystycznego</a:t>
+            </a:r>
+            <a:r>
+              <a:rPr lang="pl-PL" dirty="0"/>
+              <a:t>.</a:t>
+            </a:r>
+            <a:endParaRPr lang="pl-PL" b="1" dirty="0">
+              <a:solidFill>
+                <a:srgbClr val="17375E"/>
+              </a:solidFill>
+            </a:endParaRPr>
+          </a:p>
+        </p:txBody>
+      </p:sp>
+      <p:pic>
+        <p:nvPicPr>
           <p:cNvPr id="4" name="Obraz 3">
             <a:extLst>
               <a:ext uri="{FF2B5EF4-FFF2-40B4-BE49-F238E27FC236}">
@@ -10991,147 +12990,14 @@
         </p:blipFill>
         <p:spPr>
           <a:xfrm>
-            <a:off x="5896303" y="706158"/>
-            <a:ext cx="5339256" cy="3095402"/>
+            <a:off x="5164426" y="1198098"/>
+            <a:ext cx="7027574" cy="4074195"/>
           </a:xfrm>
           <a:prstGeom prst="rect">
             <a:avLst/>
           </a:prstGeom>
         </p:spPr>
       </p:pic>
-      <p:pic>
-        <p:nvPicPr>
-          <p:cNvPr id="5" name="Obraz 4">
-            <a:extLst>
-              <a:ext uri="{FF2B5EF4-FFF2-40B4-BE49-F238E27FC236}">
-                <a16:creationId xmlns:a16="http://schemas.microsoft.com/office/drawing/2014/main" id="{0DEAE385-C112-094E-CD68-F95630566C79}"/>
-              </a:ext>
-            </a:extLst>
-          </p:cNvPr>
-          <p:cNvPicPr>
-            <a:picLocks noChangeAspect="1"/>
-          </p:cNvPicPr>
-          <p:nvPr/>
-        </p:nvPicPr>
-        <p:blipFill>
-          <a:blip r:embed="rId3"/>
-          <a:srcRect l="50000"/>
-          <a:stretch>
-            <a:fillRect/>
-          </a:stretch>
-        </p:blipFill>
-        <p:spPr>
-          <a:xfrm>
-            <a:off x="6012752" y="3755108"/>
-            <a:ext cx="5339256" cy="3095402"/>
-          </a:xfrm>
-          <a:prstGeom prst="rect">
-            <a:avLst/>
-          </a:prstGeom>
-        </p:spPr>
-      </p:pic>
-      <p:sp>
-        <p:nvSpPr>
-          <p:cNvPr id="10" name="pole tekstowe 9">
-            <a:extLst>
-              <a:ext uri="{FF2B5EF4-FFF2-40B4-BE49-F238E27FC236}">
-                <a16:creationId xmlns:a16="http://schemas.microsoft.com/office/drawing/2014/main" id="{B3F59F13-5E7D-C6D8-33D3-368CABA79341}"/>
-              </a:ext>
-            </a:extLst>
-          </p:cNvPr>
-          <p:cNvSpPr txBox="1"/>
-          <p:nvPr/>
-        </p:nvSpPr>
-        <p:spPr>
-          <a:xfrm>
-            <a:off x="180777" y="5006614"/>
-            <a:ext cx="6096000" cy="646331"/>
-          </a:xfrm>
-          <a:prstGeom prst="rect">
-            <a:avLst/>
-          </a:prstGeom>
-          <a:solidFill>
-            <a:schemeClr val="accent3">
-              <a:lumMod val="40000"/>
-              <a:lumOff val="60000"/>
-            </a:schemeClr>
-          </a:solidFill>
-        </p:spPr>
-        <p:txBody>
-          <a:bodyPr wrap="square">
-            <a:spAutoFit/>
-          </a:bodyPr>
-          <a:lstStyle/>
-          <a:p>
-            <a:pPr algn="ctr"/>
-            <a:r>
-              <a:rPr lang="pl-PL" b="1" dirty="0"/>
-              <a:t>🏆 </a:t>
-            </a:r>
-            <a:r>
-              <a:rPr lang="pl-PL" b="1" dirty="0" err="1">
-                <a:solidFill>
-                  <a:srgbClr val="17375E"/>
-                </a:solidFill>
-              </a:rPr>
-              <a:t>Random</a:t>
-            </a:r>
-            <a:r>
-              <a:rPr lang="pl-PL" b="1" dirty="0">
-                <a:solidFill>
-                  <a:srgbClr val="17375E"/>
-                </a:solidFill>
-              </a:rPr>
-              <a:t> </a:t>
-            </a:r>
-            <a:r>
-              <a:rPr lang="pl-PL" b="1" dirty="0" err="1">
-                <a:solidFill>
-                  <a:srgbClr val="17375E"/>
-                </a:solidFill>
-              </a:rPr>
-              <a:t>Forest</a:t>
-            </a:r>
-            <a:r>
-              <a:rPr lang="pl-PL" b="1" dirty="0">
-                <a:solidFill>
-                  <a:srgbClr val="17375E"/>
-                </a:solidFill>
-              </a:rPr>
-              <a:t> (</a:t>
-            </a:r>
-            <a:r>
-              <a:rPr lang="pl-PL" b="1" dirty="0" err="1">
-                <a:solidFill>
-                  <a:srgbClr val="17375E"/>
-                </a:solidFill>
-              </a:rPr>
-              <a:t>Tuned</a:t>
-            </a:r>
-            <a:r>
-              <a:rPr lang="pl-PL" b="1" dirty="0">
-                <a:solidFill>
-                  <a:srgbClr val="17375E"/>
-                </a:solidFill>
-              </a:rPr>
-              <a:t>) </a:t>
-            </a:r>
-            <a:r>
-              <a:rPr lang="pl-PL" b="1" dirty="0"/>
-              <a:t>osiągnął najlepsze wyniki, redukując błąd o 359 € względem modelu heurystycznego</a:t>
-            </a:r>
-            <a:r>
-              <a:rPr lang="pl-PL" dirty="0"/>
-              <a:t>.</a:t>
-            </a:r>
-            <a:endParaRPr lang="pl-PL" b="1" dirty="0">
-              <a:solidFill>
-                <a:srgbClr val="17375E"/>
-              </a:solidFill>
-            </a:endParaRPr>
-          </a:p>
-        </p:txBody>
-      </p:sp>
     </p:spTree>
     <p:extLst>
       <p:ext uri="{BB962C8B-B14F-4D97-AF65-F5344CB8AC3E}">
@@ -11142,6 +13008,265 @@
   <p:clrMapOvr>
     <a:masterClrMapping/>
   </p:clrMapOvr>
+  <p:timing>
+    <p:tnLst>
+      <p:par>
+        <p:cTn id="1" dur="indefinite" restart="never" nodeType="tmRoot">
+          <p:childTnLst>
+            <p:seq concurrent="1" nextAc="seek">
+              <p:cTn id="2" dur="indefinite" nodeType="mainSeq">
+                <p:childTnLst>
+                  <p:par>
+                    <p:cTn id="3" fill="hold">
+                      <p:stCondLst>
+                        <p:cond delay="indefinite"/>
+                      </p:stCondLst>
+                      <p:childTnLst>
+                        <p:par>
+                          <p:cTn id="4" fill="hold">
+                            <p:stCondLst>
+                              <p:cond delay="0"/>
+                            </p:stCondLst>
+                            <p:childTnLst>
+                              <p:par>
+                                <p:cTn id="5" presetID="1" presetClass="entr" presetSubtype="0" fill="hold" grpId="0" nodeType="clickEffect">
+                                  <p:stCondLst>
+                                    <p:cond delay="0"/>
+                                  </p:stCondLst>
+                                  <p:childTnLst>
+                                    <p:set>
+                                      <p:cBhvr>
+                                        <p:cTn id="6" dur="1" fill="hold">
+                                          <p:stCondLst>
+                                            <p:cond delay="0"/>
+                                          </p:stCondLst>
+                                        </p:cTn>
+                                        <p:tgtEl>
+                                          <p:spTgt spid="3"/>
+                                        </p:tgtEl>
+                                        <p:attrNameLst>
+                                          <p:attrName>style.visibility</p:attrName>
+                                        </p:attrNameLst>
+                                      </p:cBhvr>
+                                      <p:to>
+                                        <p:strVal val="visible"/>
+                                      </p:to>
+                                    </p:set>
+                                  </p:childTnLst>
+                                </p:cTn>
+                              </p:par>
+                            </p:childTnLst>
+                          </p:cTn>
+                        </p:par>
+                      </p:childTnLst>
+                    </p:cTn>
+                  </p:par>
+                  <p:par>
+                    <p:cTn id="7" fill="hold">
+                      <p:stCondLst>
+                        <p:cond delay="indefinite"/>
+                      </p:stCondLst>
+                      <p:childTnLst>
+                        <p:par>
+                          <p:cTn id="8" fill="hold">
+                            <p:stCondLst>
+                              <p:cond delay="0"/>
+                            </p:stCondLst>
+                            <p:childTnLst>
+                              <p:par>
+                                <p:cTn id="9" presetID="1" presetClass="entr" presetSubtype="0" fill="hold" nodeType="clickEffect">
+                                  <p:stCondLst>
+                                    <p:cond delay="0"/>
+                                  </p:stCondLst>
+                                  <p:childTnLst>
+                                    <p:set>
+                                      <p:cBhvr>
+                                        <p:cTn id="10" dur="1" fill="hold">
+                                          <p:stCondLst>
+                                            <p:cond delay="0"/>
+                                          </p:stCondLst>
+                                        </p:cTn>
+                                        <p:tgtEl>
+                                          <p:spTgt spid="4"/>
+                                        </p:tgtEl>
+                                        <p:attrNameLst>
+                                          <p:attrName>style.visibility</p:attrName>
+                                        </p:attrNameLst>
+                                      </p:cBhvr>
+                                      <p:to>
+                                        <p:strVal val="visible"/>
+                                      </p:to>
+                                    </p:set>
+                                  </p:childTnLst>
+                                </p:cTn>
+                              </p:par>
+                            </p:childTnLst>
+                          </p:cTn>
+                        </p:par>
+                      </p:childTnLst>
+                    </p:cTn>
+                  </p:par>
+                  <p:par>
+                    <p:cTn id="11" fill="hold">
+                      <p:stCondLst>
+                        <p:cond delay="indefinite"/>
+                      </p:stCondLst>
+                      <p:childTnLst>
+                        <p:par>
+                          <p:cTn id="12" fill="hold">
+                            <p:stCondLst>
+                              <p:cond delay="0"/>
+                            </p:stCondLst>
+                            <p:childTnLst>
+                              <p:par>
+                                <p:cTn id="13" presetID="1" presetClass="exit" presetSubtype="0" fill="hold" nodeType="clickEffect">
+                                  <p:stCondLst>
+                                    <p:cond delay="0"/>
+                                  </p:stCondLst>
+                                  <p:childTnLst>
+                                    <p:set>
+                                      <p:cBhvr>
+                                        <p:cTn id="14" dur="1" fill="hold">
+                                          <p:stCondLst>
+                                            <p:cond delay="0"/>
+                                          </p:stCondLst>
+                                        </p:cTn>
+                                        <p:tgtEl>
+                                          <p:spTgt spid="4"/>
+                                        </p:tgtEl>
+                                        <p:attrNameLst>
+                                          <p:attrName>style.visibility</p:attrName>
+                                        </p:attrNameLst>
+                                      </p:cBhvr>
+                                      <p:to>
+                                        <p:strVal val="hidden"/>
+                                      </p:to>
+                                    </p:set>
+                                  </p:childTnLst>
+                                </p:cTn>
+                              </p:par>
+                            </p:childTnLst>
+                          </p:cTn>
+                        </p:par>
+                      </p:childTnLst>
+                    </p:cTn>
+                  </p:par>
+                  <p:par>
+                    <p:cTn id="15" fill="hold">
+                      <p:stCondLst>
+                        <p:cond delay="indefinite"/>
+                      </p:stCondLst>
+                      <p:childTnLst>
+                        <p:par>
+                          <p:cTn id="16" fill="hold">
+                            <p:stCondLst>
+                              <p:cond delay="0"/>
+                            </p:stCondLst>
+                            <p:childTnLst>
+                              <p:par>
+                                <p:cTn id="17" presetID="1" presetClass="entr" presetSubtype="0" fill="hold" nodeType="clickEffect">
+                                  <p:stCondLst>
+                                    <p:cond delay="0"/>
+                                  </p:stCondLst>
+                                  <p:childTnLst>
+                                    <p:set>
+                                      <p:cBhvr>
+                                        <p:cTn id="18" dur="1" fill="hold">
+                                          <p:stCondLst>
+                                            <p:cond delay="0"/>
+                                          </p:stCondLst>
+                                        </p:cTn>
+                                        <p:tgtEl>
+                                          <p:spTgt spid="5"/>
+                                        </p:tgtEl>
+                                        <p:attrNameLst>
+                                          <p:attrName>style.visibility</p:attrName>
+                                        </p:attrNameLst>
+                                      </p:cBhvr>
+                                      <p:to>
+                                        <p:strVal val="visible"/>
+                                      </p:to>
+                                    </p:set>
+                                  </p:childTnLst>
+                                </p:cTn>
+                              </p:par>
+                            </p:childTnLst>
+                          </p:cTn>
+                        </p:par>
+                      </p:childTnLst>
+                    </p:cTn>
+                  </p:par>
+                  <p:par>
+                    <p:cTn id="19" fill="hold">
+                      <p:stCondLst>
+                        <p:cond delay="indefinite"/>
+                      </p:stCondLst>
+                      <p:childTnLst>
+                        <p:par>
+                          <p:cTn id="20" fill="hold">
+                            <p:stCondLst>
+                              <p:cond delay="0"/>
+                            </p:stCondLst>
+                            <p:childTnLst>
+                              <p:par>
+                                <p:cTn id="21" presetID="1" presetClass="entr" presetSubtype="0" fill="hold" grpId="0" nodeType="clickEffect">
+                                  <p:stCondLst>
+                                    <p:cond delay="0"/>
+                                  </p:stCondLst>
+                                  <p:childTnLst>
+                                    <p:set>
+                                      <p:cBhvr>
+                                        <p:cTn id="22" dur="1" fill="hold">
+                                          <p:stCondLst>
+                                            <p:cond delay="0"/>
+                                          </p:stCondLst>
+                                        </p:cTn>
+                                        <p:tgtEl>
+                                          <p:spTgt spid="10"/>
+                                        </p:tgtEl>
+                                        <p:attrNameLst>
+                                          <p:attrName>style.visibility</p:attrName>
+                                        </p:attrNameLst>
+                                      </p:cBhvr>
+                                      <p:to>
+                                        <p:strVal val="visible"/>
+                                      </p:to>
+                                    </p:set>
+                                  </p:childTnLst>
+                                </p:cTn>
+                              </p:par>
+                            </p:childTnLst>
+                          </p:cTn>
+                        </p:par>
+                      </p:childTnLst>
+                    </p:cTn>
+                  </p:par>
+                </p:childTnLst>
+              </p:cTn>
+              <p:prevCondLst>
+                <p:cond evt="onPrev" delay="0">
+                  <p:tgtEl>
+                    <p:sldTgt/>
+                  </p:tgtEl>
+                </p:cond>
+              </p:prevCondLst>
+              <p:nextCondLst>
+                <p:cond evt="onNext" delay="0">
+                  <p:tgtEl>
+                    <p:sldTgt/>
+                  </p:tgtEl>
+                </p:cond>
+              </p:nextCondLst>
+            </p:seq>
+          </p:childTnLst>
+        </p:cTn>
+      </p:par>
+    </p:tnLst>
+    <p:bldLst>
+      <p:bldP spid="3" grpId="0"/>
+      <p:bldP spid="10" grpId="0" animBg="1"/>
+    </p:bldLst>
+  </p:timing>
 </p:sld>
 </file>
 
@@ -11254,7 +13379,7 @@
         <p:spPr>
           <a:xfrm>
             <a:off x="399530" y="1220478"/>
-            <a:ext cx="5102679" cy="1986185"/>
+            <a:ext cx="5153590" cy="1986185"/>
           </a:xfrm>
           <a:prstGeom prst="rect">
             <a:avLst/>
@@ -11332,7 +13457,7 @@
                   <a:srgbClr val="464646"/>
                 </a:solidFill>
               </a:rPr>
-              <a:t>Modeluje nieliniowe zależności</a:t>
+              <a:t>Modeluje nieliniowe zależności,</a:t>
             </a:r>
           </a:p>
           <a:p>
@@ -11352,7 +13477,7 @@
                   <a:srgbClr val="464646"/>
                 </a:solidFill>
               </a:rPr>
-              <a:t>Uwzględnia zależności między cechami</a:t>
+              <a:t>Uwzględnia zależności między cechami,</a:t>
             </a:r>
           </a:p>
           <a:p>
@@ -11372,7 +13497,7 @@
                   <a:srgbClr val="464646"/>
                 </a:solidFill>
               </a:rPr>
-              <a:t>Wykorzystuje pełny zbiór danych</a:t>
+              <a:t>Wykorzystuje pełny zbiór danych,</a:t>
             </a:r>
           </a:p>
           <a:p>
@@ -11392,7 +13517,7 @@
                   <a:srgbClr val="464646"/>
                 </a:solidFill>
               </a:rPr>
-              <a:t>Osiągnął najwyższą dokładność</a:t>
+              <a:t>Osiągnął najwyższą dokładność.</a:t>
             </a:r>
             <a:endParaRPr lang="pl-PL" dirty="0"/>
           </a:p>
@@ -11463,13 +13588,13 @@
           <p:nvPr>
             <p:extLst>
               <p:ext uri="{D42A27DB-BD31-4B8C-83A1-F6EECF244321}">
-                <p14:modId xmlns:p14="http://schemas.microsoft.com/office/powerpoint/2010/main" val="2910365442"/>
+                <p14:modId xmlns:p14="http://schemas.microsoft.com/office/powerpoint/2010/main" val="2578242919"/>
               </p:ext>
             </p:extLst>
           </p:nvPr>
         </p:nvGraphicFramePr>
         <p:xfrm>
-          <a:off x="7764172" y="3429000"/>
+          <a:off x="7703212" y="1730194"/>
           <a:ext cx="2590800" cy="1828800"/>
         </p:xfrm>
         <a:graphic>
@@ -11978,10 +14103,10 @@
                         <a:buNone/>
                       </a:pPr>
                       <a:r>
-                        <a:rPr lang="pl-PL" b="1"/>
+                        <a:rPr lang="pl-PL" b="1" dirty="0"/>
                         <a:t>R²</a:t>
                       </a:r>
-                      <a:endParaRPr lang="pl-PL"/>
+                      <a:endParaRPr lang="pl-PL" dirty="0"/>
                     </a:p>
                   </a:txBody>
                   <a:tcPr anchor="ctr">
@@ -12103,7 +14228,7 @@
         </p:nvSpPr>
         <p:spPr>
           <a:xfrm>
-            <a:off x="5675586" y="1238527"/>
+            <a:off x="580170" y="3575521"/>
             <a:ext cx="6286336" cy="1247521"/>
           </a:xfrm>
           <a:prstGeom prst="rect">
@@ -12166,7 +14291,7 @@
                   <a:srgbClr val="464646"/>
                 </a:solidFill>
               </a:rPr>
-              <a:t>względem modelu bazowego</a:t>
+              <a:t>względem modelu bazowego,</a:t>
             </a:r>
           </a:p>
           <a:p>
@@ -12186,7 +14311,7 @@
                   <a:srgbClr val="464646"/>
                 </a:solidFill>
               </a:rPr>
-              <a:t>82,8% wyjaśnionej wariancji sprzedaży</a:t>
+              <a:t>82,8% wyjaśnionej wariancji sprzedaży.</a:t>
             </a:r>
             <a:endParaRPr lang="pl-PL" b="1" dirty="0"/>
           </a:p>
@@ -12206,7 +14331,7 @@
         </p:nvSpPr>
         <p:spPr>
           <a:xfrm>
-            <a:off x="7764172" y="2708385"/>
+            <a:off x="7703212" y="1009579"/>
             <a:ext cx="2528834" cy="498278"/>
           </a:xfrm>
           <a:prstGeom prst="rect">
@@ -12260,7 +14385,7 @@
         </p:nvSpPr>
         <p:spPr>
           <a:xfrm>
-            <a:off x="313097" y="4390002"/>
+            <a:off x="399530" y="5728933"/>
             <a:ext cx="6096000" cy="646331"/>
           </a:xfrm>
           <a:prstGeom prst="rect">
@@ -12308,6 +14433,50 @@
           </a:p>
         </p:txBody>
       </p:sp>
+      <p:sp>
+        <p:nvSpPr>
+          <p:cNvPr id="5" name="pole tekstowe 4">
+            <a:extLst>
+              <a:ext uri="{FF2B5EF4-FFF2-40B4-BE49-F238E27FC236}">
+                <a16:creationId xmlns:a16="http://schemas.microsoft.com/office/drawing/2014/main" id="{92037944-0055-F813-69CA-F412BDDB4C22}"/>
+              </a:ext>
+            </a:extLst>
+          </p:cNvPr>
+          <p:cNvSpPr txBox="1"/>
+          <p:nvPr/>
+        </p:nvSpPr>
+        <p:spPr>
+          <a:xfrm>
+            <a:off x="7113922" y="4113106"/>
+            <a:ext cx="4671678" cy="1077218"/>
+          </a:xfrm>
+          <a:prstGeom prst="rect">
+            <a:avLst/>
+          </a:prstGeom>
+          <a:noFill/>
+        </p:spPr>
+        <p:txBody>
+          <a:bodyPr wrap="square">
+            <a:spAutoFit/>
+          </a:bodyPr>
+          <a:lstStyle/>
+          <a:p>
+            <a:pPr algn="just"/>
+            <a:r>
+              <a:rPr lang="pl-PL" sz="1600" dirty="0"/>
+              <a:t>Model pomylił się średnio o </a:t>
+            </a:r>
+            <a:r>
+              <a:rPr lang="pl-PL" sz="1600" b="1" dirty="0"/>
+              <a:t>około 17%</a:t>
+            </a:r>
+            <a:r>
+              <a:rPr lang="pl-PL" sz="1600" dirty="0"/>
+              <a:t> w skali całej sieci. W praktyce oznacza to, że jeśli sklep ma prognozowany dzienny obrót na poziomie 10 000 zł, to model pomyli się średnio o ok. 1 700 zł</a:t>
+            </a:r>
+          </a:p>
+        </p:txBody>
+      </p:sp>
     </p:spTree>
     <p:extLst>
       <p:ext uri="{BB962C8B-B14F-4D97-AF65-F5344CB8AC3E}">
@@ -12318,6 +14487,277 @@
   <p:clrMapOvr>
     <a:masterClrMapping/>
   </p:clrMapOvr>
+  <p:timing>
+    <p:tnLst>
+      <p:par>
+        <p:cTn id="1" dur="indefinite" restart="never" nodeType="tmRoot">
+          <p:childTnLst>
+            <p:seq concurrent="1" nextAc="seek">
+              <p:cTn id="2" dur="indefinite" nodeType="mainSeq">
+                <p:childTnLst>
+                  <p:par>
+                    <p:cTn id="3" fill="hold">
+                      <p:stCondLst>
+                        <p:cond delay="indefinite"/>
+                      </p:stCondLst>
+                      <p:childTnLst>
+                        <p:par>
+                          <p:cTn id="4" fill="hold">
+                            <p:stCondLst>
+                              <p:cond delay="0"/>
+                            </p:stCondLst>
+                            <p:childTnLst>
+                              <p:par>
+                                <p:cTn id="5" presetID="1" presetClass="entr" presetSubtype="0" fill="hold" grpId="0" nodeType="clickEffect">
+                                  <p:stCondLst>
+                                    <p:cond delay="0"/>
+                                  </p:stCondLst>
+                                  <p:childTnLst>
+                                    <p:set>
+                                      <p:cBhvr>
+                                        <p:cTn id="6" dur="1" fill="hold">
+                                          <p:stCondLst>
+                                            <p:cond delay="0"/>
+                                          </p:stCondLst>
+                                        </p:cTn>
+                                        <p:tgtEl>
+                                          <p:spTgt spid="3"/>
+                                        </p:tgtEl>
+                                        <p:attrNameLst>
+                                          <p:attrName>style.visibility</p:attrName>
+                                        </p:attrNameLst>
+                                      </p:cBhvr>
+                                      <p:to>
+                                        <p:strVal val="visible"/>
+                                      </p:to>
+                                    </p:set>
+                                  </p:childTnLst>
+                                </p:cTn>
+                              </p:par>
+                            </p:childTnLst>
+                          </p:cTn>
+                        </p:par>
+                      </p:childTnLst>
+                    </p:cTn>
+                  </p:par>
+                  <p:par>
+                    <p:cTn id="7" fill="hold">
+                      <p:stCondLst>
+                        <p:cond delay="indefinite"/>
+                      </p:stCondLst>
+                      <p:childTnLst>
+                        <p:par>
+                          <p:cTn id="8" fill="hold">
+                            <p:stCondLst>
+                              <p:cond delay="0"/>
+                            </p:stCondLst>
+                            <p:childTnLst>
+                              <p:par>
+                                <p:cTn id="9" presetID="1" presetClass="entr" presetSubtype="0" fill="hold" grpId="0" nodeType="clickEffect">
+                                  <p:stCondLst>
+                                    <p:cond delay="0"/>
+                                  </p:stCondLst>
+                                  <p:childTnLst>
+                                    <p:set>
+                                      <p:cBhvr>
+                                        <p:cTn id="10" dur="1" fill="hold">
+                                          <p:stCondLst>
+                                            <p:cond delay="0"/>
+                                          </p:stCondLst>
+                                        </p:cTn>
+                                        <p:tgtEl>
+                                          <p:spTgt spid="12"/>
+                                        </p:tgtEl>
+                                        <p:attrNameLst>
+                                          <p:attrName>style.visibility</p:attrName>
+                                        </p:attrNameLst>
+                                      </p:cBhvr>
+                                      <p:to>
+                                        <p:strVal val="visible"/>
+                                      </p:to>
+                                    </p:set>
+                                  </p:childTnLst>
+                                </p:cTn>
+                              </p:par>
+                              <p:par>
+                                <p:cTn id="11" presetID="1" presetClass="entr" presetSubtype="0" fill="hold" nodeType="withEffect">
+                                  <p:stCondLst>
+                                    <p:cond delay="0"/>
+                                  </p:stCondLst>
+                                  <p:childTnLst>
+                                    <p:set>
+                                      <p:cBhvr>
+                                        <p:cTn id="12" dur="1" fill="hold">
+                                          <p:stCondLst>
+                                            <p:cond delay="0"/>
+                                          </p:stCondLst>
+                                        </p:cTn>
+                                        <p:tgtEl>
+                                          <p:spTgt spid="6"/>
+                                        </p:tgtEl>
+                                        <p:attrNameLst>
+                                          <p:attrName>style.visibility</p:attrName>
+                                        </p:attrNameLst>
+                                      </p:cBhvr>
+                                      <p:to>
+                                        <p:strVal val="visible"/>
+                                      </p:to>
+                                    </p:set>
+                                  </p:childTnLst>
+                                </p:cTn>
+                              </p:par>
+                            </p:childTnLst>
+                          </p:cTn>
+                        </p:par>
+                      </p:childTnLst>
+                    </p:cTn>
+                  </p:par>
+                  <p:par>
+                    <p:cTn id="13" fill="hold">
+                      <p:stCondLst>
+                        <p:cond delay="indefinite"/>
+                      </p:stCondLst>
+                      <p:childTnLst>
+                        <p:par>
+                          <p:cTn id="14" fill="hold">
+                            <p:stCondLst>
+                              <p:cond delay="0"/>
+                            </p:stCondLst>
+                            <p:childTnLst>
+                              <p:par>
+                                <p:cTn id="15" presetID="1" presetClass="entr" presetSubtype="0" fill="hold" grpId="0" nodeType="clickEffect">
+                                  <p:stCondLst>
+                                    <p:cond delay="0"/>
+                                  </p:stCondLst>
+                                  <p:childTnLst>
+                                    <p:set>
+                                      <p:cBhvr>
+                                        <p:cTn id="16" dur="1" fill="hold">
+                                          <p:stCondLst>
+                                            <p:cond delay="0"/>
+                                          </p:stCondLst>
+                                        </p:cTn>
+                                        <p:tgtEl>
+                                          <p:spTgt spid="5"/>
+                                        </p:tgtEl>
+                                        <p:attrNameLst>
+                                          <p:attrName>style.visibility</p:attrName>
+                                        </p:attrNameLst>
+                                      </p:cBhvr>
+                                      <p:to>
+                                        <p:strVal val="visible"/>
+                                      </p:to>
+                                    </p:set>
+                                  </p:childTnLst>
+                                </p:cTn>
+                              </p:par>
+                            </p:childTnLst>
+                          </p:cTn>
+                        </p:par>
+                      </p:childTnLst>
+                    </p:cTn>
+                  </p:par>
+                  <p:par>
+                    <p:cTn id="17" fill="hold">
+                      <p:stCondLst>
+                        <p:cond delay="indefinite"/>
+                      </p:stCondLst>
+                      <p:childTnLst>
+                        <p:par>
+                          <p:cTn id="18" fill="hold">
+                            <p:stCondLst>
+                              <p:cond delay="0"/>
+                            </p:stCondLst>
+                            <p:childTnLst>
+                              <p:par>
+                                <p:cTn id="19" presetID="1" presetClass="entr" presetSubtype="0" fill="hold" grpId="0" nodeType="clickEffect">
+                                  <p:stCondLst>
+                                    <p:cond delay="0"/>
+                                  </p:stCondLst>
+                                  <p:childTnLst>
+                                    <p:set>
+                                      <p:cBhvr>
+                                        <p:cTn id="20" dur="1" fill="hold">
+                                          <p:stCondLst>
+                                            <p:cond delay="0"/>
+                                          </p:stCondLst>
+                                        </p:cTn>
+                                        <p:tgtEl>
+                                          <p:spTgt spid="9"/>
+                                        </p:tgtEl>
+                                        <p:attrNameLst>
+                                          <p:attrName>style.visibility</p:attrName>
+                                        </p:attrNameLst>
+                                      </p:cBhvr>
+                                      <p:to>
+                                        <p:strVal val="visible"/>
+                                      </p:to>
+                                    </p:set>
+                                  </p:childTnLst>
+                                </p:cTn>
+                              </p:par>
+                              <p:par>
+                                <p:cTn id="21" presetID="1" presetClass="entr" presetSubtype="0" fill="hold" grpId="0" nodeType="withEffect">
+                                  <p:stCondLst>
+                                    <p:cond delay="0"/>
+                                  </p:stCondLst>
+                                  <p:childTnLst>
+                                    <p:set>
+                                      <p:cBhvr>
+                                        <p:cTn id="22" dur="1" fill="hold">
+                                          <p:stCondLst>
+                                            <p:cond delay="0"/>
+                                          </p:stCondLst>
+                                        </p:cTn>
+                                        <p:tgtEl>
+                                          <p:spTgt spid="14"/>
+                                        </p:tgtEl>
+                                        <p:attrNameLst>
+                                          <p:attrName>style.visibility</p:attrName>
+                                        </p:attrNameLst>
+                                      </p:cBhvr>
+                                      <p:to>
+                                        <p:strVal val="visible"/>
+                                      </p:to>
+                                    </p:set>
+                                  </p:childTnLst>
+                                </p:cTn>
+                              </p:par>
+                            </p:childTnLst>
+                          </p:cTn>
+                        </p:par>
+                      </p:childTnLst>
+                    </p:cTn>
+                  </p:par>
+                </p:childTnLst>
+              </p:cTn>
+              <p:prevCondLst>
+                <p:cond evt="onPrev" delay="0">
+                  <p:tgtEl>
+                    <p:sldTgt/>
+                  </p:tgtEl>
+                </p:cond>
+              </p:prevCondLst>
+              <p:nextCondLst>
+                <p:cond evt="onNext" delay="0">
+                  <p:tgtEl>
+                    <p:sldTgt/>
+                  </p:tgtEl>
+                </p:cond>
+              </p:nextCondLst>
+            </p:seq>
+          </p:childTnLst>
+        </p:cTn>
+      </p:par>
+    </p:tnLst>
+    <p:bldLst>
+      <p:bldP spid="3" grpId="0"/>
+      <p:bldP spid="9" grpId="0"/>
+      <p:bldP spid="12" grpId="0"/>
+      <p:bldP spid="14" grpId="0" animBg="1"/>
+      <p:bldP spid="5" grpId="0"/>
+    </p:bldLst>
+  </p:timing>
 </p:sld>
 </file>
 
@@ -12469,7 +14909,7 @@
                   <a:srgbClr val="464646"/>
                 </a:solidFill>
               </a:rPr>
-              <a:t>Trening modeli SVR czasochłonny</a:t>
+              <a:t>Trening modeli SVR czasochłonny,</a:t>
             </a:r>
           </a:p>
           <a:p>
@@ -12502,7 +14942,7 @@
                   <a:srgbClr val="464646"/>
                 </a:solidFill>
               </a:rPr>
-              <a:t>zbioru</a:t>
+              <a:t>zbioru.</a:t>
             </a:r>
           </a:p>
           <a:p>
@@ -12531,28 +14971,20 @@
               <a:defRPr sz="2000"/>
             </a:pPr>
             <a:r>
-              <a:rPr lang="pl-PL" sz="2000" dirty="0" err="1">
+              <a:rPr lang="pl-PL" sz="2000" dirty="0">
                 <a:solidFill>
                   <a:srgbClr val="464646"/>
                 </a:solidFill>
               </a:rPr>
-              <a:t>Samplowanie</a:t>
-            </a:r>
-            <a:r>
-              <a:rPr lang="pl-PL" sz="2000" dirty="0">
+              <a:t>Samplowanie do </a:t>
+            </a:r>
+            <a:r>
+              <a:rPr lang="pl-PL" sz="2000" b="1" dirty="0">
                 <a:solidFill>
                   <a:srgbClr val="464646"/>
                 </a:solidFill>
               </a:rPr>
-              <a:t> do </a:t>
-            </a:r>
-            <a:r>
-              <a:rPr lang="pl-PL" sz="2000" b="1" dirty="0">
-                <a:solidFill>
-                  <a:srgbClr val="464646"/>
-                </a:solidFill>
-              </a:rPr>
-              <a:t>50 tys. rekordów</a:t>
+              <a:t>50 tys. rekordów,</a:t>
             </a:r>
             <a:endParaRPr lang="pl-PL" sz="2000" dirty="0">
               <a:solidFill>
@@ -12578,12 +15010,12 @@
               <a:t>Zastosowanie </a:t>
             </a:r>
             <a:r>
-              <a:rPr lang="pl-PL" sz="2000" b="1" dirty="0" err="1">
+              <a:rPr lang="pl-PL" sz="2000" b="1" dirty="0">
                 <a:solidFill>
                   <a:srgbClr val="464646"/>
                 </a:solidFill>
               </a:rPr>
-              <a:t>LinearSVR</a:t>
+              <a:t>LinearSVR.</a:t>
             </a:r>
             <a:endParaRPr lang="pl-PL" sz="2000" dirty="0">
               <a:solidFill>
@@ -12622,15 +15054,7 @@
                   <a:srgbClr val="464646"/>
                 </a:solidFill>
               </a:rPr>
-              <a:t>Modele liniowe ustępowały </a:t>
-            </a:r>
-            <a:r>
-              <a:rPr lang="pl-PL" sz="2000" dirty="0" err="1">
-                <a:solidFill>
-                  <a:srgbClr val="464646"/>
-                </a:solidFill>
-              </a:rPr>
-              <a:t>Random</a:t>
+              <a:t>Modele liniowe ustępowały Random</a:t>
             </a:r>
             <a:br>
               <a:rPr lang="pl-PL" sz="2000" dirty="0">
@@ -12640,20 +15064,12 @@
               </a:rPr>
             </a:br>
             <a:r>
-              <a:rPr lang="pl-PL" sz="2000" dirty="0" err="1">
+              <a:rPr lang="pl-PL" sz="2000" dirty="0">
                 <a:solidFill>
                   <a:srgbClr val="464646"/>
                 </a:solidFill>
               </a:rPr>
-              <a:t>Forest</a:t>
-            </a:r>
-            <a:r>
-              <a:rPr lang="pl-PL" sz="2000" dirty="0">
-                <a:solidFill>
-                  <a:srgbClr val="464646"/>
-                </a:solidFill>
-              </a:rPr>
-              <a:t> pod względem jakości</a:t>
+              <a:t>Forest pod względem jakości.</a:t>
             </a:r>
           </a:p>
           <a:p>
@@ -12732,7 +15148,7 @@
         <p:spPr>
           <a:xfrm>
             <a:off x="6276777" y="952268"/>
-            <a:ext cx="5238485" cy="3576364"/>
+            <a:ext cx="5307415" cy="3576364"/>
           </a:xfrm>
           <a:prstGeom prst="rect">
             <a:avLst/>
@@ -12805,21 +15221,8 @@
                   <a:srgbClr val="464646"/>
                 </a:solidFill>
               </a:rPr>
-              <a:t>Koordynacja pracy na wielu </a:t>
-            </a:r>
-            <a:r>
-              <a:rPr lang="pl-PL" sz="2000" dirty="0" err="1">
-                <a:solidFill>
-                  <a:srgbClr val="464646"/>
-                </a:solidFill>
-              </a:rPr>
-              <a:t>branchach</a:t>
-            </a:r>
-            <a:endParaRPr lang="pl-PL" sz="2000" dirty="0">
-              <a:solidFill>
-                <a:srgbClr val="464646"/>
-              </a:solidFill>
-            </a:endParaRPr>
+              <a:t>Koordynacja pracy na wielu branchach,</a:t>
+            </a:r>
           </a:p>
           <a:p>
             <a:pPr marL="800100" lvl="1" indent="-342900">
@@ -12844,21 +15247,8 @@
                   <a:srgbClr val="464646"/>
                 </a:solidFill>
               </a:rPr>
-              <a:t> </a:t>
-            </a:r>
-            <a:r>
-              <a:rPr lang="pl-PL" sz="2000" dirty="0" err="1">
-                <a:solidFill>
-                  <a:srgbClr val="464646"/>
-                </a:solidFill>
-              </a:rPr>
-              <a:t>conflicts</a:t>
-            </a:r>
-            <a:endParaRPr lang="pl-PL" sz="2000" dirty="0">
-              <a:solidFill>
-                <a:srgbClr val="464646"/>
-              </a:solidFill>
-            </a:endParaRPr>
+              <a:t> conflicts.</a:t>
+            </a:r>
           </a:p>
           <a:p>
             <a:pPr>
@@ -12917,11 +15307,14 @@
               </a:rPr>
               <a:t>branchy</a:t>
             </a:r>
-            <a:endParaRPr lang="pl-PL" sz="2000" dirty="0">
-              <a:solidFill>
-                <a:srgbClr val="464646"/>
-              </a:solidFill>
-            </a:endParaRPr>
+            <a:r>
+              <a:rPr lang="pl-PL" sz="2000" dirty="0">
+                <a:solidFill>
+                  <a:srgbClr val="464646"/>
+                </a:solidFill>
+              </a:rPr>
+              <a:t>,</a:t>
+            </a:r>
           </a:p>
           <a:p>
             <a:pPr marL="800100" lvl="1" indent="-342900">
@@ -12946,6 +15339,22 @@
                   <a:srgbClr val="464646"/>
                 </a:solidFill>
               </a:rPr>
+              <a:t> Request + </a:t>
+            </a:r>
+            <a:r>
+              <a:rPr lang="pl-PL" sz="2000" b="1" dirty="0" err="1">
+                <a:solidFill>
+                  <a:srgbClr val="464646"/>
+                </a:solidFill>
+              </a:rPr>
+              <a:t>Code</a:t>
+            </a:r>
+            <a:r>
+              <a:rPr lang="pl-PL" sz="2000" b="1" dirty="0">
+                <a:solidFill>
+                  <a:srgbClr val="464646"/>
+                </a:solidFill>
+              </a:rPr>
               <a:t> </a:t>
             </a:r>
             <a:r>
@@ -12954,7 +15363,7 @@
                   <a:srgbClr val="464646"/>
                 </a:solidFill>
               </a:rPr>
-              <a:t>Request</a:t>
+              <a:t>Review</a:t>
             </a:r>
             <a:r>
               <a:rPr lang="pl-PL" sz="2000" b="1" dirty="0">
@@ -12962,7 +15371,7 @@
                   <a:srgbClr val="464646"/>
                 </a:solidFill>
               </a:rPr>
-              <a:t> + </a:t>
+              <a:t>, JIRA </a:t>
             </a:r>
             <a:r>
               <a:rPr lang="pl-PL" sz="2000" b="1" dirty="0" err="1">
@@ -12970,7 +15379,7 @@
                   <a:srgbClr val="464646"/>
                 </a:solidFill>
               </a:rPr>
-              <a:t>Code</a:t>
+              <a:t>tickets</a:t>
             </a:r>
             <a:r>
               <a:rPr lang="pl-PL" sz="2000" b="1" dirty="0">
@@ -12978,31 +15387,7 @@
                   <a:srgbClr val="464646"/>
                 </a:solidFill>
               </a:rPr>
-              <a:t> </a:t>
-            </a:r>
-            <a:r>
-              <a:rPr lang="pl-PL" sz="2000" b="1" dirty="0" err="1">
-                <a:solidFill>
-                  <a:srgbClr val="464646"/>
-                </a:solidFill>
-              </a:rPr>
-              <a:t>Review</a:t>
-            </a:r>
-            <a:r>
-              <a:rPr lang="pl-PL" sz="2000" b="1" dirty="0">
-                <a:solidFill>
-                  <a:srgbClr val="464646"/>
-                </a:solidFill>
-              </a:rPr>
-              <a:t>, JIRA </a:t>
-            </a:r>
-            <a:r>
-              <a:rPr lang="pl-PL" sz="2000" b="1" dirty="0" err="1">
-                <a:solidFill>
-                  <a:srgbClr val="464646"/>
-                </a:solidFill>
-              </a:rPr>
-              <a:t>tickets</a:t>
+              <a:t>.</a:t>
             </a:r>
             <a:endParaRPr lang="pl-PL" sz="2000" dirty="0">
               <a:solidFill>
@@ -13041,7 +15426,7 @@
                   <a:srgbClr val="464646"/>
                 </a:solidFill>
               </a:rPr>
-              <a:t>Lepsza organizacja pracy zespołowej</a:t>
+              <a:t>Lepsza organizacja pracy zespołowej.</a:t>
             </a:r>
           </a:p>
         </p:txBody>
@@ -13140,6 +15525,157 @@
   <p:clrMapOvr>
     <a:masterClrMapping/>
   </p:clrMapOvr>
+  <p:timing>
+    <p:tnLst>
+      <p:par>
+        <p:cTn id="1" dur="indefinite" restart="never" nodeType="tmRoot">
+          <p:childTnLst>
+            <p:seq concurrent="1" nextAc="seek">
+              <p:cTn id="2" dur="indefinite" nodeType="mainSeq">
+                <p:childTnLst>
+                  <p:par>
+                    <p:cTn id="3" fill="hold">
+                      <p:stCondLst>
+                        <p:cond delay="indefinite"/>
+                      </p:stCondLst>
+                      <p:childTnLst>
+                        <p:par>
+                          <p:cTn id="4" fill="hold">
+                            <p:stCondLst>
+                              <p:cond delay="0"/>
+                            </p:stCondLst>
+                            <p:childTnLst>
+                              <p:par>
+                                <p:cTn id="5" presetID="1" presetClass="entr" presetSubtype="0" fill="hold" grpId="0" nodeType="clickEffect">
+                                  <p:stCondLst>
+                                    <p:cond delay="0"/>
+                                  </p:stCondLst>
+                                  <p:childTnLst>
+                                    <p:set>
+                                      <p:cBhvr>
+                                        <p:cTn id="6" dur="1" fill="hold">
+                                          <p:stCondLst>
+                                            <p:cond delay="0"/>
+                                          </p:stCondLst>
+                                        </p:cTn>
+                                        <p:tgtEl>
+                                          <p:spTgt spid="3"/>
+                                        </p:tgtEl>
+                                        <p:attrNameLst>
+                                          <p:attrName>style.visibility</p:attrName>
+                                        </p:attrNameLst>
+                                      </p:cBhvr>
+                                      <p:to>
+                                        <p:strVal val="visible"/>
+                                      </p:to>
+                                    </p:set>
+                                  </p:childTnLst>
+                                </p:cTn>
+                              </p:par>
+                            </p:childTnLst>
+                          </p:cTn>
+                        </p:par>
+                      </p:childTnLst>
+                    </p:cTn>
+                  </p:par>
+                  <p:par>
+                    <p:cTn id="7" fill="hold">
+                      <p:stCondLst>
+                        <p:cond delay="indefinite"/>
+                      </p:stCondLst>
+                      <p:childTnLst>
+                        <p:par>
+                          <p:cTn id="8" fill="hold">
+                            <p:stCondLst>
+                              <p:cond delay="0"/>
+                            </p:stCondLst>
+                            <p:childTnLst>
+                              <p:par>
+                                <p:cTn id="9" presetID="1" presetClass="entr" presetSubtype="0" fill="hold" grpId="0" nodeType="clickEffect">
+                                  <p:stCondLst>
+                                    <p:cond delay="0"/>
+                                  </p:stCondLst>
+                                  <p:childTnLst>
+                                    <p:set>
+                                      <p:cBhvr>
+                                        <p:cTn id="10" dur="1" fill="hold">
+                                          <p:stCondLst>
+                                            <p:cond delay="0"/>
+                                          </p:stCondLst>
+                                        </p:cTn>
+                                        <p:tgtEl>
+                                          <p:spTgt spid="9"/>
+                                        </p:tgtEl>
+                                        <p:attrNameLst>
+                                          <p:attrName>style.visibility</p:attrName>
+                                        </p:attrNameLst>
+                                      </p:cBhvr>
+                                      <p:to>
+                                        <p:strVal val="visible"/>
+                                      </p:to>
+                                    </p:set>
+                                  </p:childTnLst>
+                                </p:cTn>
+                              </p:par>
+                              <p:par>
+                                <p:cTn id="11" presetID="1" presetClass="entr" presetSubtype="0" fill="hold" nodeType="withEffect">
+                                  <p:stCondLst>
+                                    <p:cond delay="0"/>
+                                  </p:stCondLst>
+                                  <p:childTnLst>
+                                    <p:set>
+                                      <p:cBhvr>
+                                        <p:cTn id="12" dur="1" fill="hold">
+                                          <p:stCondLst>
+                                            <p:cond delay="0"/>
+                                          </p:stCondLst>
+                                        </p:cTn>
+                                        <p:tgtEl>
+                                          <p:spTgt spid="5"/>
+                                        </p:tgtEl>
+                                        <p:attrNameLst>
+                                          <p:attrName>style.visibility</p:attrName>
+                                        </p:attrNameLst>
+                                      </p:cBhvr>
+                                      <p:to>
+                                        <p:strVal val="visible"/>
+                                      </p:to>
+                                    </p:set>
+                                  </p:childTnLst>
+                                </p:cTn>
+                              </p:par>
+                            </p:childTnLst>
+                          </p:cTn>
+                        </p:par>
+                      </p:childTnLst>
+                    </p:cTn>
+                  </p:par>
+                </p:childTnLst>
+              </p:cTn>
+              <p:prevCondLst>
+                <p:cond evt="onPrev" delay="0">
+                  <p:tgtEl>
+                    <p:sldTgt/>
+                  </p:tgtEl>
+                </p:cond>
+              </p:prevCondLst>
+              <p:nextCondLst>
+                <p:cond evt="onNext" delay="0">
+                  <p:tgtEl>
+                    <p:sldTgt/>
+                  </p:tgtEl>
+                </p:cond>
+              </p:nextCondLst>
+            </p:seq>
+          </p:childTnLst>
+        </p:cTn>
+      </p:par>
+    </p:tnLst>
+    <p:bldLst>
+      <p:bldP spid="3" grpId="0"/>
+      <p:bldP spid="9" grpId="0"/>
+    </p:bldLst>
+  </p:timing>
 </p:sld>
 </file>
 
@@ -13318,7 +15854,7 @@
                   <a:srgbClr val="464646"/>
                 </a:solidFill>
               </a:rPr>
-              <a:t>60% mniejszy błąd prognozy</a:t>
+              <a:t>60% mniejszy błąd prognozy,</a:t>
             </a:r>
           </a:p>
           <a:p>
@@ -13342,7 +15878,7 @@
                   <a:srgbClr val="464646"/>
                 </a:solidFill>
               </a:rPr>
-              <a:t>82,8% wyjaśnionej zmienności sprzedaży</a:t>
+              <a:t>82,8% wyjaśnionej zmienności sprzedaży,</a:t>
             </a:r>
           </a:p>
           <a:p>
@@ -13358,7 +15894,7 @@
                   <a:srgbClr val="464646"/>
                 </a:solidFill>
               </a:rPr>
-              <a:t>	✅ Mniejsze ryzyko braków towarów</a:t>
+              <a:t>	✅ Mniejsze ryzyko braków towarów,</a:t>
             </a:r>
           </a:p>
           <a:p>
@@ -13374,7 +15910,7 @@
                   <a:srgbClr val="464646"/>
                 </a:solidFill>
               </a:rPr>
-              <a:t>	✅ Lepsza rotacja zapasów</a:t>
+              <a:t>	✅ Lepsza rotacja zapasów,</a:t>
             </a:r>
           </a:p>
           <a:p>
@@ -13390,7 +15926,7 @@
                   <a:srgbClr val="464646"/>
                 </a:solidFill>
               </a:rPr>
-              <a:t>	✅ Ograniczenie nadmiernych zapasów</a:t>
+              <a:t>	✅ Ograniczenie nadmiernych zapasów.</a:t>
             </a:r>
             <a:r>
               <a:rPr lang="pl-PL" sz="2200" b="1" dirty="0">
@@ -13451,7 +15987,7 @@
                   <a:srgbClr val="464646"/>
                 </a:solidFill>
               </a:rPr>
-              <a:t>Lepsze zarządzanie zapasami</a:t>
+              <a:t>Lepsze zarządzanie zapasami,</a:t>
             </a:r>
           </a:p>
           <a:p>
@@ -13471,7 +16007,7 @@
                   <a:srgbClr val="464646"/>
                 </a:solidFill>
               </a:rPr>
-              <a:t>Mniejsze zamrożenie kapitału w magazynach</a:t>
+              <a:t>Mniejsze zamrożenie kapitału w magazynach.</a:t>
             </a:r>
           </a:p>
           <a:p>
@@ -13612,34 +16148,13 @@
               <a:t>Wdrożenie modelu </a:t>
             </a:r>
             <a:r>
-              <a:rPr lang="pl-PL" sz="2000" b="1" dirty="0" err="1">
+              <a:rPr lang="pl-PL" sz="2000" b="1" dirty="0">
                 <a:solidFill>
                   <a:srgbClr val="464646"/>
                 </a:solidFill>
               </a:rPr>
-              <a:t>Random</a:t>
-            </a:r>
-            <a:r>
-              <a:rPr lang="pl-PL" sz="2000" b="1" dirty="0">
-                <a:solidFill>
-                  <a:srgbClr val="464646"/>
-                </a:solidFill>
-              </a:rPr>
-              <a:t> </a:t>
-            </a:r>
-            <a:r>
-              <a:rPr lang="pl-PL" sz="2000" b="1" dirty="0" err="1">
-                <a:solidFill>
-                  <a:srgbClr val="464646"/>
-                </a:solidFill>
-              </a:rPr>
-              <a:t>Forest</a:t>
-            </a:r>
-            <a:endParaRPr lang="pl-PL" sz="2000" b="1" dirty="0">
-              <a:solidFill>
-                <a:srgbClr val="464646"/>
-              </a:solidFill>
-            </a:endParaRPr>
+              <a:t>Random Forest,</a:t>
+            </a:r>
           </a:p>
           <a:p>
             <a:pPr marL="800100" lvl="1" indent="-342900">
@@ -13663,7 +16178,7 @@
                   <a:srgbClr val="464646"/>
                 </a:solidFill>
               </a:rPr>
-              <a:t>Pilotaż w środowisku produkcyjnym</a:t>
+              <a:t>Pilotaż w środowisku produkcyjnym.</a:t>
             </a:r>
             <a:endParaRPr lang="pl-PL" sz="2000" b="1" dirty="0">
               <a:solidFill>
@@ -13736,6 +16251,176 @@
   <p:clrMapOvr>
     <a:masterClrMapping/>
   </p:clrMapOvr>
+  <p:timing>
+    <p:tnLst>
+      <p:par>
+        <p:cTn id="1" dur="indefinite" restart="never" nodeType="tmRoot">
+          <p:childTnLst>
+            <p:seq concurrent="1" nextAc="seek">
+              <p:cTn id="2" dur="indefinite" nodeType="mainSeq">
+                <p:childTnLst>
+                  <p:par>
+                    <p:cTn id="3" fill="hold">
+                      <p:stCondLst>
+                        <p:cond delay="indefinite"/>
+                      </p:stCondLst>
+                      <p:childTnLst>
+                        <p:par>
+                          <p:cTn id="4" fill="hold">
+                            <p:stCondLst>
+                              <p:cond delay="0"/>
+                            </p:stCondLst>
+                            <p:childTnLst>
+                              <p:par>
+                                <p:cTn id="5" presetID="1" presetClass="entr" presetSubtype="0" fill="hold" grpId="0" nodeType="clickEffect">
+                                  <p:stCondLst>
+                                    <p:cond delay="0"/>
+                                  </p:stCondLst>
+                                  <p:childTnLst>
+                                    <p:set>
+                                      <p:cBhvr>
+                                        <p:cTn id="6" dur="1" fill="hold">
+                                          <p:stCondLst>
+                                            <p:cond delay="0"/>
+                                          </p:stCondLst>
+                                        </p:cTn>
+                                        <p:tgtEl>
+                                          <p:spTgt spid="3"/>
+                                        </p:tgtEl>
+                                        <p:attrNameLst>
+                                          <p:attrName>style.visibility</p:attrName>
+                                        </p:attrNameLst>
+                                      </p:cBhvr>
+                                      <p:to>
+                                        <p:strVal val="visible"/>
+                                      </p:to>
+                                    </p:set>
+                                  </p:childTnLst>
+                                </p:cTn>
+                              </p:par>
+                            </p:childTnLst>
+                          </p:cTn>
+                        </p:par>
+                      </p:childTnLst>
+                    </p:cTn>
+                  </p:par>
+                  <p:par>
+                    <p:cTn id="7" fill="hold">
+                      <p:stCondLst>
+                        <p:cond delay="indefinite"/>
+                      </p:stCondLst>
+                      <p:childTnLst>
+                        <p:par>
+                          <p:cTn id="8" fill="hold">
+                            <p:stCondLst>
+                              <p:cond delay="0"/>
+                            </p:stCondLst>
+                            <p:childTnLst>
+                              <p:par>
+                                <p:cTn id="9" presetID="1" presetClass="entr" presetSubtype="0" fill="hold" grpId="0" nodeType="clickEffect">
+                                  <p:stCondLst>
+                                    <p:cond delay="0"/>
+                                  </p:stCondLst>
+                                  <p:childTnLst>
+                                    <p:set>
+                                      <p:cBhvr>
+                                        <p:cTn id="10" dur="1" fill="hold">
+                                          <p:stCondLst>
+                                            <p:cond delay="0"/>
+                                          </p:stCondLst>
+                                        </p:cTn>
+                                        <p:tgtEl>
+                                          <p:spTgt spid="9"/>
+                                        </p:tgtEl>
+                                        <p:attrNameLst>
+                                          <p:attrName>style.visibility</p:attrName>
+                                        </p:attrNameLst>
+                                      </p:cBhvr>
+                                      <p:to>
+                                        <p:strVal val="visible"/>
+                                      </p:to>
+                                    </p:set>
+                                  </p:childTnLst>
+                                </p:cTn>
+                              </p:par>
+                            </p:childTnLst>
+                          </p:cTn>
+                        </p:par>
+                      </p:childTnLst>
+                    </p:cTn>
+                  </p:par>
+                  <p:par>
+                    <p:cTn id="11" fill="hold">
+                      <p:stCondLst>
+                        <p:cond delay="indefinite"/>
+                      </p:stCondLst>
+                      <p:childTnLst>
+                        <p:par>
+                          <p:cTn id="12" fill="hold">
+                            <p:stCondLst>
+                              <p:cond delay="0"/>
+                            </p:stCondLst>
+                            <p:childTnLst>
+                              <p:par>
+                                <p:cTn id="13" presetID="1" presetClass="entr" presetSubtype="0" fill="hold" grpId="0" nodeType="clickEffect">
+                                  <p:stCondLst>
+                                    <p:cond delay="0"/>
+                                  </p:stCondLst>
+                                  <p:childTnLst>
+                                    <p:set>
+                                      <p:cBhvr>
+                                        <p:cTn id="14" dur="1" fill="hold">
+                                          <p:stCondLst>
+                                            <p:cond delay="0"/>
+                                          </p:stCondLst>
+                                        </p:cTn>
+                                        <p:tgtEl>
+                                          <p:spTgt spid="14"/>
+                                        </p:tgtEl>
+                                        <p:attrNameLst>
+                                          <p:attrName>style.visibility</p:attrName>
+                                        </p:attrNameLst>
+                                      </p:cBhvr>
+                                      <p:to>
+                                        <p:strVal val="visible"/>
+                                      </p:to>
+                                    </p:set>
+                                  </p:childTnLst>
+                                </p:cTn>
+                              </p:par>
+                            </p:childTnLst>
+                          </p:cTn>
+                        </p:par>
+                      </p:childTnLst>
+                    </p:cTn>
+                  </p:par>
+                </p:childTnLst>
+              </p:cTn>
+              <p:prevCondLst>
+                <p:cond evt="onPrev" delay="0">
+                  <p:tgtEl>
+                    <p:sldTgt/>
+                  </p:tgtEl>
+                </p:cond>
+              </p:prevCondLst>
+              <p:nextCondLst>
+                <p:cond evt="onNext" delay="0">
+                  <p:tgtEl>
+                    <p:sldTgt/>
+                  </p:tgtEl>
+                </p:cond>
+              </p:nextCondLst>
+            </p:seq>
+          </p:childTnLst>
+        </p:cTn>
+      </p:par>
+    </p:tnLst>
+    <p:bldLst>
+      <p:bldP spid="3" grpId="0"/>
+      <p:bldP spid="9" grpId="0"/>
+      <p:bldP spid="14" grpId="0" animBg="1"/>
+    </p:bldLst>
+  </p:timing>
 </p:sld>
 </file>
 
@@ -13840,7 +16525,7 @@
         <p:spPr>
           <a:xfrm>
             <a:off x="731520" y="1404908"/>
-            <a:ext cx="4728667" cy="3539430"/>
+            <a:ext cx="4792787" cy="3539430"/>
           </a:xfrm>
           <a:prstGeom prst="rect">
             <a:avLst/>
@@ -13887,37 +16572,8 @@
                   <a:srgbClr val="464646"/>
                 </a:solidFill>
               </a:rPr>
-              <a:t>Testy </a:t>
-            </a:r>
-            <a:r>
-              <a:rPr lang="pl-PL" dirty="0" err="1">
-                <a:solidFill>
-                  <a:srgbClr val="464646"/>
-                </a:solidFill>
-              </a:rPr>
-              <a:t>XGBoost</a:t>
-            </a:r>
-            <a:r>
-              <a:rPr lang="pl-PL" dirty="0">
-                <a:solidFill>
-                  <a:srgbClr val="464646"/>
-                </a:solidFill>
-              </a:rPr>
-              <a:t> i </a:t>
-            </a:r>
-            <a:r>
-              <a:rPr lang="pl-PL" dirty="0" err="1">
-                <a:solidFill>
-                  <a:srgbClr val="464646"/>
-                </a:solidFill>
-              </a:rPr>
-              <a:t>LightGBM</a:t>
-            </a:r>
-            <a:endParaRPr lang="pl-PL" dirty="0">
-              <a:solidFill>
-                <a:srgbClr val="464646"/>
-              </a:solidFill>
-            </a:endParaRPr>
+              <a:t>Testy XGBoost i LightGBM,</a:t>
+            </a:r>
           </a:p>
           <a:p>
             <a:pPr marL="800100" lvl="1" indent="-342900">
@@ -13934,7 +16590,7 @@
                   <a:srgbClr val="464646"/>
                 </a:solidFill>
               </a:rPr>
-              <a:t>Porównanie jakości i czasu predykcji</a:t>
+              <a:t>Porównanie jakości i czasu predykcji.</a:t>
             </a:r>
           </a:p>
           <a:p>
@@ -13985,7 +16641,7 @@
                   <a:srgbClr val="464646"/>
                 </a:solidFill>
               </a:rPr>
-              <a:t>Pogoda</a:t>
+              <a:t>Pogoda,</a:t>
             </a:r>
           </a:p>
           <a:p>
@@ -14003,7 +16659,7 @@
                   <a:srgbClr val="464646"/>
                 </a:solidFill>
               </a:rPr>
-              <a:t>Dane makroekonomiczne</a:t>
+              <a:t>Dane makroekonomiczne,</a:t>
             </a:r>
           </a:p>
           <a:p>
@@ -14021,7 +16677,7 @@
                   <a:srgbClr val="464646"/>
                 </a:solidFill>
               </a:rPr>
-              <a:t>Święta i wydarzenia lokalne</a:t>
+              <a:t>Święta i wydarzenia lokalne.</a:t>
             </a:r>
           </a:p>
           <a:p>
@@ -14100,7 +16756,7 @@
         <p:spPr>
           <a:xfrm>
             <a:off x="6260568" y="2208810"/>
-            <a:ext cx="4602542" cy="1249573"/>
+            <a:ext cx="4666662" cy="1249573"/>
           </a:xfrm>
           <a:prstGeom prst="rect">
             <a:avLst/>
@@ -14152,23 +16808,7 @@
                   <a:srgbClr val="464646"/>
                 </a:solidFill>
               </a:rPr>
-              <a:t>Comiesięczny </a:t>
-            </a:r>
-            <a:r>
-              <a:rPr lang="pl-PL" sz="2000" dirty="0" err="1">
-                <a:solidFill>
-                  <a:srgbClr val="464646"/>
-                </a:solidFill>
-              </a:rPr>
-              <a:t>retraining</a:t>
-            </a:r>
-            <a:r>
-              <a:rPr lang="pl-PL" sz="2000" dirty="0">
-                <a:solidFill>
-                  <a:srgbClr val="464646"/>
-                </a:solidFill>
-              </a:rPr>
-              <a:t> modelu</a:t>
+              <a:t>Comiesięczny retraining modelu,</a:t>
             </a:r>
             <a:endParaRPr lang="pl-PL" sz="2000" b="1" dirty="0">
               <a:solidFill>
@@ -14191,31 +16831,7 @@
                   <a:srgbClr val="464646"/>
                 </a:solidFill>
               </a:rPr>
-              <a:t>Automatyczny </a:t>
-            </a:r>
-            <a:r>
-              <a:rPr lang="pl-PL" sz="2000" dirty="0" err="1">
-                <a:solidFill>
-                  <a:srgbClr val="464646"/>
-                </a:solidFill>
-              </a:rPr>
-              <a:t>pipeline</a:t>
-            </a:r>
-            <a:r>
-              <a:rPr lang="pl-PL" sz="2000" dirty="0">
-                <a:solidFill>
-                  <a:srgbClr val="464646"/>
-                </a:solidFill>
-              </a:rPr>
-              <a:t> </a:t>
-            </a:r>
-            <a:r>
-              <a:rPr lang="pl-PL" sz="2000" dirty="0" err="1">
-                <a:solidFill>
-                  <a:srgbClr val="464646"/>
-                </a:solidFill>
-              </a:rPr>
-              <a:t>retrainingu</a:t>
+              <a:t>Automatyczny pipeline retrainingu.</a:t>
             </a:r>
             <a:endParaRPr lang="pl-PL" sz="2000" b="1" dirty="0">
               <a:solidFill>
@@ -14303,6 +16919,176 @@
   <p:clrMapOvr>
     <a:masterClrMapping/>
   </p:clrMapOvr>
+  <p:timing>
+    <p:tnLst>
+      <p:par>
+        <p:cTn id="1" dur="indefinite" restart="never" nodeType="tmRoot">
+          <p:childTnLst>
+            <p:seq concurrent="1" nextAc="seek">
+              <p:cTn id="2" dur="indefinite" nodeType="mainSeq">
+                <p:childTnLst>
+                  <p:par>
+                    <p:cTn id="3" fill="hold">
+                      <p:stCondLst>
+                        <p:cond delay="indefinite"/>
+                      </p:stCondLst>
+                      <p:childTnLst>
+                        <p:par>
+                          <p:cTn id="4" fill="hold">
+                            <p:stCondLst>
+                              <p:cond delay="0"/>
+                            </p:stCondLst>
+                            <p:childTnLst>
+                              <p:par>
+                                <p:cTn id="5" presetID="1" presetClass="entr" presetSubtype="0" fill="hold" grpId="0" nodeType="clickEffect">
+                                  <p:stCondLst>
+                                    <p:cond delay="0"/>
+                                  </p:stCondLst>
+                                  <p:childTnLst>
+                                    <p:set>
+                                      <p:cBhvr>
+                                        <p:cTn id="6" dur="1" fill="hold">
+                                          <p:stCondLst>
+                                            <p:cond delay="0"/>
+                                          </p:stCondLst>
+                                        </p:cTn>
+                                        <p:tgtEl>
+                                          <p:spTgt spid="3"/>
+                                        </p:tgtEl>
+                                        <p:attrNameLst>
+                                          <p:attrName>style.visibility</p:attrName>
+                                        </p:attrNameLst>
+                                      </p:cBhvr>
+                                      <p:to>
+                                        <p:strVal val="visible"/>
+                                      </p:to>
+                                    </p:set>
+                                  </p:childTnLst>
+                                </p:cTn>
+                              </p:par>
+                            </p:childTnLst>
+                          </p:cTn>
+                        </p:par>
+                      </p:childTnLst>
+                    </p:cTn>
+                  </p:par>
+                  <p:par>
+                    <p:cTn id="7" fill="hold">
+                      <p:stCondLst>
+                        <p:cond delay="indefinite"/>
+                      </p:stCondLst>
+                      <p:childTnLst>
+                        <p:par>
+                          <p:cTn id="8" fill="hold">
+                            <p:stCondLst>
+                              <p:cond delay="0"/>
+                            </p:stCondLst>
+                            <p:childTnLst>
+                              <p:par>
+                                <p:cTn id="9" presetID="1" presetClass="entr" presetSubtype="0" fill="hold" grpId="0" nodeType="clickEffect">
+                                  <p:stCondLst>
+                                    <p:cond delay="0"/>
+                                  </p:stCondLst>
+                                  <p:childTnLst>
+                                    <p:set>
+                                      <p:cBhvr>
+                                        <p:cTn id="10" dur="1" fill="hold">
+                                          <p:stCondLst>
+                                            <p:cond delay="0"/>
+                                          </p:stCondLst>
+                                        </p:cTn>
+                                        <p:tgtEl>
+                                          <p:spTgt spid="9"/>
+                                        </p:tgtEl>
+                                        <p:attrNameLst>
+                                          <p:attrName>style.visibility</p:attrName>
+                                        </p:attrNameLst>
+                                      </p:cBhvr>
+                                      <p:to>
+                                        <p:strVal val="visible"/>
+                                      </p:to>
+                                    </p:set>
+                                  </p:childTnLst>
+                                </p:cTn>
+                              </p:par>
+                            </p:childTnLst>
+                          </p:cTn>
+                        </p:par>
+                      </p:childTnLst>
+                    </p:cTn>
+                  </p:par>
+                  <p:par>
+                    <p:cTn id="11" fill="hold">
+                      <p:stCondLst>
+                        <p:cond delay="indefinite"/>
+                      </p:stCondLst>
+                      <p:childTnLst>
+                        <p:par>
+                          <p:cTn id="12" fill="hold">
+                            <p:stCondLst>
+                              <p:cond delay="0"/>
+                            </p:stCondLst>
+                            <p:childTnLst>
+                              <p:par>
+                                <p:cTn id="13" presetID="1" presetClass="entr" presetSubtype="0" fill="hold" grpId="0" nodeType="clickEffect">
+                                  <p:stCondLst>
+                                    <p:cond delay="0"/>
+                                  </p:stCondLst>
+                                  <p:childTnLst>
+                                    <p:set>
+                                      <p:cBhvr>
+                                        <p:cTn id="14" dur="1" fill="hold">
+                                          <p:stCondLst>
+                                            <p:cond delay="0"/>
+                                          </p:stCondLst>
+                                        </p:cTn>
+                                        <p:tgtEl>
+                                          <p:spTgt spid="14"/>
+                                        </p:tgtEl>
+                                        <p:attrNameLst>
+                                          <p:attrName>style.visibility</p:attrName>
+                                        </p:attrNameLst>
+                                      </p:cBhvr>
+                                      <p:to>
+                                        <p:strVal val="visible"/>
+                                      </p:to>
+                                    </p:set>
+                                  </p:childTnLst>
+                                </p:cTn>
+                              </p:par>
+                            </p:childTnLst>
+                          </p:cTn>
+                        </p:par>
+                      </p:childTnLst>
+                    </p:cTn>
+                  </p:par>
+                </p:childTnLst>
+              </p:cTn>
+              <p:prevCondLst>
+                <p:cond evt="onPrev" delay="0">
+                  <p:tgtEl>
+                    <p:sldTgt/>
+                  </p:tgtEl>
+                </p:cond>
+              </p:prevCondLst>
+              <p:nextCondLst>
+                <p:cond evt="onNext" delay="0">
+                  <p:tgtEl>
+                    <p:sldTgt/>
+                  </p:tgtEl>
+                </p:cond>
+              </p:nextCondLst>
+            </p:seq>
+          </p:childTnLst>
+        </p:cTn>
+      </p:par>
+    </p:tnLst>
+    <p:bldLst>
+      <p:bldP spid="3" grpId="0"/>
+      <p:bldP spid="9" grpId="0"/>
+      <p:bldP spid="14" grpId="0" animBg="1"/>
+    </p:bldLst>
+  </p:timing>
 </p:sld>
 </file>
 

--- a/presentation/Rossmann_presentation.pptx
+++ b/presentation/Rossmann_presentation.pptx
@@ -9730,7 +9730,7 @@
         <p:spPr>
           <a:xfrm>
             <a:off x="298481" y="3796421"/>
-            <a:ext cx="6399188" cy="1618905"/>
+            <a:ext cx="5908797" cy="1618905"/>
           </a:xfrm>
           <a:prstGeom prst="rect">
             <a:avLst/>
@@ -9789,12 +9789,20 @@
               <a:defRPr sz="2000"/>
             </a:pPr>
             <a:r>
+              <a:rPr lang="pl-PL" dirty="0"/>
+              <a:t>Prognozuje sprzedaż z wyprzedzeniem </a:t>
+            </a:r>
+            <a:r>
+              <a:rPr lang="pl-PL" b="1" dirty="0"/>
+              <a:t>48 dni</a:t>
+            </a:r>
+            <a:r>
               <a:rPr lang="pl-PL" dirty="0">
                 <a:solidFill>
                   <a:srgbClr val="464646"/>
                 </a:solidFill>
               </a:rPr>
-              <a:t>Prognozuje sprzedaż z 48-dniowym wyprzedzeniem,</a:t>
+              <a:t>,</a:t>
             </a:r>
           </a:p>
           <a:p>
@@ -9808,7 +9816,7 @@
             </a:pPr>
             <a:r>
               <a:rPr lang="pl-PL" dirty="0"/>
-              <a:t>Uzyska </a:t>
+              <a:t>Osiąga jak </a:t>
             </a:r>
             <a:r>
               <a:rPr lang="pl-PL" b="1" dirty="0"/>
@@ -9816,7 +9824,7 @@
             </a:r>
             <a:r>
               <a:rPr lang="pl-PL" dirty="0"/>
-              <a:t> błąd prognozy </a:t>
+              <a:t> błąd prognozy</a:t>
             </a:r>
             <a:endParaRPr lang="pl-PL" dirty="0">
               <a:solidFill>
@@ -10687,7 +10695,7 @@
         <p:spPr>
           <a:xfrm>
             <a:off x="233559" y="1108365"/>
-            <a:ext cx="5795766" cy="2357568"/>
+            <a:ext cx="5795766" cy="1988237"/>
           </a:xfrm>
           <a:prstGeom prst="rect">
             <a:avLst/>
@@ -10765,7 +10773,7 @@
                   <a:srgbClr val="464646"/>
                 </a:solidFill>
               </a:rPr>
-              <a:t>Setki tysięcy rekordów (surowe 1 017 209 x 9) – finalnie 844 338 x 35</a:t>
+              <a:t>1 017 209 x 9 rekordów– finalnie 844 338 x 35</a:t>
             </a:r>
           </a:p>
           <a:p>
@@ -11953,7 +11961,7 @@
         </p:nvSpPr>
         <p:spPr>
           <a:xfrm>
-            <a:off x="5987686" y="1859930"/>
+            <a:off x="6096000" y="1322709"/>
             <a:ext cx="6089238" cy="3096232"/>
           </a:xfrm>
           <a:prstGeom prst="rect">
@@ -12072,28 +12080,16 @@
               <a:defRPr sz="2000"/>
             </a:pPr>
             <a:r>
+              <a:rPr lang="pl-PL" dirty="0"/>
+              <a:t>Jednolite przetwarzanie danych treningowych i testowych</a:t>
+            </a:r>
+            <a:r>
               <a:rPr lang="pl-PL" dirty="0">
                 <a:solidFill>
                   <a:srgbClr val="464646"/>
                 </a:solidFill>
               </a:rPr>
-              <a:t>Jednolite przygotowanie danych treningowych</a:t>
-            </a:r>
-          </a:p>
-          <a:p>
-            <a:pPr marL="450850" lvl="1" indent="357188">
-              <a:lnSpc>
-                <a:spcPct val="120000"/>
-              </a:lnSpc>
-              <a:defRPr sz="2000"/>
-            </a:pPr>
-            <a:r>
-              <a:rPr lang="pl-PL" dirty="0">
-                <a:solidFill>
-                  <a:srgbClr val="464646"/>
-                </a:solidFill>
-              </a:rPr>
-              <a:t>i testowych,</a:t>
+              <a:t>,</a:t>
             </a:r>
           </a:p>
           <a:p>
@@ -14464,15 +14460,15 @@
             <a:pPr algn="just"/>
             <a:r>
               <a:rPr lang="pl-PL" sz="1600" dirty="0"/>
-              <a:t>Model pomylił się średnio o </a:t>
+              <a:t>Średni procentowy błąd prognozy wyniósł około </a:t>
             </a:r>
             <a:r>
               <a:rPr lang="pl-PL" sz="1600" b="1" dirty="0"/>
-              <a:t>około 17%</a:t>
+              <a:t>17%. </a:t>
             </a:r>
             <a:r>
               <a:rPr lang="pl-PL" sz="1600" dirty="0"/>
-              <a:t> w skali całej sieci. W praktyce oznacza to, że jeśli sklep ma prognozowany dzienny obrót na poziomie 10 000 zł, to model pomyli się średnio o ok. 1 700 zł</a:t>
+              <a:t>W praktyce oznacza to, że jeśli sklep ma prognozowany dzienny obrót na poziomie 10 000 zł, to model pomyli się średnio o ok. 1 700 zł</a:t>
             </a:r>
           </a:p>
         </p:txBody>
@@ -15764,7 +15760,7 @@
         <p:spPr>
           <a:xfrm>
             <a:off x="677548" y="1052368"/>
-            <a:ext cx="5806398" cy="5201424"/>
+            <a:ext cx="5795241" cy="5201424"/>
           </a:xfrm>
           <a:prstGeom prst="rect">
             <a:avLst/>
@@ -15854,7 +15850,15 @@
                   <a:srgbClr val="464646"/>
                 </a:solidFill>
               </a:rPr>
-              <a:t>60% mniejszy błąd prognozy,</a:t>
+              <a:t>60% </a:t>
+            </a:r>
+            <a:r>
+              <a:rPr lang="pl-PL" sz="2000" dirty="0">
+                <a:solidFill>
+                  <a:srgbClr val="464646"/>
+                </a:solidFill>
+              </a:rPr>
+              <a:t>mniejszy błąd prognozy,</a:t>
             </a:r>
           </a:p>
           <a:p>
@@ -15870,7 +15874,7 @@
                   <a:srgbClr val="464646"/>
                 </a:solidFill>
               </a:rPr>
-              <a:t>	✅ </a:t>
+              <a:t>	✅ Model wyjaśnia </a:t>
             </a:r>
             <a:r>
               <a:rPr lang="pl-PL" sz="2000" b="1" dirty="0">
@@ -15878,7 +15882,15 @@
                   <a:srgbClr val="464646"/>
                 </a:solidFill>
               </a:rPr>
-              <a:t>82,8% wyjaśnionej zmienności sprzedaży,</a:t>
+              <a:t>82,8% </a:t>
+            </a:r>
+            <a:r>
+              <a:rPr lang="pl-PL" sz="2000" dirty="0">
+                <a:solidFill>
+                  <a:srgbClr val="464646"/>
+                </a:solidFill>
+              </a:rPr>
+              <a:t>zmienności sprzedaży</a:t>
             </a:r>
           </a:p>
           <a:p>
@@ -16755,8 +16767,8 @@
         </p:nvSpPr>
         <p:spPr>
           <a:xfrm>
-            <a:off x="6260568" y="2208810"/>
-            <a:ext cx="4666662" cy="1249573"/>
+            <a:off x="6096000" y="2208810"/>
+            <a:ext cx="5693307" cy="1988237"/>
           </a:xfrm>
           <a:prstGeom prst="rect">
             <a:avLst/>
@@ -16764,7 +16776,7 @@
           <a:noFill/>
         </p:spPr>
         <p:txBody>
-          <a:bodyPr wrap="none">
+          <a:bodyPr wrap="square">
             <a:spAutoFit/>
           </a:bodyPr>
           <a:lstStyle/>
@@ -16794,7 +16806,7 @@
             </a:endParaRPr>
           </a:p>
           <a:p>
-            <a:pPr marL="800100" lvl="1" indent="-342900">
+            <a:pPr marL="800100" lvl="1" indent="-342900" algn="just">
               <a:lnSpc>
                 <a:spcPct val="120000"/>
               </a:lnSpc>
@@ -16808,7 +16820,35 @@
                   <a:srgbClr val="464646"/>
                 </a:solidFill>
               </a:rPr>
-              <a:t>Comiesięczny retraining modelu,</a:t>
+              <a:t>Comiesięczny </a:t>
+            </a:r>
+            <a:r>
+              <a:rPr lang="pl-PL" sz="2000" dirty="0" err="1">
+                <a:solidFill>
+                  <a:srgbClr val="464646"/>
+                </a:solidFill>
+              </a:rPr>
+              <a:t>retraining</a:t>
+            </a:r>
+            <a:r>
+              <a:rPr lang="pl-PL" sz="2000" dirty="0">
+                <a:solidFill>
+                  <a:srgbClr val="464646"/>
+                </a:solidFill>
+              </a:rPr>
+              <a:t> modelu (lub </a:t>
+            </a:r>
+            <a:r>
+              <a:rPr lang="pl-PL" dirty="0"/>
+              <a:t>dostosowana do tempa zmian w danych oraz potrzeb biznesowych</a:t>
+            </a:r>
+            <a:r>
+              <a:rPr lang="pl-PL" sz="2000" dirty="0">
+                <a:solidFill>
+                  <a:srgbClr val="464646"/>
+                </a:solidFill>
+              </a:rPr>
+              <a:t>,</a:t>
             </a:r>
             <a:endParaRPr lang="pl-PL" sz="2000" b="1" dirty="0">
               <a:solidFill>

--- a/presentation/Rossmann_presentation.pptx
+++ b/presentation/Rossmann_presentation.pptx
@@ -3804,7 +3804,18 @@
                         <a:ea typeface="+mn-ea"/>
                         <a:cs typeface="+mn-cs"/>
                       </a:rPr>
-                      <m:t>/1</m:t>
+                      <m:t>/</m:t>
+                    </m:r>
+                    <m:r>
+                      <a:rPr lang="pl-PL" sz="1200" i="0" kern="1200">
+                        <a:solidFill>
+                          <a:schemeClr val="tx1"/>
+                        </a:solidFill>
+                        <a:latin typeface="Cambria Math" panose="02040503050406030204" pitchFamily="18" charset="0"/>
+                        <a:ea typeface="+mn-ea"/>
+                        <a:cs typeface="+mn-cs"/>
+                      </a:rPr>
+                      <m:t>1</m:t>
                     </m:r>
                   </m:oMath>
                 </a14:m>
@@ -9730,7 +9741,7 @@
         <p:spPr>
           <a:xfrm>
             <a:off x="298481" y="3796421"/>
-            <a:ext cx="5908797" cy="1618905"/>
+            <a:ext cx="6397777" cy="1618905"/>
           </a:xfrm>
           <a:prstGeom prst="rect">
             <a:avLst/>
@@ -9789,20 +9800,12 @@
               <a:defRPr sz="2000"/>
             </a:pPr>
             <a:r>
-              <a:rPr lang="pl-PL" dirty="0"/>
-              <a:t>Prognozuje sprzedaż z wyprzedzeniem </a:t>
-            </a:r>
-            <a:r>
-              <a:rPr lang="pl-PL" b="1" dirty="0"/>
-              <a:t>48 dni</a:t>
-            </a:r>
-            <a:r>
               <a:rPr lang="pl-PL" dirty="0">
                 <a:solidFill>
                   <a:srgbClr val="464646"/>
                 </a:solidFill>
               </a:rPr>
-              <a:t>,</a:t>
+              <a:t>Prognozuje sprzedaż z 48-dniowym wyprzedzeniem,</a:t>
             </a:r>
           </a:p>
           <a:p>
@@ -10564,6 +10567,267 @@
                       </p:childTnLst>
                     </p:cTn>
                   </p:par>
+                  <p:par>
+                    <p:cTn id="15" fill="hold">
+                      <p:stCondLst>
+                        <p:cond delay="indefinite"/>
+                      </p:stCondLst>
+                      <p:childTnLst>
+                        <p:par>
+                          <p:cTn id="16" fill="hold">
+                            <p:stCondLst>
+                              <p:cond delay="0"/>
+                            </p:stCondLst>
+                            <p:childTnLst>
+                              <p:par>
+                                <p:cTn id="17" presetID="1" presetClass="entr" presetSubtype="0" fill="hold" grpId="0" nodeType="clickEffect">
+                                  <p:stCondLst>
+                                    <p:cond delay="0"/>
+                                  </p:stCondLst>
+                                  <p:childTnLst>
+                                    <p:set>
+                                      <p:cBhvr>
+                                        <p:cTn id="18" dur="1" fill="hold">
+                                          <p:stCondLst>
+                                            <p:cond delay="0"/>
+                                          </p:stCondLst>
+                                        </p:cTn>
+                                        <p:tgtEl>
+                                          <p:spTgt spid="4"/>
+                                        </p:tgtEl>
+                                        <p:attrNameLst>
+                                          <p:attrName>style.visibility</p:attrName>
+                                        </p:attrNameLst>
+                                      </p:cBhvr>
+                                      <p:to>
+                                        <p:strVal val="visible"/>
+                                      </p:to>
+                                    </p:set>
+                                  </p:childTnLst>
+                                </p:cTn>
+                              </p:par>
+                              <p:par>
+                                <p:cTn id="19" presetID="1" presetClass="entr" presetSubtype="0" fill="hold" nodeType="withEffect">
+                                  <p:stCondLst>
+                                    <p:cond delay="0"/>
+                                  </p:stCondLst>
+                                  <p:childTnLst>
+                                    <p:set>
+                                      <p:cBhvr>
+                                        <p:cTn id="20" dur="1" fill="hold">
+                                          <p:stCondLst>
+                                            <p:cond delay="0"/>
+                                          </p:stCondLst>
+                                        </p:cTn>
+                                        <p:tgtEl>
+                                          <p:spTgt spid="10"/>
+                                        </p:tgtEl>
+                                        <p:attrNameLst>
+                                          <p:attrName>style.visibility</p:attrName>
+                                        </p:attrNameLst>
+                                      </p:cBhvr>
+                                      <p:to>
+                                        <p:strVal val="visible"/>
+                                      </p:to>
+                                    </p:set>
+                                  </p:childTnLst>
+                                </p:cTn>
+                              </p:par>
+                              <p:par>
+                                <p:cTn id="21" presetID="1" presetClass="entr" presetSubtype="0" fill="hold" grpId="0" nodeType="withEffect">
+                                  <p:stCondLst>
+                                    <p:cond delay="0"/>
+                                  </p:stCondLst>
+                                  <p:childTnLst>
+                                    <p:set>
+                                      <p:cBhvr>
+                                        <p:cTn id="22" dur="1" fill="hold">
+                                          <p:stCondLst>
+                                            <p:cond delay="0"/>
+                                          </p:stCondLst>
+                                        </p:cTn>
+                                        <p:tgtEl>
+                                          <p:spTgt spid="5"/>
+                                        </p:tgtEl>
+                                        <p:attrNameLst>
+                                          <p:attrName>style.visibility</p:attrName>
+                                        </p:attrNameLst>
+                                      </p:cBhvr>
+                                      <p:to>
+                                        <p:strVal val="visible"/>
+                                      </p:to>
+                                    </p:set>
+                                  </p:childTnLst>
+                                </p:cTn>
+                              </p:par>
+                              <p:par>
+                                <p:cTn id="23" presetID="1" presetClass="entr" presetSubtype="0" fill="hold" nodeType="withEffect">
+                                  <p:stCondLst>
+                                    <p:cond delay="0"/>
+                                  </p:stCondLst>
+                                  <p:childTnLst>
+                                    <p:set>
+                                      <p:cBhvr>
+                                        <p:cTn id="24" dur="1" fill="hold">
+                                          <p:stCondLst>
+                                            <p:cond delay="0"/>
+                                          </p:stCondLst>
+                                        </p:cTn>
+                                        <p:tgtEl>
+                                          <p:spTgt spid="12"/>
+                                        </p:tgtEl>
+                                        <p:attrNameLst>
+                                          <p:attrName>style.visibility</p:attrName>
+                                        </p:attrNameLst>
+                                      </p:cBhvr>
+                                      <p:to>
+                                        <p:strVal val="visible"/>
+                                      </p:to>
+                                    </p:set>
+                                  </p:childTnLst>
+                                </p:cTn>
+                              </p:par>
+                              <p:par>
+                                <p:cTn id="25" presetID="1" presetClass="entr" presetSubtype="0" fill="hold" grpId="0" nodeType="withEffect">
+                                  <p:stCondLst>
+                                    <p:cond delay="0"/>
+                                  </p:stCondLst>
+                                  <p:childTnLst>
+                                    <p:set>
+                                      <p:cBhvr>
+                                        <p:cTn id="26" dur="1" fill="hold">
+                                          <p:stCondLst>
+                                            <p:cond delay="0"/>
+                                          </p:stCondLst>
+                                        </p:cTn>
+                                        <p:tgtEl>
+                                          <p:spTgt spid="6"/>
+                                        </p:tgtEl>
+                                        <p:attrNameLst>
+                                          <p:attrName>style.visibility</p:attrName>
+                                        </p:attrNameLst>
+                                      </p:cBhvr>
+                                      <p:to>
+                                        <p:strVal val="visible"/>
+                                      </p:to>
+                                    </p:set>
+                                  </p:childTnLst>
+                                </p:cTn>
+                              </p:par>
+                              <p:par>
+                                <p:cTn id="27" presetID="1" presetClass="entr" presetSubtype="0" fill="hold" nodeType="withEffect">
+                                  <p:stCondLst>
+                                    <p:cond delay="0"/>
+                                  </p:stCondLst>
+                                  <p:childTnLst>
+                                    <p:set>
+                                      <p:cBhvr>
+                                        <p:cTn id="28" dur="1" fill="hold">
+                                          <p:stCondLst>
+                                            <p:cond delay="0"/>
+                                          </p:stCondLst>
+                                        </p:cTn>
+                                        <p:tgtEl>
+                                          <p:spTgt spid="13"/>
+                                        </p:tgtEl>
+                                        <p:attrNameLst>
+                                          <p:attrName>style.visibility</p:attrName>
+                                        </p:attrNameLst>
+                                      </p:cBhvr>
+                                      <p:to>
+                                        <p:strVal val="visible"/>
+                                      </p:to>
+                                    </p:set>
+                                  </p:childTnLst>
+                                </p:cTn>
+                              </p:par>
+                              <p:par>
+                                <p:cTn id="29" presetID="1" presetClass="entr" presetSubtype="0" fill="hold" grpId="0" nodeType="withEffect">
+                                  <p:stCondLst>
+                                    <p:cond delay="0"/>
+                                  </p:stCondLst>
+                                  <p:childTnLst>
+                                    <p:set>
+                                      <p:cBhvr>
+                                        <p:cTn id="30" dur="1" fill="hold">
+                                          <p:stCondLst>
+                                            <p:cond delay="0"/>
+                                          </p:stCondLst>
+                                        </p:cTn>
+                                        <p:tgtEl>
+                                          <p:spTgt spid="9"/>
+                                        </p:tgtEl>
+                                        <p:attrNameLst>
+                                          <p:attrName>style.visibility</p:attrName>
+                                        </p:attrNameLst>
+                                      </p:cBhvr>
+                                      <p:to>
+                                        <p:strVal val="visible"/>
+                                      </p:to>
+                                    </p:set>
+                                  </p:childTnLst>
+                                </p:cTn>
+                              </p:par>
+                              <p:par>
+                                <p:cTn id="31" presetID="1" presetClass="entr" presetSubtype="0" fill="hold" grpId="0" nodeType="withEffect">
+                                  <p:stCondLst>
+                                    <p:cond delay="0"/>
+                                  </p:stCondLst>
+                                  <p:childTnLst>
+                                    <p:set>
+                                      <p:cBhvr>
+                                        <p:cTn id="32" dur="1" fill="hold">
+                                          <p:stCondLst>
+                                            <p:cond delay="0"/>
+                                          </p:stCondLst>
+                                        </p:cTn>
+                                        <p:tgtEl>
+                                          <p:spTgt spid="16"/>
+                                        </p:tgtEl>
+                                        <p:attrNameLst>
+                                          <p:attrName>style.visibility</p:attrName>
+                                        </p:attrNameLst>
+                                      </p:cBhvr>
+                                      <p:to>
+                                        <p:strVal val="visible"/>
+                                      </p:to>
+                                    </p:set>
+                                  </p:childTnLst>
+                                </p:cTn>
+                              </p:par>
+                              <p:par>
+                                <p:cTn id="33" presetID="1" presetClass="entr" presetSubtype="0" fill="hold" grpId="0" nodeType="withEffect">
+                                  <p:stCondLst>
+                                    <p:cond delay="0"/>
+                                  </p:stCondLst>
+                                  <p:childTnLst>
+                                    <p:set>
+                                      <p:cBhvr>
+                                        <p:cTn id="34" dur="1" fill="hold">
+                                          <p:stCondLst>
+                                            <p:cond delay="0"/>
+                                          </p:stCondLst>
+                                        </p:cTn>
+                                        <p:tgtEl>
+                                          <p:spTgt spid="14"/>
+                                        </p:tgtEl>
+                                        <p:attrNameLst>
+                                          <p:attrName>style.visibility</p:attrName>
+                                        </p:attrNameLst>
+                                      </p:cBhvr>
+                                      <p:to>
+                                        <p:strVal val="visible"/>
+                                      </p:to>
+                                    </p:set>
+                                  </p:childTnLst>
+                                </p:cTn>
+                              </p:par>
+                            </p:childTnLst>
+                          </p:cTn>
+                        </p:par>
+                      </p:childTnLst>
+                    </p:cTn>
+                  </p:par>
                 </p:childTnLst>
               </p:cTn>
               <p:prevCondLst>
@@ -10589,6 +10853,12 @@
       <p:bldP spid="3" grpId="0"/>
       <p:bldP spid="8" grpId="0"/>
       <p:bldP spid="17" grpId="0"/>
+      <p:bldP spid="4" grpId="0" animBg="1"/>
+      <p:bldP spid="5" grpId="0" animBg="1"/>
+      <p:bldP spid="6" grpId="0" animBg="1"/>
+      <p:bldP spid="9" grpId="0" animBg="1"/>
+      <p:bldP spid="14" grpId="0" animBg="1"/>
+      <p:bldP spid="16" grpId="0" animBg="1"/>
     </p:bldLst>
   </p:timing>
 </p:sld>
@@ -10695,7 +10965,7 @@
         <p:spPr>
           <a:xfrm>
             <a:off x="233559" y="1108365"/>
-            <a:ext cx="5795766" cy="1988237"/>
+            <a:ext cx="5795766" cy="2357568"/>
           </a:xfrm>
           <a:prstGeom prst="rect">
             <a:avLst/>
@@ -10768,12 +11038,20 @@
               <a:defRPr sz="2000"/>
             </a:pPr>
             <a:r>
+              <a:rPr lang="pl-PL" b="1" dirty="0">
+                <a:solidFill>
+                  <a:srgbClr val="464646"/>
+                </a:solidFill>
+              </a:rPr>
+              <a:t>1 017 209 </a:t>
+            </a:r>
+            <a:r>
               <a:rPr lang="pl-PL" dirty="0">
                 <a:solidFill>
                   <a:srgbClr val="464646"/>
                 </a:solidFill>
               </a:rPr>
-              <a:t>1 017 209 x 9 rekordów– finalnie 844 338 x 35</a:t>
+              <a:t>rekordów (po przygotowaniu danych: 844 338 x 35),</a:t>
             </a:r>
           </a:p>
           <a:p>
@@ -10980,7 +11258,7 @@
         <p:spPr>
           <a:xfrm>
             <a:off x="6029325" y="1008583"/>
-            <a:ext cx="5867312" cy="1988237"/>
+            <a:ext cx="6247223" cy="2357568"/>
           </a:xfrm>
           <a:prstGeom prst="rect">
             <a:avLst/>
@@ -11086,7 +11364,79 @@
                   <a:srgbClr val="464646"/>
                 </a:solidFill>
               </a:rPr>
-              <a:t>Lagi 49 i 56 dni,</a:t>
+              <a:t>Lagi </a:t>
+            </a:r>
+            <a:r>
+              <a:rPr lang="pl-PL" b="1" dirty="0">
+                <a:solidFill>
+                  <a:srgbClr val="464646"/>
+                </a:solidFill>
+              </a:rPr>
+              <a:t>49</a:t>
+            </a:r>
+            <a:r>
+              <a:rPr lang="pl-PL" dirty="0">
+                <a:solidFill>
+                  <a:srgbClr val="464646"/>
+                </a:solidFill>
+              </a:rPr>
+              <a:t> i </a:t>
+            </a:r>
+            <a:r>
+              <a:rPr lang="pl-PL" b="1" dirty="0">
+                <a:solidFill>
+                  <a:srgbClr val="464646"/>
+                </a:solidFill>
+              </a:rPr>
+              <a:t>56</a:t>
+            </a:r>
+            <a:r>
+              <a:rPr lang="pl-PL" dirty="0">
+                <a:solidFill>
+                  <a:srgbClr val="464646"/>
+                </a:solidFill>
+              </a:rPr>
+              <a:t> dni (aby uchwycić </a:t>
+            </a:r>
+            <a:r>
+              <a:rPr lang="pl-PL" i="1" dirty="0"/>
+              <a:t>bardziej stabilne</a:t>
+            </a:r>
+            <a:r>
+              <a:rPr lang="pl-PL" dirty="0">
+                <a:solidFill>
+                  <a:srgbClr val="464646"/>
+                </a:solidFill>
+              </a:rPr>
+              <a:t>, </a:t>
+            </a:r>
+          </a:p>
+          <a:p>
+            <a:pPr lvl="1">
+              <a:lnSpc>
+                <a:spcPct val="120000"/>
+              </a:lnSpc>
+              <a:defRPr sz="2000"/>
+            </a:pPr>
+            <a:r>
+              <a:rPr lang="pl-PL" dirty="0">
+                <a:solidFill>
+                  <a:srgbClr val="464646"/>
+                </a:solidFill>
+              </a:rPr>
+              <a:t>      </a:t>
+            </a:r>
+            <a:r>
+              <a:rPr lang="pl-PL" i="1" dirty="0"/>
+              <a:t>tygodniowe</a:t>
+            </a:r>
+            <a:r>
+              <a:rPr lang="pl-PL" dirty="0">
+                <a:solidFill>
+                  <a:srgbClr val="464646"/>
+                </a:solidFill>
+              </a:rPr>
+              <a:t> wzorce sprzedaży z dłuższego okresu),</a:t>
             </a:r>
           </a:p>
           <a:p>
@@ -11191,7 +11541,7 @@
         </p:blipFill>
         <p:spPr>
           <a:xfrm>
-            <a:off x="6298594" y="3130924"/>
+            <a:off x="6299480" y="3479800"/>
             <a:ext cx="5634879" cy="3096232"/>
           </a:xfrm>
           <a:prstGeom prst="rect">
@@ -11228,7 +11578,7 @@
         </p:blipFill>
         <p:spPr>
           <a:xfrm>
-            <a:off x="6275399" y="3130924"/>
+            <a:off x="6251317" y="3487448"/>
             <a:ext cx="5683042" cy="3096232"/>
           </a:xfrm>
           <a:prstGeom prst="rect">
@@ -12876,7 +13226,7 @@
         <p:spPr>
           <a:xfrm>
             <a:off x="270031" y="5414799"/>
-            <a:ext cx="6096000" cy="646331"/>
+            <a:ext cx="6096000" cy="923330"/>
           </a:xfrm>
           <a:prstGeom prst="rect">
             <a:avLst/>
@@ -12949,7 +13299,7 @@
             </a:r>
             <a:r>
               <a:rPr lang="pl-PL" b="1" dirty="0"/>
-              <a:t>osiągnął najlepsze wyniki, redukując błąd o 359 € względem modelu heurystycznego</a:t>
+              <a:t>osiągnął najlepsze wyniki, redukując błąd (MAE) o 359 € względem modelu heurystycznego</a:t>
             </a:r>
             <a:r>
               <a:rPr lang="pl-PL" dirty="0"/>
@@ -15646,6 +15996,51 @@
                       </p:childTnLst>
                     </p:cTn>
                   </p:par>
+                  <p:par>
+                    <p:cTn id="13" fill="hold">
+                      <p:stCondLst>
+                        <p:cond delay="indefinite"/>
+                      </p:stCondLst>
+                      <p:childTnLst>
+                        <p:par>
+                          <p:cTn id="14" fill="hold">
+                            <p:stCondLst>
+                              <p:cond delay="0"/>
+                            </p:stCondLst>
+                            <p:childTnLst>
+                              <p:par>
+                                <p:cTn id="15" presetID="1" presetClass="entr" presetSubtype="0" fill="hold" grpId="0" nodeType="clickEffect">
+                                  <p:stCondLst>
+                                    <p:cond delay="0"/>
+                                  </p:stCondLst>
+                                  <p:childTnLst>
+                                    <p:set>
+                                      <p:cBhvr>
+                                        <p:cTn id="16" dur="1" fill="hold">
+                                          <p:stCondLst>
+                                            <p:cond delay="0"/>
+                                          </p:stCondLst>
+                                        </p:cTn>
+                                        <p:tgtEl>
+                                          <p:spTgt spid="14"/>
+                                        </p:tgtEl>
+                                        <p:attrNameLst>
+                                          <p:attrName>style.visibility</p:attrName>
+                                        </p:attrNameLst>
+                                      </p:cBhvr>
+                                      <p:to>
+                                        <p:strVal val="visible"/>
+                                      </p:to>
+                                    </p:set>
+                                  </p:childTnLst>
+                                </p:cTn>
+                              </p:par>
+                            </p:childTnLst>
+                          </p:cTn>
+                        </p:par>
+                      </p:childTnLst>
+                    </p:cTn>
+                  </p:par>
                 </p:childTnLst>
               </p:cTn>
               <p:prevCondLst>
@@ -15670,6 +16065,7 @@
     <p:bldLst>
       <p:bldP spid="3" grpId="0"/>
       <p:bldP spid="9" grpId="0"/>
+      <p:bldP spid="14" grpId="0" animBg="1"/>
     </p:bldLst>
   </p:timing>
 </p:sld>
@@ -16767,8 +17163,8 @@
         </p:nvSpPr>
         <p:spPr>
           <a:xfrm>
-            <a:off x="6096000" y="2208810"/>
-            <a:ext cx="5693307" cy="1988237"/>
+            <a:off x="6096000" y="1586896"/>
+            <a:ext cx="5693307" cy="2726900"/>
           </a:xfrm>
           <a:prstGeom prst="rect">
             <a:avLst/>
@@ -16815,12 +17211,20 @@
               <a:defRPr sz="2000"/>
             </a:pPr>
             <a:r>
+              <a:rPr lang="pl-PL" sz="2000" b="1" dirty="0">
+                <a:solidFill>
+                  <a:srgbClr val="464646"/>
+                </a:solidFill>
+              </a:rPr>
+              <a:t>Comiesięczny</a:t>
+            </a:r>
+            <a:r>
               <a:rPr lang="pl-PL" sz="2000" dirty="0">
                 <a:solidFill>
                   <a:srgbClr val="464646"/>
                 </a:solidFill>
               </a:rPr>
-              <a:t>Comiesięczny </a:t>
+              <a:t> </a:t>
             </a:r>
             <a:r>
               <a:rPr lang="pl-PL" sz="2000" dirty="0" err="1">
@@ -16836,28 +17240,19 @@
                   <a:srgbClr val="464646"/>
                 </a:solidFill>
               </a:rPr>
-              <a:t> modelu (lub </a:t>
-            </a:r>
-            <a:r>
-              <a:rPr lang="pl-PL" dirty="0"/>
-              <a:t>dostosowana do tempa zmian w danych oraz potrzeb biznesowych</a:t>
-            </a:r>
-            <a:r>
-              <a:rPr lang="pl-PL" sz="2000" dirty="0">
+              <a:t> modelu </a:t>
+            </a:r>
+            <a:r>
+              <a:rPr lang="pl-PL" dirty="0">
                 <a:solidFill>
                   <a:srgbClr val="464646"/>
                 </a:solidFill>
               </a:rPr>
-              <a:t>,</a:t>
-            </a:r>
-            <a:endParaRPr lang="pl-PL" sz="2000" b="1" dirty="0">
-              <a:solidFill>
-                <a:srgbClr val="464646"/>
-              </a:solidFill>
-            </a:endParaRPr>
-          </a:p>
-          <a:p>
-            <a:pPr marL="800100" lvl="1" indent="-342900">
+              <a:t>jest to rozsądny punkt wyjścia, w praktyce        	częstotliwość powinna być dostosowana do tempa 	zmian w danych oraz potrzeb biznesowych </a:t>
+            </a:r>
+          </a:p>
+          <a:p>
+            <a:pPr marL="800100" lvl="1" indent="-342900" algn="just">
               <a:lnSpc>
                 <a:spcPct val="120000"/>
               </a:lnSpc>
